--- a/FinML/Open_lesson_graph_patterns/Presentation/Graph_patterns.pptx
+++ b/FinML/Open_lesson_graph_patterns/Presentation/Graph_patterns.pptx
@@ -6,7 +6,7 @@
     <p:sldMasterId id="2147483707" r:id="rId2"/>
   </p:sldMasterIdLst>
   <p:notesMasterIdLst>
-    <p:notesMasterId r:id="rId58"/>
+    <p:notesMasterId r:id="rId56"/>
   </p:notesMasterIdLst>
   <p:sldIdLst>
     <p:sldId id="257" r:id="rId3"/>
@@ -37,65 +37,63 @@
     <p:sldId id="412" r:id="rId28"/>
     <p:sldId id="413" r:id="rId29"/>
     <p:sldId id="414" r:id="rId30"/>
-    <p:sldId id="419" r:id="rId31"/>
-    <p:sldId id="482" r:id="rId32"/>
-    <p:sldId id="420" r:id="rId33"/>
-    <p:sldId id="421" r:id="rId34"/>
-    <p:sldId id="422" r:id="rId35"/>
-    <p:sldId id="423" r:id="rId36"/>
-    <p:sldId id="424" r:id="rId37"/>
-    <p:sldId id="485" r:id="rId38"/>
-    <p:sldId id="483" r:id="rId39"/>
-    <p:sldId id="484" r:id="rId40"/>
-    <p:sldId id="418" r:id="rId41"/>
-    <p:sldId id="281" r:id="rId42"/>
-    <p:sldId id="280" r:id="rId43"/>
-    <p:sldId id="366" r:id="rId44"/>
-    <p:sldId id="288" r:id="rId45"/>
-    <p:sldId id="474" r:id="rId46"/>
-    <p:sldId id="372" r:id="rId47"/>
-    <p:sldId id="475" r:id="rId48"/>
-    <p:sldId id="476" r:id="rId49"/>
-    <p:sldId id="477" r:id="rId50"/>
-    <p:sldId id="478" r:id="rId51"/>
-    <p:sldId id="479" r:id="rId52"/>
-    <p:sldId id="480" r:id="rId53"/>
-    <p:sldId id="401" r:id="rId54"/>
-    <p:sldId id="289" r:id="rId55"/>
-    <p:sldId id="302" r:id="rId56"/>
-    <p:sldId id="303" r:id="rId57"/>
+    <p:sldId id="420" r:id="rId31"/>
+    <p:sldId id="421" r:id="rId32"/>
+    <p:sldId id="422" r:id="rId33"/>
+    <p:sldId id="423" r:id="rId34"/>
+    <p:sldId id="424" r:id="rId35"/>
+    <p:sldId id="485" r:id="rId36"/>
+    <p:sldId id="483" r:id="rId37"/>
+    <p:sldId id="484" r:id="rId38"/>
+    <p:sldId id="418" r:id="rId39"/>
+    <p:sldId id="281" r:id="rId40"/>
+    <p:sldId id="280" r:id="rId41"/>
+    <p:sldId id="366" r:id="rId42"/>
+    <p:sldId id="288" r:id="rId43"/>
+    <p:sldId id="474" r:id="rId44"/>
+    <p:sldId id="372" r:id="rId45"/>
+    <p:sldId id="475" r:id="rId46"/>
+    <p:sldId id="476" r:id="rId47"/>
+    <p:sldId id="477" r:id="rId48"/>
+    <p:sldId id="478" r:id="rId49"/>
+    <p:sldId id="479" r:id="rId50"/>
+    <p:sldId id="480" r:id="rId51"/>
+    <p:sldId id="401" r:id="rId52"/>
+    <p:sldId id="289" r:id="rId53"/>
+    <p:sldId id="302" r:id="rId54"/>
+    <p:sldId id="303" r:id="rId55"/>
   </p:sldIdLst>
   <p:sldSz cx="9144000" cy="5143500" type="screen16x9"/>
   <p:notesSz cx="6858000" cy="9144000"/>
   <p:embeddedFontLst>
     <p:embeddedFont>
       <p:font typeface="AkayaTelivigala" panose="020F0502020204030204" pitchFamily="34" charset="0"/>
-      <p:regular r:id="rId59"/>
-      <p:bold r:id="rId60"/>
-      <p:italic r:id="rId61"/>
-      <p:boldItalic r:id="rId62"/>
+      <p:regular r:id="rId57"/>
+      <p:bold r:id="rId58"/>
+      <p:italic r:id="rId59"/>
+      <p:boldItalic r:id="rId60"/>
     </p:embeddedFont>
     <p:embeddedFont>
       <p:font typeface="Andale Mono" panose="020B0509000000000004" pitchFamily="49" charset="0"/>
-      <p:regular r:id="rId63"/>
+      <p:regular r:id="rId61"/>
     </p:embeddedFont>
     <p:embeddedFont>
       <p:font typeface="Calibri" panose="020F0502020204030204" pitchFamily="34" charset="0"/>
-      <p:regular r:id="rId64"/>
-      <p:bold r:id="rId65"/>
-      <p:italic r:id="rId66"/>
-      <p:boldItalic r:id="rId67"/>
+      <p:regular r:id="rId62"/>
+      <p:bold r:id="rId63"/>
+      <p:italic r:id="rId64"/>
+      <p:boldItalic r:id="rId65"/>
     </p:embeddedFont>
     <p:embeddedFont>
       <p:font typeface="Cambria Math" panose="02040503050406030204" pitchFamily="18" charset="0"/>
-      <p:regular r:id="rId68"/>
+      <p:regular r:id="rId66"/>
     </p:embeddedFont>
     <p:embeddedFont>
       <p:font typeface="Roboto" panose="02000000000000000000" pitchFamily="2" charset="0"/>
-      <p:regular r:id="rId69"/>
-      <p:bold r:id="rId70"/>
-      <p:italic r:id="rId71"/>
-      <p:boldItalic r:id="rId72"/>
+      <p:regular r:id="rId67"/>
+      <p:bold r:id="rId68"/>
+      <p:italic r:id="rId69"/>
+      <p:boldItalic r:id="rId70"/>
     </p:embeddedFont>
   </p:embeddedFontLst>
   <p:defaultTextStyle>
@@ -21544,1719 +21542,6 @@
           <a:p>
             <a:r>
               <a:rPr lang="ru-RU" dirty="0"/>
-              <a:t>Индикаторы технического анализа</a:t>
-            </a:r>
-            <a:endParaRPr lang="en-US" dirty="0"/>
-          </a:p>
-        </p:txBody>
-      </p:sp>
-      <p:sp>
-        <p:nvSpPr>
-          <p:cNvPr id="4" name="TextBox 3">
-            <a:extLst>
-              <a:ext uri="{FF2B5EF4-FFF2-40B4-BE49-F238E27FC236}">
-                <a16:creationId xmlns:a16="http://schemas.microsoft.com/office/drawing/2014/main" id="{D3F3A926-1997-DB46-B2C1-9800956DA368}"/>
-              </a:ext>
-            </a:extLst>
-          </p:cNvPr>
-          <p:cNvSpPr txBox="1"/>
-          <p:nvPr/>
-        </p:nvSpPr>
-        <p:spPr>
-          <a:xfrm>
-            <a:off x="500550" y="1736747"/>
-            <a:ext cx="5088252" cy="1996509"/>
-          </a:xfrm>
-          <a:prstGeom prst="rect">
-            <a:avLst/>
-          </a:prstGeom>
-          <a:noFill/>
-        </p:spPr>
-        <p:txBody>
-          <a:bodyPr wrap="none" rtlCol="0">
-            <a:spAutoFit/>
-          </a:bodyPr>
-          <a:lstStyle/>
-          <a:p>
-            <a:pPr marL="285750" indent="-285750">
-              <a:lnSpc>
-                <a:spcPct val="150000"/>
-              </a:lnSpc>
-              <a:buFont typeface="Arial" panose="020B0604020202020204" pitchFamily="34" charset="0"/>
-              <a:buChar char="•"/>
-            </a:pPr>
-            <a:r>
-              <a:rPr lang="ru-RU" b="1" dirty="0"/>
-              <a:t>Простая скользящая средняя (</a:t>
-            </a:r>
-            <a:r>
-              <a:rPr lang="en-US" b="1" dirty="0"/>
-              <a:t>SMA)</a:t>
-            </a:r>
-          </a:p>
-          <a:p>
-            <a:pPr marL="285750" indent="-285750">
-              <a:lnSpc>
-                <a:spcPct val="150000"/>
-              </a:lnSpc>
-              <a:buFont typeface="Arial" panose="020B0604020202020204" pitchFamily="34" charset="0"/>
-              <a:buChar char="•"/>
-            </a:pPr>
-            <a:r>
-              <a:rPr lang="ru-RU" b="0" i="0" u="none" strike="noStrike" dirty="0">
-                <a:solidFill>
-                  <a:srgbClr val="000000"/>
-                </a:solidFill>
-                <a:effectLst/>
-                <a:latin typeface="-webkit-standard"/>
-              </a:rPr>
-              <a:t>Экспоненциальная скользящая средняя (</a:t>
-            </a:r>
-            <a:r>
-              <a:rPr lang="en-US" b="0" i="0" u="none" strike="noStrike" dirty="0">
-                <a:solidFill>
-                  <a:srgbClr val="000000"/>
-                </a:solidFill>
-                <a:effectLst/>
-                <a:latin typeface="-webkit-standard"/>
-              </a:rPr>
-              <a:t>EMA)</a:t>
-            </a:r>
-            <a:endParaRPr lang="ru-RU" b="0" i="0" u="none" strike="noStrike" dirty="0">
-              <a:solidFill>
-                <a:srgbClr val="000000"/>
-              </a:solidFill>
-              <a:effectLst/>
-              <a:latin typeface="-webkit-standard"/>
-            </a:endParaRPr>
-          </a:p>
-          <a:p>
-            <a:pPr marL="285750" indent="-285750">
-              <a:lnSpc>
-                <a:spcPct val="150000"/>
-              </a:lnSpc>
-              <a:buFont typeface="Arial" panose="020B0604020202020204" pitchFamily="34" charset="0"/>
-              <a:buChar char="•"/>
-            </a:pPr>
-            <a:r>
-              <a:rPr lang="ru-RU" b="0" i="0" u="none" strike="noStrike" dirty="0">
-                <a:solidFill>
-                  <a:srgbClr val="000000"/>
-                </a:solidFill>
-                <a:effectLst/>
-                <a:latin typeface="-webkit-standard"/>
-              </a:rPr>
-              <a:t>Средняя величина роста и падения (</a:t>
-            </a:r>
-            <a:r>
-              <a:rPr lang="en-US" b="0" i="0" u="none" strike="noStrike" dirty="0">
-                <a:solidFill>
-                  <a:srgbClr val="000000"/>
-                </a:solidFill>
-                <a:effectLst/>
-                <a:latin typeface="-webkit-standard"/>
-              </a:rPr>
-              <a:t>RS)</a:t>
-            </a:r>
-          </a:p>
-          <a:p>
-            <a:pPr marL="285750" indent="-285750">
-              <a:lnSpc>
-                <a:spcPct val="150000"/>
-              </a:lnSpc>
-              <a:buFont typeface="Arial" panose="020B0604020202020204" pitchFamily="34" charset="0"/>
-              <a:buChar char="•"/>
-            </a:pPr>
-            <a:r>
-              <a:rPr lang="ru-RU" b="0" i="0" u="none" strike="noStrike" dirty="0">
-                <a:solidFill>
-                  <a:srgbClr val="000000"/>
-                </a:solidFill>
-                <a:effectLst/>
-                <a:latin typeface="-webkit-standard"/>
-              </a:rPr>
-              <a:t>Индикатор относительной силы (</a:t>
-            </a:r>
-            <a:r>
-              <a:rPr lang="en-US" b="0" i="0" u="none" strike="noStrike" dirty="0">
-                <a:solidFill>
-                  <a:srgbClr val="000000"/>
-                </a:solidFill>
-                <a:effectLst/>
-                <a:latin typeface="-webkit-standard"/>
-              </a:rPr>
-              <a:t>Relative Strength Index, RSI)</a:t>
-            </a:r>
-            <a:endParaRPr lang="en-US" dirty="0">
-              <a:latin typeface="-webkit-standard"/>
-            </a:endParaRPr>
-          </a:p>
-          <a:p>
-            <a:pPr marL="285750" indent="-285750">
-              <a:lnSpc>
-                <a:spcPct val="150000"/>
-              </a:lnSpc>
-              <a:buFont typeface="Arial" panose="020B0604020202020204" pitchFamily="34" charset="0"/>
-              <a:buChar char="•"/>
-            </a:pPr>
-            <a:r>
-              <a:rPr lang="en-US" b="0" i="0" u="none" strike="noStrike" dirty="0">
-                <a:solidFill>
-                  <a:srgbClr val="000000"/>
-                </a:solidFill>
-                <a:effectLst/>
-                <a:latin typeface="-webkit-standard"/>
-              </a:rPr>
-              <a:t>MACD (Moving Average Convergence Divergence)</a:t>
-            </a:r>
-          </a:p>
-          <a:p>
-            <a:pPr marL="285750" indent="-285750">
-              <a:lnSpc>
-                <a:spcPct val="150000"/>
-              </a:lnSpc>
-              <a:buFont typeface="Arial" panose="020B0604020202020204" pitchFamily="34" charset="0"/>
-              <a:buChar char="•"/>
-            </a:pPr>
-            <a:r>
-              <a:rPr lang="ru-RU" b="0" i="0" u="none" strike="noStrike" dirty="0">
-                <a:solidFill>
-                  <a:srgbClr val="000000"/>
-                </a:solidFill>
-                <a:effectLst/>
-                <a:latin typeface="-webkit-standard"/>
-              </a:rPr>
-              <a:t>Стохастический осциллятор (</a:t>
-            </a:r>
-            <a:r>
-              <a:rPr lang="en-US" b="0" i="0" u="none" strike="noStrike" dirty="0">
-                <a:solidFill>
-                  <a:srgbClr val="000000"/>
-                </a:solidFill>
-                <a:effectLst/>
-                <a:latin typeface="-webkit-standard"/>
-              </a:rPr>
-              <a:t>Stochastic Oscillator)</a:t>
-            </a:r>
-            <a:endParaRPr lang="en-US" dirty="0"/>
-          </a:p>
-        </p:txBody>
-      </p:sp>
-    </p:spTree>
-    <p:extLst>
-      <p:ext uri="{BB962C8B-B14F-4D97-AF65-F5344CB8AC3E}">
-        <p14:creationId xmlns:p14="http://schemas.microsoft.com/office/powerpoint/2010/main" val="3916728526"/>
-      </p:ext>
-    </p:extLst>
-  </p:cSld>
-  <p:clrMapOvr>
-    <a:masterClrMapping/>
-  </p:clrMapOvr>
-</p:sld>
-</file>
-
-<file path=ppt/slides/slide3.xml><?xml version="1.0" encoding="utf-8"?>
-<p:sld xmlns:a="http://schemas.openxmlformats.org/drawingml/2006/main" xmlns:r="http://schemas.openxmlformats.org/officeDocument/2006/relationships" xmlns:p="http://schemas.openxmlformats.org/presentationml/2006/main">
-  <p:cSld>
-    <p:spTree>
-      <p:nvGrpSpPr>
-        <p:cNvPr id="1" name="Shape 203"/>
-        <p:cNvGrpSpPr/>
-        <p:nvPr/>
-      </p:nvGrpSpPr>
-      <p:grpSpPr>
-        <a:xfrm>
-          <a:off x="0" y="0"/>
-          <a:ext cx="0" cy="0"/>
-          <a:chOff x="0" y="0"/>
-          <a:chExt cx="0" cy="0"/>
-        </a:xfrm>
-      </p:grpSpPr>
-      <p:sp>
-        <p:nvSpPr>
-          <p:cNvPr id="204" name="Google Shape;204;p48"/>
-          <p:cNvSpPr/>
-          <p:nvPr/>
-        </p:nvSpPr>
-        <p:spPr>
-          <a:xfrm>
-            <a:off x="630000" y="2703050"/>
-            <a:ext cx="1033800" cy="1983600"/>
-          </a:xfrm>
-          <a:prstGeom prst="rect">
-            <a:avLst/>
-          </a:prstGeom>
-          <a:solidFill>
-            <a:schemeClr val="accent4"/>
-          </a:solidFill>
-          <a:ln>
-            <a:noFill/>
-          </a:ln>
-        </p:spPr>
-        <p:txBody>
-          <a:bodyPr spcFirstLastPara="1" wrap="square" lIns="91425" tIns="91425" rIns="91425" bIns="91425" anchor="ctr" anchorCtr="0">
-            <a:noAutofit/>
-          </a:bodyPr>
-          <a:lstStyle/>
-          <a:p>
-            <a:pPr marL="0" lvl="0" indent="0" algn="l" rtl="0">
-              <a:spcBef>
-                <a:spcPts val="0"/>
-              </a:spcBef>
-              <a:spcAft>
-                <a:spcPts val="0"/>
-              </a:spcAft>
-              <a:buNone/>
-            </a:pPr>
-            <a:endParaRPr/>
-          </a:p>
-        </p:txBody>
-      </p:sp>
-      <p:sp>
-        <p:nvSpPr>
-          <p:cNvPr id="206" name="Google Shape;206;p48"/>
-          <p:cNvSpPr txBox="1">
-            <a:spLocks noGrp="1"/>
-          </p:cNvSpPr>
-          <p:nvPr>
-            <p:ph type="title"/>
-          </p:nvPr>
-        </p:nvSpPr>
-        <p:spPr>
-          <a:xfrm>
-            <a:off x="500550" y="821219"/>
-            <a:ext cx="8520600" cy="1032900"/>
-          </a:xfrm>
-          <a:prstGeom prst="rect">
-            <a:avLst/>
-          </a:prstGeom>
-        </p:spPr>
-        <p:txBody>
-          <a:bodyPr spcFirstLastPara="1" wrap="square" lIns="91425" tIns="91425" rIns="91425" bIns="91425" anchor="t" anchorCtr="0">
-            <a:noAutofit/>
-          </a:bodyPr>
-          <a:lstStyle/>
-          <a:p>
-            <a:pPr marL="0" lvl="0" indent="0" algn="l" rtl="0">
-              <a:spcBef>
-                <a:spcPts val="0"/>
-              </a:spcBef>
-              <a:spcAft>
-                <a:spcPts val="0"/>
-              </a:spcAft>
-              <a:buClr>
-                <a:schemeClr val="dk1"/>
-              </a:buClr>
-              <a:buSzPts val="1100"/>
-              <a:buFont typeface="Arial"/>
-              <a:buNone/>
-            </a:pPr>
-            <a:r>
-              <a:rPr lang="en-GB" sz="3200" dirty="0"/>
-              <a:t>ML </a:t>
-            </a:r>
-            <a:r>
-              <a:rPr lang="ru-RU" sz="3200" dirty="0"/>
-              <a:t>для финансового анализа</a:t>
-            </a:r>
-            <a:br>
-              <a:rPr lang="en-US" sz="3200" dirty="0"/>
-            </a:br>
-            <a:r>
-              <a:rPr lang="ru-RU" sz="2400" dirty="0"/>
-              <a:t>Введение в технический анализ: графики и индикаторы.</a:t>
-            </a:r>
-            <a:endParaRPr b="0" dirty="0"/>
-          </a:p>
-        </p:txBody>
-      </p:sp>
-      <p:sp>
-        <p:nvSpPr>
-          <p:cNvPr id="207" name="Google Shape;207;p48"/>
-          <p:cNvSpPr txBox="1">
-            <a:spLocks noGrp="1"/>
-          </p:cNvSpPr>
-          <p:nvPr>
-            <p:ph type="subTitle" idx="1"/>
-          </p:nvPr>
-        </p:nvSpPr>
-        <p:spPr>
-          <a:xfrm>
-            <a:off x="500550" y="520133"/>
-            <a:ext cx="7796700" cy="356926"/>
-          </a:xfrm>
-          <a:prstGeom prst="rect">
-            <a:avLst/>
-          </a:prstGeom>
-        </p:spPr>
-        <p:txBody>
-          <a:bodyPr spcFirstLastPara="1" wrap="square" lIns="91425" tIns="91425" rIns="91425" bIns="91425" anchor="t" anchorCtr="0">
-            <a:normAutofit fontScale="92500" lnSpcReduction="20000"/>
-          </a:bodyPr>
-          <a:lstStyle/>
-          <a:p>
-            <a:pPr marL="0" lvl="0" indent="0" algn="l" rtl="0">
-              <a:spcBef>
-                <a:spcPts val="0"/>
-              </a:spcBef>
-              <a:spcAft>
-                <a:spcPts val="0"/>
-              </a:spcAft>
-              <a:buNone/>
-            </a:pPr>
-            <a:r>
-              <a:rPr lang="ru-RU" dirty="0"/>
-              <a:t>Открытый урок</a:t>
-            </a:r>
-            <a:endParaRPr dirty="0"/>
-          </a:p>
-        </p:txBody>
-      </p:sp>
-      <p:sp>
-        <p:nvSpPr>
-          <p:cNvPr id="208" name="Google Shape;208;p48"/>
-          <p:cNvSpPr txBox="1">
-            <a:spLocks noGrp="1"/>
-          </p:cNvSpPr>
-          <p:nvPr>
-            <p:ph type="subTitle" idx="2"/>
-          </p:nvPr>
-        </p:nvSpPr>
-        <p:spPr>
-          <a:xfrm>
-            <a:off x="3082400" y="2302060"/>
-            <a:ext cx="5856300" cy="396900"/>
-          </a:xfrm>
-          <a:prstGeom prst="rect">
-            <a:avLst/>
-          </a:prstGeom>
-        </p:spPr>
-        <p:txBody>
-          <a:bodyPr spcFirstLastPara="1" wrap="square" lIns="91425" tIns="91425" rIns="91425" bIns="91425" anchor="t" anchorCtr="0">
-            <a:normAutofit lnSpcReduction="10000"/>
-          </a:bodyPr>
-          <a:lstStyle/>
-          <a:p>
-            <a:pPr marL="0" lvl="0" indent="0" algn="l" rtl="0">
-              <a:spcBef>
-                <a:spcPts val="0"/>
-              </a:spcBef>
-              <a:spcAft>
-                <a:spcPts val="0"/>
-              </a:spcAft>
-              <a:buNone/>
-            </a:pPr>
-            <a:r>
-              <a:rPr lang="ru" dirty="0"/>
-              <a:t>Игорь Стурейко</a:t>
-            </a:r>
-            <a:endParaRPr dirty="0"/>
-          </a:p>
-        </p:txBody>
-      </p:sp>
-      <p:pic>
-        <p:nvPicPr>
-          <p:cNvPr id="8" name="Google Shape;278;p64">
-            <a:extLst>
-              <a:ext uri="{FF2B5EF4-FFF2-40B4-BE49-F238E27FC236}">
-                <a16:creationId xmlns:a16="http://schemas.microsoft.com/office/drawing/2014/main" id="{DC03452F-6B2F-EA48-9B01-C3577A300545}"/>
-              </a:ext>
-            </a:extLst>
-          </p:cNvPr>
-          <p:cNvPicPr preferRelativeResize="0"/>
-          <p:nvPr/>
-        </p:nvPicPr>
-        <p:blipFill rotWithShape="1">
-          <a:blip r:embed="rId3">
-            <a:alphaModFix/>
-          </a:blip>
-          <a:srcRect/>
-          <a:stretch/>
-        </p:blipFill>
-        <p:spPr>
-          <a:xfrm>
-            <a:off x="8077621" y="258179"/>
-            <a:ext cx="652375" cy="652375"/>
-          </a:xfrm>
-          <a:prstGeom prst="rect">
-            <a:avLst/>
-          </a:prstGeom>
-          <a:noFill/>
-          <a:ln>
-            <a:noFill/>
-          </a:ln>
-        </p:spPr>
-      </p:pic>
-      <p:pic>
-        <p:nvPicPr>
-          <p:cNvPr id="12" name="Picture 11">
-            <a:extLst>
-              <a:ext uri="{FF2B5EF4-FFF2-40B4-BE49-F238E27FC236}">
-                <a16:creationId xmlns:a16="http://schemas.microsoft.com/office/drawing/2014/main" id="{DADBDA60-D1B3-5B41-A4D2-CDAE2DD6B009}"/>
-              </a:ext>
-            </a:extLst>
-          </p:cNvPr>
-          <p:cNvPicPr>
-            <a:picLocks noChangeAspect="1"/>
-          </p:cNvPicPr>
-          <p:nvPr/>
-        </p:nvPicPr>
-        <p:blipFill rotWithShape="1">
-          <a:blip r:embed="rId4">
-            <a:extLst>
-              <a:ext uri="{28A0092B-C50C-407E-A947-70E740481C1C}">
-                <a14:useLocalDpi xmlns:a14="http://schemas.microsoft.com/office/drawing/2010/main" val="0"/>
-              </a:ext>
-            </a:extLst>
-          </a:blip>
-          <a:srcRect l="-1" t="12156" r="295"/>
-          <a:stretch/>
-        </p:blipFill>
-        <p:spPr>
-          <a:xfrm>
-            <a:off x="832654" y="2865544"/>
-            <a:ext cx="1662292" cy="1657372"/>
-          </a:xfrm>
-          <a:prstGeom prst="ellipse">
-            <a:avLst/>
-          </a:prstGeom>
-          <a:ln w="12700" cap="rnd">
-            <a:solidFill>
-              <a:srgbClr val="333333"/>
-            </a:solidFill>
-          </a:ln>
-          <a:effectLst>
-            <a:outerShdw blurRad="381000" dist="292100" dir="5400000" sx="-80000" sy="-18000" rotWithShape="0">
-              <a:srgbClr val="000000">
-                <a:alpha val="22000"/>
-              </a:srgbClr>
-            </a:outerShdw>
-          </a:effectLst>
-          <a:scene3d>
-            <a:camera prst="orthographicFront"/>
-            <a:lightRig rig="contrasting" dir="t">
-              <a:rot lat="0" lon="0" rev="3000000"/>
-            </a:lightRig>
-          </a:scene3d>
-          <a:sp3d contourW="7620">
-            <a:bevelT w="95250" h="31750"/>
-            <a:contourClr>
-              <a:srgbClr val="333333"/>
-            </a:contourClr>
-          </a:sp3d>
-        </p:spPr>
-      </p:pic>
-      <p:sp>
-        <p:nvSpPr>
-          <p:cNvPr id="13" name="Google Shape;209;p48">
-            <a:extLst>
-              <a:ext uri="{FF2B5EF4-FFF2-40B4-BE49-F238E27FC236}">
-                <a16:creationId xmlns:a16="http://schemas.microsoft.com/office/drawing/2014/main" id="{D0D012C5-1A3B-EC4C-B8A7-64C8AF21B41A}"/>
-              </a:ext>
-            </a:extLst>
-          </p:cNvPr>
-          <p:cNvSpPr txBox="1">
-            <a:spLocks/>
-          </p:cNvSpPr>
-          <p:nvPr/>
-        </p:nvSpPr>
-        <p:spPr>
-          <a:xfrm>
-            <a:off x="3082400" y="2701811"/>
-            <a:ext cx="5938750" cy="2133660"/>
-          </a:xfrm>
-          <a:prstGeom prst="rect">
-            <a:avLst/>
-          </a:prstGeom>
-          <a:noFill/>
-          <a:ln>
-            <a:noFill/>
-          </a:ln>
-        </p:spPr>
-        <p:txBody>
-          <a:bodyPr spcFirstLastPara="1" wrap="square" lIns="91425" tIns="91425" rIns="91425" bIns="91425" anchor="t" anchorCtr="0">
-            <a:normAutofit fontScale="85000" lnSpcReduction="20000"/>
-          </a:bodyPr>
-          <a:lstStyle>
-            <a:lvl1pPr marL="0" lvl="0" algn="l">
-              <a:lnSpc>
-                <a:spcPct val="100000"/>
-              </a:lnSpc>
-              <a:spcBef>
-                <a:spcPts val="0"/>
-              </a:spcBef>
-              <a:spcAft>
-                <a:spcPts val="0"/>
-              </a:spcAft>
-              <a:buClr>
-                <a:schemeClr val="dk1"/>
-              </a:buClr>
-              <a:buSzPts val="1300"/>
-              <a:buNone/>
-              <a:defRPr sz="1300" b="0" i="0">
-                <a:solidFill>
-                  <a:schemeClr val="dk1"/>
-                </a:solidFill>
-                <a:latin typeface="+mn-lt"/>
-                <a:ea typeface="+mn-ea"/>
-                <a:cs typeface="+mn-cs"/>
-              </a:defRPr>
-            </a:lvl1pPr>
-            <a:lvl2pPr marL="457200" lvl="1" algn="l">
-              <a:lnSpc>
-                <a:spcPct val="100000"/>
-              </a:lnSpc>
-              <a:spcBef>
-                <a:spcPts val="0"/>
-              </a:spcBef>
-              <a:spcAft>
-                <a:spcPts val="0"/>
-              </a:spcAft>
-              <a:buClr>
-                <a:schemeClr val="dk1"/>
-              </a:buClr>
-              <a:buSzPts val="1500"/>
-              <a:buNone/>
-              <a:defRPr>
-                <a:solidFill>
-                  <a:schemeClr val="dk1"/>
-                </a:solidFill>
-                <a:latin typeface="+mn-lt"/>
-                <a:ea typeface="+mn-ea"/>
-                <a:cs typeface="+mn-cs"/>
-              </a:defRPr>
-            </a:lvl2pPr>
-            <a:lvl3pPr marL="914400" lvl="2" algn="l">
-              <a:lnSpc>
-                <a:spcPct val="100000"/>
-              </a:lnSpc>
-              <a:spcBef>
-                <a:spcPts val="0"/>
-              </a:spcBef>
-              <a:spcAft>
-                <a:spcPts val="0"/>
-              </a:spcAft>
-              <a:buClr>
-                <a:schemeClr val="dk1"/>
-              </a:buClr>
-              <a:buSzPts val="1300"/>
-              <a:buNone/>
-              <a:defRPr>
-                <a:solidFill>
-                  <a:schemeClr val="dk1"/>
-                </a:solidFill>
-                <a:latin typeface="+mn-lt"/>
-                <a:ea typeface="+mn-ea"/>
-                <a:cs typeface="+mn-cs"/>
-              </a:defRPr>
-            </a:lvl3pPr>
-            <a:lvl4pPr marL="1371600" lvl="3" algn="l">
-              <a:lnSpc>
-                <a:spcPct val="100000"/>
-              </a:lnSpc>
-              <a:spcBef>
-                <a:spcPts val="0"/>
-              </a:spcBef>
-              <a:spcAft>
-                <a:spcPts val="0"/>
-              </a:spcAft>
-              <a:buClr>
-                <a:schemeClr val="dk1"/>
-              </a:buClr>
-              <a:buSzPts val="1300"/>
-              <a:buNone/>
-              <a:defRPr>
-                <a:solidFill>
-                  <a:schemeClr val="dk1"/>
-                </a:solidFill>
-                <a:latin typeface="+mn-lt"/>
-                <a:ea typeface="+mn-ea"/>
-                <a:cs typeface="+mn-cs"/>
-              </a:defRPr>
-            </a:lvl4pPr>
-            <a:lvl5pPr marL="1828800" lvl="4" algn="l">
-              <a:lnSpc>
-                <a:spcPct val="100000"/>
-              </a:lnSpc>
-              <a:spcBef>
-                <a:spcPts val="0"/>
-              </a:spcBef>
-              <a:spcAft>
-                <a:spcPts val="0"/>
-              </a:spcAft>
-              <a:buClr>
-                <a:schemeClr val="dk1"/>
-              </a:buClr>
-              <a:buSzPts val="1300"/>
-              <a:buNone/>
-              <a:defRPr>
-                <a:solidFill>
-                  <a:schemeClr val="dk1"/>
-                </a:solidFill>
-                <a:latin typeface="+mn-lt"/>
-                <a:ea typeface="+mn-ea"/>
-                <a:cs typeface="+mn-cs"/>
-              </a:defRPr>
-            </a:lvl5pPr>
-            <a:lvl6pPr marL="2286000" lvl="5" algn="l">
-              <a:lnSpc>
-                <a:spcPct val="100000"/>
-              </a:lnSpc>
-              <a:spcBef>
-                <a:spcPts val="0"/>
-              </a:spcBef>
-              <a:spcAft>
-                <a:spcPts val="0"/>
-              </a:spcAft>
-              <a:buClr>
-                <a:schemeClr val="dk1"/>
-              </a:buClr>
-              <a:buSzPts val="1300"/>
-              <a:buNone/>
-              <a:defRPr>
-                <a:solidFill>
-                  <a:schemeClr val="dk1"/>
-                </a:solidFill>
-                <a:latin typeface="+mn-lt"/>
-                <a:ea typeface="+mn-ea"/>
-                <a:cs typeface="+mn-cs"/>
-              </a:defRPr>
-            </a:lvl6pPr>
-            <a:lvl7pPr marL="2743200" lvl="6" algn="l">
-              <a:lnSpc>
-                <a:spcPct val="100000"/>
-              </a:lnSpc>
-              <a:spcBef>
-                <a:spcPts val="0"/>
-              </a:spcBef>
-              <a:spcAft>
-                <a:spcPts val="0"/>
-              </a:spcAft>
-              <a:buClr>
-                <a:schemeClr val="dk1"/>
-              </a:buClr>
-              <a:buSzPts val="1300"/>
-              <a:buNone/>
-              <a:defRPr>
-                <a:solidFill>
-                  <a:schemeClr val="dk1"/>
-                </a:solidFill>
-                <a:latin typeface="+mn-lt"/>
-                <a:ea typeface="+mn-ea"/>
-                <a:cs typeface="+mn-cs"/>
-              </a:defRPr>
-            </a:lvl7pPr>
-            <a:lvl8pPr marL="3200400" lvl="7" algn="l">
-              <a:lnSpc>
-                <a:spcPct val="100000"/>
-              </a:lnSpc>
-              <a:spcBef>
-                <a:spcPts val="0"/>
-              </a:spcBef>
-              <a:spcAft>
-                <a:spcPts val="0"/>
-              </a:spcAft>
-              <a:buClr>
-                <a:schemeClr val="dk1"/>
-              </a:buClr>
-              <a:buSzPts val="1300"/>
-              <a:buNone/>
-              <a:defRPr>
-                <a:solidFill>
-                  <a:schemeClr val="dk1"/>
-                </a:solidFill>
-                <a:latin typeface="+mn-lt"/>
-                <a:ea typeface="+mn-ea"/>
-                <a:cs typeface="+mn-cs"/>
-              </a:defRPr>
-            </a:lvl8pPr>
-            <a:lvl9pPr marL="3657600" lvl="8" algn="l">
-              <a:lnSpc>
-                <a:spcPct val="100000"/>
-              </a:lnSpc>
-              <a:spcBef>
-                <a:spcPts val="0"/>
-              </a:spcBef>
-              <a:spcAft>
-                <a:spcPts val="0"/>
-              </a:spcAft>
-              <a:buClr>
-                <a:schemeClr val="dk1"/>
-              </a:buClr>
-              <a:buSzPts val="1300"/>
-              <a:buNone/>
-              <a:defRPr>
-                <a:solidFill>
-                  <a:schemeClr val="dk1"/>
-                </a:solidFill>
-                <a:latin typeface="+mn-lt"/>
-                <a:ea typeface="+mn-ea"/>
-                <a:cs typeface="+mn-cs"/>
-              </a:defRPr>
-            </a:lvl9pPr>
-          </a:lstStyle>
-          <a:p>
-            <a:pPr marL="1470025" indent="-1465263">
-              <a:tabLst>
-                <a:tab pos="1465263" algn="l"/>
-              </a:tabLst>
-            </a:pPr>
-            <a:r>
-              <a:rPr lang="ru-RU" sz="1150" b="1" kern="0" dirty="0"/>
-              <a:t>Руководитель курсов: </a:t>
-            </a:r>
-            <a:r>
-              <a:rPr lang="en-US" sz="1150" b="1" kern="0" dirty="0"/>
-              <a:t>	Reinforcement Learning, ML Professional, ML Basic, </a:t>
-            </a:r>
-            <a:br>
-              <a:rPr lang="en-US" sz="1150" b="1" kern="0" dirty="0"/>
-            </a:br>
-            <a:r>
-              <a:rPr lang="en-US" sz="1150" b="1" kern="0" dirty="0" err="1"/>
-              <a:t>MLOps</a:t>
-            </a:r>
-            <a:r>
-              <a:rPr lang="en-US" sz="1150" b="1" kern="0" dirty="0"/>
-              <a:t>, </a:t>
-            </a:r>
-            <a:r>
-              <a:rPr lang="en-US" sz="1150" b="1" kern="0" dirty="0" err="1"/>
-              <a:t>FinML</a:t>
-            </a:r>
-            <a:endParaRPr lang="en-US" sz="1150" b="1" kern="0" dirty="0"/>
-          </a:p>
-          <a:p>
-            <a:pPr rtl="0"/>
-            <a:endParaRPr lang="en-US" sz="1150" b="1" kern="0" dirty="0"/>
-          </a:p>
-          <a:p>
-            <a:pPr rtl="0"/>
-            <a:r>
-              <a:rPr lang="en-US" sz="1150" b="1" kern="0" dirty="0" err="1"/>
-              <a:t>Teamlead</a:t>
-            </a:r>
-            <a:r>
-              <a:rPr lang="en-US" sz="1150" b="1" kern="0" dirty="0"/>
-              <a:t>, </a:t>
-            </a:r>
-            <a:r>
-              <a:rPr lang="ru-RU" sz="1150" b="1" kern="0" dirty="0"/>
-              <a:t>главный инженер проекта, </a:t>
-            </a:r>
-          </a:p>
-          <a:p>
-            <a:pPr rtl="0"/>
-            <a:r>
-              <a:rPr lang="ru-RU" sz="1150" b="1" kern="0" dirty="0"/>
-              <a:t>Физический факультет МГУ, </a:t>
-            </a:r>
-            <a:r>
-              <a:rPr lang="en-US" sz="1150" b="1" kern="0" dirty="0"/>
-              <a:t>PhD </a:t>
-            </a:r>
-            <a:r>
-              <a:rPr lang="ru-RU" sz="1150" b="1" kern="0" dirty="0"/>
-              <a:t>теоретическая физика</a:t>
-            </a:r>
-          </a:p>
-          <a:p>
-            <a:pPr rtl="0"/>
-            <a:endParaRPr lang="ru-RU" sz="1150" kern="0" dirty="0"/>
-          </a:p>
-          <a:p>
-            <a:pPr rtl="0"/>
-            <a:r>
-              <a:rPr lang="ru-RU" sz="1150" b="1" kern="0" dirty="0"/>
-              <a:t>Опыт:</a:t>
-            </a:r>
-            <a:endParaRPr lang="ru-RU" sz="1150" kern="0" dirty="0"/>
-          </a:p>
-          <a:p>
-            <a:pPr rtl="0"/>
-            <a:r>
-              <a:rPr lang="ru-RU" sz="1150" kern="0" dirty="0"/>
-              <a:t>Более 15 лет занимался прикладной математикой и мат моделированием</a:t>
-            </a:r>
-          </a:p>
-          <a:p>
-            <a:pPr rtl="0"/>
-            <a:r>
-              <a:rPr lang="ru-RU" sz="1150" kern="0" dirty="0"/>
-              <a:t>(</a:t>
-            </a:r>
-            <a:r>
-              <a:rPr lang="en-US" sz="1150" kern="0" dirty="0"/>
-              <a:t>Data Scientist) (Python, </a:t>
-            </a:r>
-            <a:r>
-              <a:rPr lang="ru-RU" sz="1150" kern="0" dirty="0"/>
-              <a:t>С++) в НИИ ПАО Газпром</a:t>
-            </a:r>
-          </a:p>
-          <a:p>
-            <a:pPr rtl="0"/>
-            <a:endParaRPr lang="ru-RU" sz="1150" kern="0" dirty="0"/>
-          </a:p>
-          <a:p>
-            <a:pPr rtl="0"/>
-            <a:endParaRPr lang="ru-RU" sz="1150" b="1" kern="0" dirty="0"/>
-          </a:p>
-          <a:p>
-            <a:pPr rtl="0"/>
-            <a:r>
-              <a:rPr lang="ru-RU" sz="1150" b="1" kern="0" dirty="0"/>
-              <a:t>@</a:t>
-            </a:r>
-            <a:r>
-              <a:rPr lang="en-US" sz="1150" b="1" kern="0" dirty="0" err="1"/>
-              <a:t>stureiko</a:t>
-            </a:r>
-            <a:r>
-              <a:rPr lang="en-US" sz="1150" b="1" kern="0" dirty="0"/>
-              <a:t> (TG)</a:t>
-            </a:r>
-          </a:p>
-          <a:p>
-            <a:pPr rtl="0"/>
-            <a:endParaRPr lang="en-US" sz="1150" b="1" kern="0" dirty="0"/>
-          </a:p>
-          <a:p>
-            <a:pPr rtl="0"/>
-            <a:r>
-              <a:rPr lang="en-US" sz="1150" b="1" kern="0" dirty="0"/>
-              <a:t>LinkedIn: </a:t>
-            </a:r>
-            <a:r>
-              <a:rPr lang="en-US" sz="1150" kern="0" dirty="0">
-                <a:hlinkClick r:id="rId5"/>
-              </a:rPr>
-              <a:t>igor-stureiko</a:t>
-            </a:r>
-            <a:r>
-              <a:rPr lang="en-US" sz="1150" kern="0" dirty="0"/>
-              <a:t> </a:t>
-            </a:r>
-          </a:p>
-          <a:p>
-            <a:pPr rtl="0"/>
-            <a:endParaRPr lang="en-US" sz="1150" kern="0" dirty="0"/>
-          </a:p>
-          <a:p>
-            <a:pPr rtl="0"/>
-            <a:r>
-              <a:rPr lang="en-US" sz="1150" b="1" kern="0" dirty="0"/>
-              <a:t>@</a:t>
-            </a:r>
-            <a:r>
-              <a:rPr lang="en-US" sz="1150" b="1" kern="0" dirty="0" err="1"/>
-              <a:t>rl_fintech</a:t>
-            </a:r>
-            <a:r>
-              <a:rPr lang="en-US" sz="1150" b="1" kern="0" dirty="0"/>
-              <a:t> </a:t>
-            </a:r>
-            <a:r>
-              <a:rPr lang="en-US" sz="1150" kern="0" dirty="0"/>
-              <a:t>(</a:t>
-            </a:r>
-            <a:r>
-              <a:rPr lang="ru-RU" sz="1150" kern="0" dirty="0"/>
-              <a:t>Мой канал о моделях в бизнесе)</a:t>
-            </a:r>
-            <a:endParaRPr lang="ru-RU" sz="1400" kern="0" dirty="0"/>
-          </a:p>
-        </p:txBody>
-      </p:sp>
-    </p:spTree>
-  </p:cSld>
-  <p:clrMapOvr>
-    <a:masterClrMapping/>
-  </p:clrMapOvr>
-</p:sld>
-</file>
-
-<file path=ppt/slides/slide30.xml><?xml version="1.0" encoding="utf-8"?>
-<p:sld xmlns:a="http://schemas.openxmlformats.org/drawingml/2006/main" xmlns:r="http://schemas.openxmlformats.org/officeDocument/2006/relationships" xmlns:p="http://schemas.openxmlformats.org/presentationml/2006/main">
-  <p:cSld>
-    <p:spTree>
-      <p:nvGrpSpPr>
-        <p:cNvPr id="1" name=""/>
-        <p:cNvGrpSpPr/>
-        <p:nvPr/>
-      </p:nvGrpSpPr>
-      <p:grpSpPr>
-        <a:xfrm>
-          <a:off x="0" y="0"/>
-          <a:ext cx="0" cy="0"/>
-          <a:chOff x="0" y="0"/>
-          <a:chExt cx="0" cy="0"/>
-        </a:xfrm>
-      </p:grpSpPr>
-      <p:sp>
-        <p:nvSpPr>
-          <p:cNvPr id="3" name="Title 2">
-            <a:extLst>
-              <a:ext uri="{FF2B5EF4-FFF2-40B4-BE49-F238E27FC236}">
-                <a16:creationId xmlns:a16="http://schemas.microsoft.com/office/drawing/2014/main" id="{B53200C2-EEDC-A348-A3AC-B435BA04C6F0}"/>
-              </a:ext>
-            </a:extLst>
-          </p:cNvPr>
-          <p:cNvSpPr>
-            <a:spLocks noGrp="1"/>
-          </p:cNvSpPr>
-          <p:nvPr>
-            <p:ph type="title"/>
-          </p:nvPr>
-        </p:nvSpPr>
-        <p:spPr/>
-        <p:txBody>
-          <a:bodyPr/>
-          <a:lstStyle/>
-          <a:p>
-            <a:r>
-              <a:rPr lang="ru-RU" dirty="0"/>
-              <a:t>Паттерны технического анализа</a:t>
-            </a:r>
-            <a:endParaRPr lang="en-US" dirty="0"/>
-          </a:p>
-        </p:txBody>
-      </p:sp>
-      <p:grpSp>
-        <p:nvGrpSpPr>
-          <p:cNvPr id="20" name="Group 19">
-            <a:extLst>
-              <a:ext uri="{FF2B5EF4-FFF2-40B4-BE49-F238E27FC236}">
-                <a16:creationId xmlns:a16="http://schemas.microsoft.com/office/drawing/2014/main" id="{C0DCD891-3DF3-6F44-AFA5-9A718FB6E618}"/>
-              </a:ext>
-            </a:extLst>
-          </p:cNvPr>
-          <p:cNvGrpSpPr/>
-          <p:nvPr/>
-        </p:nvGrpSpPr>
-        <p:grpSpPr>
-          <a:xfrm>
-            <a:off x="0" y="1176459"/>
-            <a:ext cx="9144000" cy="3571368"/>
-            <a:chOff x="0" y="1251930"/>
-            <a:chExt cx="9144000" cy="3571368"/>
-          </a:xfrm>
-        </p:grpSpPr>
-        <p:pic>
-          <p:nvPicPr>
-            <p:cNvPr id="5" name="Picture 4">
-              <a:extLst>
-                <a:ext uri="{FF2B5EF4-FFF2-40B4-BE49-F238E27FC236}">
-                  <a16:creationId xmlns:a16="http://schemas.microsoft.com/office/drawing/2014/main" id="{C7B66522-5FB5-AE48-9F26-CA62F2B8F209}"/>
-                </a:ext>
-              </a:extLst>
-            </p:cNvPr>
-            <p:cNvPicPr>
-              <a:picLocks noChangeAspect="1"/>
-            </p:cNvPicPr>
-            <p:nvPr/>
-          </p:nvPicPr>
-          <p:blipFill rotWithShape="1">
-            <a:blip r:embed="rId2"/>
-            <a:srcRect t="18469"/>
-            <a:stretch/>
-          </p:blipFill>
-          <p:spPr>
-            <a:xfrm>
-              <a:off x="0" y="1251930"/>
-              <a:ext cx="9144000" cy="3571368"/>
-            </a:xfrm>
-            <a:prstGeom prst="rect">
-              <a:avLst/>
-            </a:prstGeom>
-          </p:spPr>
-        </p:pic>
-        <p:sp>
-          <p:nvSpPr>
-            <p:cNvPr id="7" name="TextBox 6">
-              <a:extLst>
-                <a:ext uri="{FF2B5EF4-FFF2-40B4-BE49-F238E27FC236}">
-                  <a16:creationId xmlns:a16="http://schemas.microsoft.com/office/drawing/2014/main" id="{32CF8BCC-AA17-4C45-B4C9-2875F7D9E4FC}"/>
-                </a:ext>
-              </a:extLst>
-            </p:cNvPr>
-            <p:cNvSpPr txBox="1"/>
-            <p:nvPr/>
-          </p:nvSpPr>
-          <p:spPr>
-            <a:xfrm>
-              <a:off x="104327" y="4337842"/>
-              <a:ext cx="1487908" cy="261610"/>
-            </a:xfrm>
-            <a:prstGeom prst="rect">
-              <a:avLst/>
-            </a:prstGeom>
-            <a:solidFill>
-              <a:schemeClr val="bg1"/>
-            </a:solidFill>
-          </p:spPr>
-          <p:txBody>
-            <a:bodyPr wrap="none" rtlCol="0" anchor="t">
-              <a:spAutoFit/>
-            </a:bodyPr>
-            <a:lstStyle/>
-            <a:p>
-              <a:r>
-                <a:rPr lang="ru-RU" sz="1100" dirty="0"/>
-                <a:t>      Двойное дно      </a:t>
-              </a:r>
-              <a:endParaRPr lang="en-US" sz="1100" dirty="0"/>
-            </a:p>
-          </p:txBody>
-        </p:sp>
-        <p:sp>
-          <p:nvSpPr>
-            <p:cNvPr id="10" name="Rectangle 9">
-              <a:extLst>
-                <a:ext uri="{FF2B5EF4-FFF2-40B4-BE49-F238E27FC236}">
-                  <a16:creationId xmlns:a16="http://schemas.microsoft.com/office/drawing/2014/main" id="{C7CB323D-6FDE-C04C-A72E-BC27B23A05F6}"/>
-                </a:ext>
-              </a:extLst>
-            </p:cNvPr>
-            <p:cNvSpPr/>
-            <p:nvPr/>
-          </p:nvSpPr>
-          <p:spPr>
-            <a:xfrm>
-              <a:off x="1951538" y="4337842"/>
-              <a:ext cx="1521955" cy="356738"/>
-            </a:xfrm>
-            <a:prstGeom prst="rect">
-              <a:avLst/>
-            </a:prstGeom>
-            <a:solidFill>
-              <a:schemeClr val="bg1"/>
-            </a:solidFill>
-            <a:ln>
-              <a:solidFill>
-                <a:schemeClr val="bg1"/>
-              </a:solidFill>
-            </a:ln>
-          </p:spPr>
-          <p:style>
-            <a:lnRef idx="2">
-              <a:schemeClr val="accent1">
-                <a:shade val="50000"/>
-              </a:schemeClr>
-            </a:lnRef>
-            <a:fillRef idx="1">
-              <a:schemeClr val="accent1"/>
-            </a:fillRef>
-            <a:effectRef idx="0">
-              <a:schemeClr val="accent1"/>
-            </a:effectRef>
-            <a:fontRef idx="minor">
-              <a:schemeClr val="lt1"/>
-            </a:fontRef>
-          </p:style>
-          <p:txBody>
-            <a:bodyPr rtlCol="0" anchor="t"/>
-            <a:lstStyle/>
-            <a:p>
-              <a:pPr algn="ctr"/>
-              <a:r>
-                <a:rPr lang="ru-RU" sz="1100" dirty="0">
-                  <a:solidFill>
-                    <a:schemeClr val="tx1"/>
-                  </a:solidFill>
-                </a:rPr>
-                <a:t>Перевернутые голова и плечи</a:t>
-              </a:r>
-              <a:endParaRPr lang="en-US" sz="1100" dirty="0">
-                <a:solidFill>
-                  <a:schemeClr val="tx1"/>
-                </a:solidFill>
-              </a:endParaRPr>
-            </a:p>
-          </p:txBody>
-        </p:sp>
-        <p:sp>
-          <p:nvSpPr>
-            <p:cNvPr id="11" name="Rectangle 10">
-              <a:extLst>
-                <a:ext uri="{FF2B5EF4-FFF2-40B4-BE49-F238E27FC236}">
-                  <a16:creationId xmlns:a16="http://schemas.microsoft.com/office/drawing/2014/main" id="{D878B7BF-F84D-1D45-AA27-D5016C7D7E35}"/>
-                </a:ext>
-              </a:extLst>
-            </p:cNvPr>
-            <p:cNvSpPr/>
-            <p:nvPr/>
-          </p:nvSpPr>
-          <p:spPr>
-            <a:xfrm>
-              <a:off x="3786049" y="2540593"/>
-              <a:ext cx="1521955" cy="356738"/>
-            </a:xfrm>
-            <a:prstGeom prst="rect">
-              <a:avLst/>
-            </a:prstGeom>
-            <a:solidFill>
-              <a:schemeClr val="bg1"/>
-            </a:solidFill>
-            <a:ln>
-              <a:solidFill>
-                <a:schemeClr val="bg1"/>
-              </a:solidFill>
-            </a:ln>
-          </p:spPr>
-          <p:style>
-            <a:lnRef idx="2">
-              <a:schemeClr val="accent1">
-                <a:shade val="50000"/>
-              </a:schemeClr>
-            </a:lnRef>
-            <a:fillRef idx="1">
-              <a:schemeClr val="accent1"/>
-            </a:fillRef>
-            <a:effectRef idx="0">
-              <a:schemeClr val="accent1"/>
-            </a:effectRef>
-            <a:fontRef idx="minor">
-              <a:schemeClr val="lt1"/>
-            </a:fontRef>
-          </p:style>
-          <p:txBody>
-            <a:bodyPr rtlCol="0" anchor="t"/>
-            <a:lstStyle/>
-            <a:p>
-              <a:pPr algn="ctr"/>
-              <a:r>
-                <a:rPr lang="ru-RU" sz="1100" dirty="0">
-                  <a:solidFill>
-                    <a:schemeClr val="tx1"/>
-                  </a:solidFill>
-                </a:rPr>
-                <a:t>Восходящий клин</a:t>
-              </a:r>
-              <a:endParaRPr lang="en-US" sz="1100" dirty="0">
-                <a:solidFill>
-                  <a:schemeClr val="tx1"/>
-                </a:solidFill>
-              </a:endParaRPr>
-            </a:p>
-          </p:txBody>
-        </p:sp>
-        <p:sp>
-          <p:nvSpPr>
-            <p:cNvPr id="12" name="Rectangle 11">
-              <a:extLst>
-                <a:ext uri="{FF2B5EF4-FFF2-40B4-BE49-F238E27FC236}">
-                  <a16:creationId xmlns:a16="http://schemas.microsoft.com/office/drawing/2014/main" id="{0BA4CCBA-C253-8048-9593-18CDB0B76901}"/>
-                </a:ext>
-              </a:extLst>
-            </p:cNvPr>
-            <p:cNvSpPr/>
-            <p:nvPr/>
-          </p:nvSpPr>
-          <p:spPr>
-            <a:xfrm>
-              <a:off x="3811022" y="4337842"/>
-              <a:ext cx="1521955" cy="356738"/>
-            </a:xfrm>
-            <a:prstGeom prst="rect">
-              <a:avLst/>
-            </a:prstGeom>
-            <a:solidFill>
-              <a:schemeClr val="bg1"/>
-            </a:solidFill>
-            <a:ln>
-              <a:solidFill>
-                <a:schemeClr val="bg1"/>
-              </a:solidFill>
-            </a:ln>
-          </p:spPr>
-          <p:style>
-            <a:lnRef idx="2">
-              <a:schemeClr val="accent1">
-                <a:shade val="50000"/>
-              </a:schemeClr>
-            </a:lnRef>
-            <a:fillRef idx="1">
-              <a:schemeClr val="accent1"/>
-            </a:fillRef>
-            <a:effectRef idx="0">
-              <a:schemeClr val="accent1"/>
-            </a:effectRef>
-            <a:fontRef idx="minor">
-              <a:schemeClr val="lt1"/>
-            </a:fontRef>
-          </p:style>
-          <p:txBody>
-            <a:bodyPr rtlCol="0" anchor="t"/>
-            <a:lstStyle/>
-            <a:p>
-              <a:pPr algn="ctr"/>
-              <a:r>
-                <a:rPr lang="ru-RU" sz="1100" dirty="0">
-                  <a:solidFill>
-                    <a:schemeClr val="tx1"/>
-                  </a:solidFill>
-                </a:rPr>
-                <a:t>Нисходящий клин</a:t>
-              </a:r>
-              <a:endParaRPr lang="en-US" sz="1100" dirty="0">
-                <a:solidFill>
-                  <a:schemeClr val="tx1"/>
-                </a:solidFill>
-              </a:endParaRPr>
-            </a:p>
-          </p:txBody>
-        </p:sp>
-        <p:sp>
-          <p:nvSpPr>
-            <p:cNvPr id="13" name="Rectangle 12">
-              <a:extLst>
-                <a:ext uri="{FF2B5EF4-FFF2-40B4-BE49-F238E27FC236}">
-                  <a16:creationId xmlns:a16="http://schemas.microsoft.com/office/drawing/2014/main" id="{E268D6F5-ACD6-D449-91A3-CA085FFDBCE8}"/>
-                </a:ext>
-              </a:extLst>
-            </p:cNvPr>
-            <p:cNvSpPr/>
-            <p:nvPr/>
-          </p:nvSpPr>
-          <p:spPr>
-            <a:xfrm>
-              <a:off x="5475904" y="2540593"/>
-              <a:ext cx="1765653" cy="356738"/>
-            </a:xfrm>
-            <a:prstGeom prst="rect">
-              <a:avLst/>
-            </a:prstGeom>
-            <a:solidFill>
-              <a:schemeClr val="bg1"/>
-            </a:solidFill>
-            <a:ln>
-              <a:solidFill>
-                <a:schemeClr val="bg1"/>
-              </a:solidFill>
-            </a:ln>
-          </p:spPr>
-          <p:style>
-            <a:lnRef idx="2">
-              <a:schemeClr val="accent1">
-                <a:shade val="50000"/>
-              </a:schemeClr>
-            </a:lnRef>
-            <a:fillRef idx="1">
-              <a:schemeClr val="accent1"/>
-            </a:fillRef>
-            <a:effectRef idx="0">
-              <a:schemeClr val="accent1"/>
-            </a:effectRef>
-            <a:fontRef idx="minor">
-              <a:schemeClr val="lt1"/>
-            </a:fontRef>
-          </p:style>
-          <p:txBody>
-            <a:bodyPr rtlCol="0" anchor="t"/>
-            <a:lstStyle/>
-            <a:p>
-              <a:pPr algn="ctr"/>
-              <a:r>
-                <a:rPr lang="ru-RU" sz="1100" dirty="0">
-                  <a:solidFill>
-                    <a:schemeClr val="tx1"/>
-                  </a:solidFill>
-                </a:rPr>
-                <a:t>Восходящий треугольник</a:t>
-              </a:r>
-              <a:endParaRPr lang="en-US" sz="1100" dirty="0">
-                <a:solidFill>
-                  <a:schemeClr val="tx1"/>
-                </a:solidFill>
-              </a:endParaRPr>
-            </a:p>
-          </p:txBody>
-        </p:sp>
-        <p:sp>
-          <p:nvSpPr>
-            <p:cNvPr id="14" name="Rectangle 13">
-              <a:extLst>
-                <a:ext uri="{FF2B5EF4-FFF2-40B4-BE49-F238E27FC236}">
-                  <a16:creationId xmlns:a16="http://schemas.microsoft.com/office/drawing/2014/main" id="{05F407F7-B16D-8E48-A777-B5C10BD28052}"/>
-                </a:ext>
-              </a:extLst>
-            </p:cNvPr>
-            <p:cNvSpPr/>
-            <p:nvPr/>
-          </p:nvSpPr>
-          <p:spPr>
-            <a:xfrm>
-              <a:off x="5403258" y="4337842"/>
-              <a:ext cx="2032902" cy="356738"/>
-            </a:xfrm>
-            <a:prstGeom prst="rect">
-              <a:avLst/>
-            </a:prstGeom>
-            <a:solidFill>
-              <a:schemeClr val="bg1"/>
-            </a:solidFill>
-            <a:ln>
-              <a:solidFill>
-                <a:schemeClr val="bg1"/>
-              </a:solidFill>
-            </a:ln>
-          </p:spPr>
-          <p:style>
-            <a:lnRef idx="2">
-              <a:schemeClr val="accent1">
-                <a:shade val="50000"/>
-              </a:schemeClr>
-            </a:lnRef>
-            <a:fillRef idx="1">
-              <a:schemeClr val="accent1"/>
-            </a:fillRef>
-            <a:effectRef idx="0">
-              <a:schemeClr val="accent1"/>
-            </a:effectRef>
-            <a:fontRef idx="minor">
-              <a:schemeClr val="lt1"/>
-            </a:fontRef>
-          </p:style>
-          <p:txBody>
-            <a:bodyPr rtlCol="0" anchor="t"/>
-            <a:lstStyle/>
-            <a:p>
-              <a:pPr algn="ctr"/>
-              <a:r>
-                <a:rPr lang="ru-RU" sz="1100" dirty="0">
-                  <a:solidFill>
-                    <a:schemeClr val="tx1"/>
-                  </a:solidFill>
-                </a:rPr>
-                <a:t>Нисходящий треугольник</a:t>
-              </a:r>
-              <a:endParaRPr lang="en-US" sz="1100" dirty="0">
-                <a:solidFill>
-                  <a:schemeClr val="tx1"/>
-                </a:solidFill>
-              </a:endParaRPr>
-            </a:p>
-          </p:txBody>
-        </p:sp>
-        <p:sp>
-          <p:nvSpPr>
-            <p:cNvPr id="16" name="Rectangle 15">
-              <a:extLst>
-                <a:ext uri="{FF2B5EF4-FFF2-40B4-BE49-F238E27FC236}">
-                  <a16:creationId xmlns:a16="http://schemas.microsoft.com/office/drawing/2014/main" id="{F615F8BC-FD92-8E48-830C-7F8018879AA6}"/>
-                </a:ext>
-              </a:extLst>
-            </p:cNvPr>
-            <p:cNvSpPr/>
-            <p:nvPr/>
-          </p:nvSpPr>
-          <p:spPr>
-            <a:xfrm>
-              <a:off x="1765038" y="2540593"/>
-              <a:ext cx="1808423" cy="356738"/>
-            </a:xfrm>
-            <a:prstGeom prst="rect">
-              <a:avLst/>
-            </a:prstGeom>
-            <a:solidFill>
-              <a:schemeClr val="bg1"/>
-            </a:solidFill>
-            <a:ln>
-              <a:solidFill>
-                <a:schemeClr val="bg1"/>
-              </a:solidFill>
-            </a:ln>
-          </p:spPr>
-          <p:style>
-            <a:lnRef idx="2">
-              <a:schemeClr val="accent1">
-                <a:shade val="50000"/>
-              </a:schemeClr>
-            </a:lnRef>
-            <a:fillRef idx="1">
-              <a:schemeClr val="accent1"/>
-            </a:fillRef>
-            <a:effectRef idx="0">
-              <a:schemeClr val="accent1"/>
-            </a:effectRef>
-            <a:fontRef idx="minor">
-              <a:schemeClr val="lt1"/>
-            </a:fontRef>
-          </p:style>
-          <p:txBody>
-            <a:bodyPr rtlCol="0" anchor="t"/>
-            <a:lstStyle/>
-            <a:p>
-              <a:pPr algn="ctr"/>
-              <a:r>
-                <a:rPr lang="ru-RU" sz="1100" dirty="0">
-                  <a:solidFill>
-                    <a:schemeClr val="tx1"/>
-                  </a:solidFill>
-                </a:rPr>
-                <a:t>Голова и плечи</a:t>
-              </a:r>
-              <a:endParaRPr lang="en-US" sz="1100" dirty="0">
-                <a:solidFill>
-                  <a:schemeClr val="tx1"/>
-                </a:solidFill>
-              </a:endParaRPr>
-            </a:p>
-          </p:txBody>
-        </p:sp>
-        <p:sp>
-          <p:nvSpPr>
-            <p:cNvPr id="17" name="Rectangle 16">
-              <a:extLst>
-                <a:ext uri="{FF2B5EF4-FFF2-40B4-BE49-F238E27FC236}">
-                  <a16:creationId xmlns:a16="http://schemas.microsoft.com/office/drawing/2014/main" id="{F3B7DC51-41B2-9C4E-96A6-4EFCEBA9BE73}"/>
-                </a:ext>
-              </a:extLst>
-            </p:cNvPr>
-            <p:cNvSpPr/>
-            <p:nvPr/>
-          </p:nvSpPr>
-          <p:spPr>
-            <a:xfrm>
-              <a:off x="12274" y="2540593"/>
-              <a:ext cx="1612042" cy="356738"/>
-            </a:xfrm>
-            <a:prstGeom prst="rect">
-              <a:avLst/>
-            </a:prstGeom>
-            <a:solidFill>
-              <a:schemeClr val="bg1"/>
-            </a:solidFill>
-            <a:ln>
-              <a:solidFill>
-                <a:schemeClr val="bg1"/>
-              </a:solidFill>
-            </a:ln>
-          </p:spPr>
-          <p:style>
-            <a:lnRef idx="2">
-              <a:schemeClr val="accent1">
-                <a:shade val="50000"/>
-              </a:schemeClr>
-            </a:lnRef>
-            <a:fillRef idx="1">
-              <a:schemeClr val="accent1"/>
-            </a:fillRef>
-            <a:effectRef idx="0">
-              <a:schemeClr val="accent1"/>
-            </a:effectRef>
-            <a:fontRef idx="minor">
-              <a:schemeClr val="lt1"/>
-            </a:fontRef>
-          </p:style>
-          <p:txBody>
-            <a:bodyPr rtlCol="0" anchor="t"/>
-            <a:lstStyle/>
-            <a:p>
-              <a:pPr algn="ctr"/>
-              <a:r>
-                <a:rPr lang="ru-RU" sz="1100" dirty="0">
-                  <a:solidFill>
-                    <a:schemeClr val="tx1"/>
-                  </a:solidFill>
-                </a:rPr>
-                <a:t>Двойная вершина</a:t>
-              </a:r>
-              <a:endParaRPr lang="en-US" sz="1100" dirty="0">
-                <a:solidFill>
-                  <a:schemeClr val="tx1"/>
-                </a:solidFill>
-              </a:endParaRPr>
-            </a:p>
-          </p:txBody>
-        </p:sp>
-        <p:sp>
-          <p:nvSpPr>
-            <p:cNvPr id="18" name="Rectangle 17">
-              <a:extLst>
-                <a:ext uri="{FF2B5EF4-FFF2-40B4-BE49-F238E27FC236}">
-                  <a16:creationId xmlns:a16="http://schemas.microsoft.com/office/drawing/2014/main" id="{F78A8832-E5AD-D846-833F-132A279F1588}"/>
-                </a:ext>
-              </a:extLst>
-            </p:cNvPr>
-            <p:cNvSpPr/>
-            <p:nvPr/>
-          </p:nvSpPr>
-          <p:spPr>
-            <a:xfrm>
-              <a:off x="7359510" y="2540593"/>
-              <a:ext cx="1612042" cy="356738"/>
-            </a:xfrm>
-            <a:prstGeom prst="rect">
-              <a:avLst/>
-            </a:prstGeom>
-            <a:solidFill>
-              <a:schemeClr val="bg1"/>
-            </a:solidFill>
-            <a:ln>
-              <a:solidFill>
-                <a:schemeClr val="bg1"/>
-              </a:solidFill>
-            </a:ln>
-          </p:spPr>
-          <p:style>
-            <a:lnRef idx="2">
-              <a:schemeClr val="accent1">
-                <a:shade val="50000"/>
-              </a:schemeClr>
-            </a:lnRef>
-            <a:fillRef idx="1">
-              <a:schemeClr val="accent1"/>
-            </a:fillRef>
-            <a:effectRef idx="0">
-              <a:schemeClr val="accent1"/>
-            </a:effectRef>
-            <a:fontRef idx="minor">
-              <a:schemeClr val="lt1"/>
-            </a:fontRef>
-          </p:style>
-          <p:txBody>
-            <a:bodyPr rtlCol="0" anchor="t"/>
-            <a:lstStyle/>
-            <a:p>
-              <a:pPr algn="ctr"/>
-              <a:r>
-                <a:rPr lang="ru-RU" sz="1100" dirty="0">
-                  <a:solidFill>
-                    <a:schemeClr val="tx1"/>
-                  </a:solidFill>
-                </a:rPr>
-                <a:t>Тройная вершина</a:t>
-              </a:r>
-              <a:endParaRPr lang="en-US" sz="1100" dirty="0">
-                <a:solidFill>
-                  <a:schemeClr val="tx1"/>
-                </a:solidFill>
-              </a:endParaRPr>
-            </a:p>
-          </p:txBody>
-        </p:sp>
-        <p:sp>
-          <p:nvSpPr>
-            <p:cNvPr id="19" name="Rectangle 18">
-              <a:extLst>
-                <a:ext uri="{FF2B5EF4-FFF2-40B4-BE49-F238E27FC236}">
-                  <a16:creationId xmlns:a16="http://schemas.microsoft.com/office/drawing/2014/main" id="{2ED28ED9-2C63-4849-A823-2EBCFDA73A20}"/>
-                </a:ext>
-              </a:extLst>
-            </p:cNvPr>
-            <p:cNvSpPr/>
-            <p:nvPr/>
-          </p:nvSpPr>
-          <p:spPr>
-            <a:xfrm>
-              <a:off x="7427631" y="4337842"/>
-              <a:ext cx="1612042" cy="356738"/>
-            </a:xfrm>
-            <a:prstGeom prst="rect">
-              <a:avLst/>
-            </a:prstGeom>
-            <a:solidFill>
-              <a:schemeClr val="bg1"/>
-            </a:solidFill>
-            <a:ln>
-              <a:solidFill>
-                <a:schemeClr val="bg1"/>
-              </a:solidFill>
-            </a:ln>
-          </p:spPr>
-          <p:style>
-            <a:lnRef idx="2">
-              <a:schemeClr val="accent1">
-                <a:shade val="50000"/>
-              </a:schemeClr>
-            </a:lnRef>
-            <a:fillRef idx="1">
-              <a:schemeClr val="accent1"/>
-            </a:fillRef>
-            <a:effectRef idx="0">
-              <a:schemeClr val="accent1"/>
-            </a:effectRef>
-            <a:fontRef idx="minor">
-              <a:schemeClr val="lt1"/>
-            </a:fontRef>
-          </p:style>
-          <p:txBody>
-            <a:bodyPr rtlCol="0" anchor="t"/>
-            <a:lstStyle/>
-            <a:p>
-              <a:pPr algn="ctr"/>
-              <a:r>
-                <a:rPr lang="ru-RU" sz="1100" dirty="0">
-                  <a:solidFill>
-                    <a:schemeClr val="tx1"/>
-                  </a:solidFill>
-                </a:rPr>
-                <a:t>Тройное дно</a:t>
-              </a:r>
-              <a:endParaRPr lang="en-US" sz="1100" dirty="0">
-                <a:solidFill>
-                  <a:schemeClr val="tx1"/>
-                </a:solidFill>
-              </a:endParaRPr>
-            </a:p>
-          </p:txBody>
-        </p:sp>
-      </p:grpSp>
-    </p:spTree>
-    <p:extLst>
-      <p:ext uri="{BB962C8B-B14F-4D97-AF65-F5344CB8AC3E}">
-        <p14:creationId xmlns:p14="http://schemas.microsoft.com/office/powerpoint/2010/main" val="1106561554"/>
-      </p:ext>
-    </p:extLst>
-  </p:cSld>
-  <p:clrMapOvr>
-    <a:masterClrMapping/>
-  </p:clrMapOvr>
-</p:sld>
-</file>
-
-<file path=ppt/slides/slide31.xml><?xml version="1.0" encoding="utf-8"?>
-<p:sld xmlns:a="http://schemas.openxmlformats.org/drawingml/2006/main" xmlns:r="http://schemas.openxmlformats.org/officeDocument/2006/relationships" xmlns:p="http://schemas.openxmlformats.org/presentationml/2006/main">
-  <p:cSld>
-    <p:spTree>
-      <p:nvGrpSpPr>
-        <p:cNvPr id="1" name=""/>
-        <p:cNvGrpSpPr/>
-        <p:nvPr/>
-      </p:nvGrpSpPr>
-      <p:grpSpPr>
-        <a:xfrm>
-          <a:off x="0" y="0"/>
-          <a:ext cx="0" cy="0"/>
-          <a:chOff x="0" y="0"/>
-          <a:chExt cx="0" cy="0"/>
-        </a:xfrm>
-      </p:grpSpPr>
-      <p:sp>
-        <p:nvSpPr>
-          <p:cNvPr id="3" name="Title 2">
-            <a:extLst>
-              <a:ext uri="{FF2B5EF4-FFF2-40B4-BE49-F238E27FC236}">
-                <a16:creationId xmlns:a16="http://schemas.microsoft.com/office/drawing/2014/main" id="{B53200C2-EEDC-A348-A3AC-B435BA04C6F0}"/>
-              </a:ext>
-            </a:extLst>
-          </p:cNvPr>
-          <p:cNvSpPr>
-            <a:spLocks noGrp="1"/>
-          </p:cNvSpPr>
-          <p:nvPr>
-            <p:ph type="title"/>
-          </p:nvPr>
-        </p:nvSpPr>
-        <p:spPr/>
-        <p:txBody>
-          <a:bodyPr/>
-          <a:lstStyle/>
-          <a:p>
-            <a:r>
-              <a:rPr lang="ru-RU" dirty="0"/>
               <a:t>Простая скользящая средняя </a:t>
             </a:r>
             <a:endParaRPr lang="en-US" dirty="0"/>
@@ -23691,7 +21976,728 @@
 </p:sld>
 </file>
 
-<file path=ppt/slides/slide32.xml><?xml version="1.0" encoding="utf-8"?>
+<file path=ppt/slides/slide3.xml><?xml version="1.0" encoding="utf-8"?>
+<p:sld xmlns:a="http://schemas.openxmlformats.org/drawingml/2006/main" xmlns:r="http://schemas.openxmlformats.org/officeDocument/2006/relationships" xmlns:p="http://schemas.openxmlformats.org/presentationml/2006/main">
+  <p:cSld>
+    <p:spTree>
+      <p:nvGrpSpPr>
+        <p:cNvPr id="1" name="Shape 203"/>
+        <p:cNvGrpSpPr/>
+        <p:nvPr/>
+      </p:nvGrpSpPr>
+      <p:grpSpPr>
+        <a:xfrm>
+          <a:off x="0" y="0"/>
+          <a:ext cx="0" cy="0"/>
+          <a:chOff x="0" y="0"/>
+          <a:chExt cx="0" cy="0"/>
+        </a:xfrm>
+      </p:grpSpPr>
+      <p:sp>
+        <p:nvSpPr>
+          <p:cNvPr id="204" name="Google Shape;204;p48"/>
+          <p:cNvSpPr/>
+          <p:nvPr/>
+        </p:nvSpPr>
+        <p:spPr>
+          <a:xfrm>
+            <a:off x="630000" y="2703050"/>
+            <a:ext cx="1033800" cy="1983600"/>
+          </a:xfrm>
+          <a:prstGeom prst="rect">
+            <a:avLst/>
+          </a:prstGeom>
+          <a:solidFill>
+            <a:schemeClr val="accent4"/>
+          </a:solidFill>
+          <a:ln>
+            <a:noFill/>
+          </a:ln>
+        </p:spPr>
+        <p:txBody>
+          <a:bodyPr spcFirstLastPara="1" wrap="square" lIns="91425" tIns="91425" rIns="91425" bIns="91425" anchor="ctr" anchorCtr="0">
+            <a:noAutofit/>
+          </a:bodyPr>
+          <a:lstStyle/>
+          <a:p>
+            <a:pPr marL="0" lvl="0" indent="0" algn="l" rtl="0">
+              <a:spcBef>
+                <a:spcPts val="0"/>
+              </a:spcBef>
+              <a:spcAft>
+                <a:spcPts val="0"/>
+              </a:spcAft>
+              <a:buNone/>
+            </a:pPr>
+            <a:endParaRPr/>
+          </a:p>
+        </p:txBody>
+      </p:sp>
+      <p:sp>
+        <p:nvSpPr>
+          <p:cNvPr id="206" name="Google Shape;206;p48"/>
+          <p:cNvSpPr txBox="1">
+            <a:spLocks noGrp="1"/>
+          </p:cNvSpPr>
+          <p:nvPr>
+            <p:ph type="title"/>
+          </p:nvPr>
+        </p:nvSpPr>
+        <p:spPr>
+          <a:xfrm>
+            <a:off x="500550" y="821219"/>
+            <a:ext cx="8520600" cy="1032900"/>
+          </a:xfrm>
+          <a:prstGeom prst="rect">
+            <a:avLst/>
+          </a:prstGeom>
+        </p:spPr>
+        <p:txBody>
+          <a:bodyPr spcFirstLastPara="1" wrap="square" lIns="91425" tIns="91425" rIns="91425" bIns="91425" anchor="t" anchorCtr="0">
+            <a:noAutofit/>
+          </a:bodyPr>
+          <a:lstStyle/>
+          <a:p>
+            <a:pPr marL="0" lvl="0" indent="0" algn="l" rtl="0">
+              <a:spcBef>
+                <a:spcPts val="0"/>
+              </a:spcBef>
+              <a:spcAft>
+                <a:spcPts val="0"/>
+              </a:spcAft>
+              <a:buClr>
+                <a:schemeClr val="dk1"/>
+              </a:buClr>
+              <a:buSzPts val="1100"/>
+              <a:buFont typeface="Arial"/>
+              <a:buNone/>
+            </a:pPr>
+            <a:r>
+              <a:rPr lang="en-GB" sz="3200" dirty="0"/>
+              <a:t>ML </a:t>
+            </a:r>
+            <a:r>
+              <a:rPr lang="ru-RU" sz="3200" dirty="0"/>
+              <a:t>для финансового анализа</a:t>
+            </a:r>
+            <a:br>
+              <a:rPr lang="en-US" sz="3200" dirty="0"/>
+            </a:br>
+            <a:r>
+              <a:rPr lang="ru-RU" sz="2400" dirty="0"/>
+              <a:t>Введение в технический анализ: графики и индикаторы.</a:t>
+            </a:r>
+            <a:endParaRPr b="0" dirty="0"/>
+          </a:p>
+        </p:txBody>
+      </p:sp>
+      <p:sp>
+        <p:nvSpPr>
+          <p:cNvPr id="207" name="Google Shape;207;p48"/>
+          <p:cNvSpPr txBox="1">
+            <a:spLocks noGrp="1"/>
+          </p:cNvSpPr>
+          <p:nvPr>
+            <p:ph type="subTitle" idx="1"/>
+          </p:nvPr>
+        </p:nvSpPr>
+        <p:spPr>
+          <a:xfrm>
+            <a:off x="500550" y="520133"/>
+            <a:ext cx="7796700" cy="356926"/>
+          </a:xfrm>
+          <a:prstGeom prst="rect">
+            <a:avLst/>
+          </a:prstGeom>
+        </p:spPr>
+        <p:txBody>
+          <a:bodyPr spcFirstLastPara="1" wrap="square" lIns="91425" tIns="91425" rIns="91425" bIns="91425" anchor="t" anchorCtr="0">
+            <a:normAutofit fontScale="92500" lnSpcReduction="20000"/>
+          </a:bodyPr>
+          <a:lstStyle/>
+          <a:p>
+            <a:pPr marL="0" lvl="0" indent="0" algn="l" rtl="0">
+              <a:spcBef>
+                <a:spcPts val="0"/>
+              </a:spcBef>
+              <a:spcAft>
+                <a:spcPts val="0"/>
+              </a:spcAft>
+              <a:buNone/>
+            </a:pPr>
+            <a:r>
+              <a:rPr lang="ru-RU" dirty="0"/>
+              <a:t>Открытый урок</a:t>
+            </a:r>
+            <a:endParaRPr dirty="0"/>
+          </a:p>
+        </p:txBody>
+      </p:sp>
+      <p:sp>
+        <p:nvSpPr>
+          <p:cNvPr id="208" name="Google Shape;208;p48"/>
+          <p:cNvSpPr txBox="1">
+            <a:spLocks noGrp="1"/>
+          </p:cNvSpPr>
+          <p:nvPr>
+            <p:ph type="subTitle" idx="2"/>
+          </p:nvPr>
+        </p:nvSpPr>
+        <p:spPr>
+          <a:xfrm>
+            <a:off x="3082400" y="2302060"/>
+            <a:ext cx="5856300" cy="396900"/>
+          </a:xfrm>
+          <a:prstGeom prst="rect">
+            <a:avLst/>
+          </a:prstGeom>
+        </p:spPr>
+        <p:txBody>
+          <a:bodyPr spcFirstLastPara="1" wrap="square" lIns="91425" tIns="91425" rIns="91425" bIns="91425" anchor="t" anchorCtr="0">
+            <a:normAutofit lnSpcReduction="10000"/>
+          </a:bodyPr>
+          <a:lstStyle/>
+          <a:p>
+            <a:pPr marL="0" lvl="0" indent="0" algn="l" rtl="0">
+              <a:spcBef>
+                <a:spcPts val="0"/>
+              </a:spcBef>
+              <a:spcAft>
+                <a:spcPts val="0"/>
+              </a:spcAft>
+              <a:buNone/>
+            </a:pPr>
+            <a:r>
+              <a:rPr lang="ru" dirty="0"/>
+              <a:t>Игорь Стурейко</a:t>
+            </a:r>
+            <a:endParaRPr dirty="0"/>
+          </a:p>
+        </p:txBody>
+      </p:sp>
+      <p:pic>
+        <p:nvPicPr>
+          <p:cNvPr id="8" name="Google Shape;278;p64">
+            <a:extLst>
+              <a:ext uri="{FF2B5EF4-FFF2-40B4-BE49-F238E27FC236}">
+                <a16:creationId xmlns:a16="http://schemas.microsoft.com/office/drawing/2014/main" id="{DC03452F-6B2F-EA48-9B01-C3577A300545}"/>
+              </a:ext>
+            </a:extLst>
+          </p:cNvPr>
+          <p:cNvPicPr preferRelativeResize="0"/>
+          <p:nvPr/>
+        </p:nvPicPr>
+        <p:blipFill rotWithShape="1">
+          <a:blip r:embed="rId3">
+            <a:alphaModFix/>
+          </a:blip>
+          <a:srcRect/>
+          <a:stretch/>
+        </p:blipFill>
+        <p:spPr>
+          <a:xfrm>
+            <a:off x="8077621" y="258179"/>
+            <a:ext cx="652375" cy="652375"/>
+          </a:xfrm>
+          <a:prstGeom prst="rect">
+            <a:avLst/>
+          </a:prstGeom>
+          <a:noFill/>
+          <a:ln>
+            <a:noFill/>
+          </a:ln>
+        </p:spPr>
+      </p:pic>
+      <p:pic>
+        <p:nvPicPr>
+          <p:cNvPr id="12" name="Picture 11">
+            <a:extLst>
+              <a:ext uri="{FF2B5EF4-FFF2-40B4-BE49-F238E27FC236}">
+                <a16:creationId xmlns:a16="http://schemas.microsoft.com/office/drawing/2014/main" id="{DADBDA60-D1B3-5B41-A4D2-CDAE2DD6B009}"/>
+              </a:ext>
+            </a:extLst>
+          </p:cNvPr>
+          <p:cNvPicPr>
+            <a:picLocks noChangeAspect="1"/>
+          </p:cNvPicPr>
+          <p:nvPr/>
+        </p:nvPicPr>
+        <p:blipFill rotWithShape="1">
+          <a:blip r:embed="rId4">
+            <a:extLst>
+              <a:ext uri="{28A0092B-C50C-407E-A947-70E740481C1C}">
+                <a14:useLocalDpi xmlns:a14="http://schemas.microsoft.com/office/drawing/2010/main" val="0"/>
+              </a:ext>
+            </a:extLst>
+          </a:blip>
+          <a:srcRect l="-1" t="12156" r="295"/>
+          <a:stretch/>
+        </p:blipFill>
+        <p:spPr>
+          <a:xfrm>
+            <a:off x="832654" y="2865544"/>
+            <a:ext cx="1662292" cy="1657372"/>
+          </a:xfrm>
+          <a:prstGeom prst="ellipse">
+            <a:avLst/>
+          </a:prstGeom>
+          <a:ln w="12700" cap="rnd">
+            <a:solidFill>
+              <a:srgbClr val="333333"/>
+            </a:solidFill>
+          </a:ln>
+          <a:effectLst>
+            <a:outerShdw blurRad="381000" dist="292100" dir="5400000" sx="-80000" sy="-18000" rotWithShape="0">
+              <a:srgbClr val="000000">
+                <a:alpha val="22000"/>
+              </a:srgbClr>
+            </a:outerShdw>
+          </a:effectLst>
+          <a:scene3d>
+            <a:camera prst="orthographicFront"/>
+            <a:lightRig rig="contrasting" dir="t">
+              <a:rot lat="0" lon="0" rev="3000000"/>
+            </a:lightRig>
+          </a:scene3d>
+          <a:sp3d contourW="7620">
+            <a:bevelT w="95250" h="31750"/>
+            <a:contourClr>
+              <a:srgbClr val="333333"/>
+            </a:contourClr>
+          </a:sp3d>
+        </p:spPr>
+      </p:pic>
+      <p:sp>
+        <p:nvSpPr>
+          <p:cNvPr id="13" name="Google Shape;209;p48">
+            <a:extLst>
+              <a:ext uri="{FF2B5EF4-FFF2-40B4-BE49-F238E27FC236}">
+                <a16:creationId xmlns:a16="http://schemas.microsoft.com/office/drawing/2014/main" id="{D0D012C5-1A3B-EC4C-B8A7-64C8AF21B41A}"/>
+              </a:ext>
+            </a:extLst>
+          </p:cNvPr>
+          <p:cNvSpPr txBox="1">
+            <a:spLocks/>
+          </p:cNvSpPr>
+          <p:nvPr/>
+        </p:nvSpPr>
+        <p:spPr>
+          <a:xfrm>
+            <a:off x="3082400" y="2701811"/>
+            <a:ext cx="5938750" cy="2133660"/>
+          </a:xfrm>
+          <a:prstGeom prst="rect">
+            <a:avLst/>
+          </a:prstGeom>
+          <a:noFill/>
+          <a:ln>
+            <a:noFill/>
+          </a:ln>
+        </p:spPr>
+        <p:txBody>
+          <a:bodyPr spcFirstLastPara="1" wrap="square" lIns="91425" tIns="91425" rIns="91425" bIns="91425" anchor="t" anchorCtr="0">
+            <a:normAutofit fontScale="85000" lnSpcReduction="20000"/>
+          </a:bodyPr>
+          <a:lstStyle>
+            <a:lvl1pPr marL="0" lvl="0" algn="l">
+              <a:lnSpc>
+                <a:spcPct val="100000"/>
+              </a:lnSpc>
+              <a:spcBef>
+                <a:spcPts val="0"/>
+              </a:spcBef>
+              <a:spcAft>
+                <a:spcPts val="0"/>
+              </a:spcAft>
+              <a:buClr>
+                <a:schemeClr val="dk1"/>
+              </a:buClr>
+              <a:buSzPts val="1300"/>
+              <a:buNone/>
+              <a:defRPr sz="1300" b="0" i="0">
+                <a:solidFill>
+                  <a:schemeClr val="dk1"/>
+                </a:solidFill>
+                <a:latin typeface="+mn-lt"/>
+                <a:ea typeface="+mn-ea"/>
+                <a:cs typeface="+mn-cs"/>
+              </a:defRPr>
+            </a:lvl1pPr>
+            <a:lvl2pPr marL="457200" lvl="1" algn="l">
+              <a:lnSpc>
+                <a:spcPct val="100000"/>
+              </a:lnSpc>
+              <a:spcBef>
+                <a:spcPts val="0"/>
+              </a:spcBef>
+              <a:spcAft>
+                <a:spcPts val="0"/>
+              </a:spcAft>
+              <a:buClr>
+                <a:schemeClr val="dk1"/>
+              </a:buClr>
+              <a:buSzPts val="1500"/>
+              <a:buNone/>
+              <a:defRPr>
+                <a:solidFill>
+                  <a:schemeClr val="dk1"/>
+                </a:solidFill>
+                <a:latin typeface="+mn-lt"/>
+                <a:ea typeface="+mn-ea"/>
+                <a:cs typeface="+mn-cs"/>
+              </a:defRPr>
+            </a:lvl2pPr>
+            <a:lvl3pPr marL="914400" lvl="2" algn="l">
+              <a:lnSpc>
+                <a:spcPct val="100000"/>
+              </a:lnSpc>
+              <a:spcBef>
+                <a:spcPts val="0"/>
+              </a:spcBef>
+              <a:spcAft>
+                <a:spcPts val="0"/>
+              </a:spcAft>
+              <a:buClr>
+                <a:schemeClr val="dk1"/>
+              </a:buClr>
+              <a:buSzPts val="1300"/>
+              <a:buNone/>
+              <a:defRPr>
+                <a:solidFill>
+                  <a:schemeClr val="dk1"/>
+                </a:solidFill>
+                <a:latin typeface="+mn-lt"/>
+                <a:ea typeface="+mn-ea"/>
+                <a:cs typeface="+mn-cs"/>
+              </a:defRPr>
+            </a:lvl3pPr>
+            <a:lvl4pPr marL="1371600" lvl="3" algn="l">
+              <a:lnSpc>
+                <a:spcPct val="100000"/>
+              </a:lnSpc>
+              <a:spcBef>
+                <a:spcPts val="0"/>
+              </a:spcBef>
+              <a:spcAft>
+                <a:spcPts val="0"/>
+              </a:spcAft>
+              <a:buClr>
+                <a:schemeClr val="dk1"/>
+              </a:buClr>
+              <a:buSzPts val="1300"/>
+              <a:buNone/>
+              <a:defRPr>
+                <a:solidFill>
+                  <a:schemeClr val="dk1"/>
+                </a:solidFill>
+                <a:latin typeface="+mn-lt"/>
+                <a:ea typeface="+mn-ea"/>
+                <a:cs typeface="+mn-cs"/>
+              </a:defRPr>
+            </a:lvl4pPr>
+            <a:lvl5pPr marL="1828800" lvl="4" algn="l">
+              <a:lnSpc>
+                <a:spcPct val="100000"/>
+              </a:lnSpc>
+              <a:spcBef>
+                <a:spcPts val="0"/>
+              </a:spcBef>
+              <a:spcAft>
+                <a:spcPts val="0"/>
+              </a:spcAft>
+              <a:buClr>
+                <a:schemeClr val="dk1"/>
+              </a:buClr>
+              <a:buSzPts val="1300"/>
+              <a:buNone/>
+              <a:defRPr>
+                <a:solidFill>
+                  <a:schemeClr val="dk1"/>
+                </a:solidFill>
+                <a:latin typeface="+mn-lt"/>
+                <a:ea typeface="+mn-ea"/>
+                <a:cs typeface="+mn-cs"/>
+              </a:defRPr>
+            </a:lvl5pPr>
+            <a:lvl6pPr marL="2286000" lvl="5" algn="l">
+              <a:lnSpc>
+                <a:spcPct val="100000"/>
+              </a:lnSpc>
+              <a:spcBef>
+                <a:spcPts val="0"/>
+              </a:spcBef>
+              <a:spcAft>
+                <a:spcPts val="0"/>
+              </a:spcAft>
+              <a:buClr>
+                <a:schemeClr val="dk1"/>
+              </a:buClr>
+              <a:buSzPts val="1300"/>
+              <a:buNone/>
+              <a:defRPr>
+                <a:solidFill>
+                  <a:schemeClr val="dk1"/>
+                </a:solidFill>
+                <a:latin typeface="+mn-lt"/>
+                <a:ea typeface="+mn-ea"/>
+                <a:cs typeface="+mn-cs"/>
+              </a:defRPr>
+            </a:lvl6pPr>
+            <a:lvl7pPr marL="2743200" lvl="6" algn="l">
+              <a:lnSpc>
+                <a:spcPct val="100000"/>
+              </a:lnSpc>
+              <a:spcBef>
+                <a:spcPts val="0"/>
+              </a:spcBef>
+              <a:spcAft>
+                <a:spcPts val="0"/>
+              </a:spcAft>
+              <a:buClr>
+                <a:schemeClr val="dk1"/>
+              </a:buClr>
+              <a:buSzPts val="1300"/>
+              <a:buNone/>
+              <a:defRPr>
+                <a:solidFill>
+                  <a:schemeClr val="dk1"/>
+                </a:solidFill>
+                <a:latin typeface="+mn-lt"/>
+                <a:ea typeface="+mn-ea"/>
+                <a:cs typeface="+mn-cs"/>
+              </a:defRPr>
+            </a:lvl7pPr>
+            <a:lvl8pPr marL="3200400" lvl="7" algn="l">
+              <a:lnSpc>
+                <a:spcPct val="100000"/>
+              </a:lnSpc>
+              <a:spcBef>
+                <a:spcPts val="0"/>
+              </a:spcBef>
+              <a:spcAft>
+                <a:spcPts val="0"/>
+              </a:spcAft>
+              <a:buClr>
+                <a:schemeClr val="dk1"/>
+              </a:buClr>
+              <a:buSzPts val="1300"/>
+              <a:buNone/>
+              <a:defRPr>
+                <a:solidFill>
+                  <a:schemeClr val="dk1"/>
+                </a:solidFill>
+                <a:latin typeface="+mn-lt"/>
+                <a:ea typeface="+mn-ea"/>
+                <a:cs typeface="+mn-cs"/>
+              </a:defRPr>
+            </a:lvl8pPr>
+            <a:lvl9pPr marL="3657600" lvl="8" algn="l">
+              <a:lnSpc>
+                <a:spcPct val="100000"/>
+              </a:lnSpc>
+              <a:spcBef>
+                <a:spcPts val="0"/>
+              </a:spcBef>
+              <a:spcAft>
+                <a:spcPts val="0"/>
+              </a:spcAft>
+              <a:buClr>
+                <a:schemeClr val="dk1"/>
+              </a:buClr>
+              <a:buSzPts val="1300"/>
+              <a:buNone/>
+              <a:defRPr>
+                <a:solidFill>
+                  <a:schemeClr val="dk1"/>
+                </a:solidFill>
+                <a:latin typeface="+mn-lt"/>
+                <a:ea typeface="+mn-ea"/>
+                <a:cs typeface="+mn-cs"/>
+              </a:defRPr>
+            </a:lvl9pPr>
+          </a:lstStyle>
+          <a:p>
+            <a:pPr marL="1470025" indent="-1465263">
+              <a:tabLst>
+                <a:tab pos="1465263" algn="l"/>
+              </a:tabLst>
+            </a:pPr>
+            <a:r>
+              <a:rPr lang="ru-RU" sz="1150" b="1" kern="0" dirty="0"/>
+              <a:t>Руководитель курсов: </a:t>
+            </a:r>
+            <a:r>
+              <a:rPr lang="en-US" sz="1150" b="1" kern="0" dirty="0"/>
+              <a:t>	Reinforcement Learning, ML Professional, ML Basic, </a:t>
+            </a:r>
+            <a:br>
+              <a:rPr lang="en-US" sz="1150" b="1" kern="0" dirty="0"/>
+            </a:br>
+            <a:r>
+              <a:rPr lang="en-US" sz="1150" b="1" kern="0" dirty="0" err="1"/>
+              <a:t>MLOps</a:t>
+            </a:r>
+            <a:r>
+              <a:rPr lang="en-US" sz="1150" b="1" kern="0" dirty="0"/>
+              <a:t>, </a:t>
+            </a:r>
+            <a:r>
+              <a:rPr lang="en-US" sz="1150" b="1" kern="0" dirty="0" err="1"/>
+              <a:t>FinML</a:t>
+            </a:r>
+            <a:endParaRPr lang="en-US" sz="1150" b="1" kern="0" dirty="0"/>
+          </a:p>
+          <a:p>
+            <a:pPr rtl="0"/>
+            <a:endParaRPr lang="en-US" sz="1150" b="1" kern="0" dirty="0"/>
+          </a:p>
+          <a:p>
+            <a:pPr rtl="0"/>
+            <a:r>
+              <a:rPr lang="en-US" sz="1150" b="1" kern="0" dirty="0" err="1"/>
+              <a:t>Teamlead</a:t>
+            </a:r>
+            <a:r>
+              <a:rPr lang="en-US" sz="1150" b="1" kern="0" dirty="0"/>
+              <a:t>, </a:t>
+            </a:r>
+            <a:r>
+              <a:rPr lang="ru-RU" sz="1150" b="1" kern="0" dirty="0"/>
+              <a:t>главный инженер проекта, </a:t>
+            </a:r>
+          </a:p>
+          <a:p>
+            <a:pPr rtl="0"/>
+            <a:r>
+              <a:rPr lang="ru-RU" sz="1150" b="1" kern="0" dirty="0"/>
+              <a:t>Физический факультет МГУ, </a:t>
+            </a:r>
+            <a:r>
+              <a:rPr lang="en-US" sz="1150" b="1" kern="0" dirty="0"/>
+              <a:t>PhD </a:t>
+            </a:r>
+            <a:r>
+              <a:rPr lang="ru-RU" sz="1150" b="1" kern="0" dirty="0"/>
+              <a:t>теоретическая физика</a:t>
+            </a:r>
+          </a:p>
+          <a:p>
+            <a:pPr rtl="0"/>
+            <a:endParaRPr lang="ru-RU" sz="1150" kern="0" dirty="0"/>
+          </a:p>
+          <a:p>
+            <a:pPr rtl="0"/>
+            <a:r>
+              <a:rPr lang="ru-RU" sz="1150" b="1" kern="0" dirty="0"/>
+              <a:t>Опыт:</a:t>
+            </a:r>
+            <a:endParaRPr lang="ru-RU" sz="1150" kern="0" dirty="0"/>
+          </a:p>
+          <a:p>
+            <a:pPr rtl="0"/>
+            <a:r>
+              <a:rPr lang="ru-RU" sz="1150" kern="0" dirty="0"/>
+              <a:t>Более 15 лет занимался прикладной математикой и мат моделированием</a:t>
+            </a:r>
+          </a:p>
+          <a:p>
+            <a:pPr rtl="0"/>
+            <a:r>
+              <a:rPr lang="ru-RU" sz="1150" kern="0" dirty="0"/>
+              <a:t>(</a:t>
+            </a:r>
+            <a:r>
+              <a:rPr lang="en-US" sz="1150" kern="0" dirty="0"/>
+              <a:t>Data Scientist) (Python, </a:t>
+            </a:r>
+            <a:r>
+              <a:rPr lang="ru-RU" sz="1150" kern="0" dirty="0"/>
+              <a:t>С++) в НИИ ПАО Газпром</a:t>
+            </a:r>
+          </a:p>
+          <a:p>
+            <a:pPr rtl="0"/>
+            <a:endParaRPr lang="ru-RU" sz="1150" kern="0" dirty="0"/>
+          </a:p>
+          <a:p>
+            <a:pPr rtl="0"/>
+            <a:endParaRPr lang="ru-RU" sz="1150" b="1" kern="0" dirty="0"/>
+          </a:p>
+          <a:p>
+            <a:pPr rtl="0"/>
+            <a:r>
+              <a:rPr lang="ru-RU" sz="1150" b="1" kern="0" dirty="0"/>
+              <a:t>@</a:t>
+            </a:r>
+            <a:r>
+              <a:rPr lang="en-US" sz="1150" b="1" kern="0" dirty="0" err="1"/>
+              <a:t>stureiko</a:t>
+            </a:r>
+            <a:r>
+              <a:rPr lang="en-US" sz="1150" b="1" kern="0" dirty="0"/>
+              <a:t> (TG)</a:t>
+            </a:r>
+          </a:p>
+          <a:p>
+            <a:pPr rtl="0"/>
+            <a:endParaRPr lang="en-US" sz="1150" b="1" kern="0" dirty="0"/>
+          </a:p>
+          <a:p>
+            <a:pPr rtl="0"/>
+            <a:r>
+              <a:rPr lang="en-US" sz="1150" b="1" kern="0" dirty="0"/>
+              <a:t>LinkedIn: </a:t>
+            </a:r>
+            <a:r>
+              <a:rPr lang="en-US" sz="1150" kern="0" dirty="0">
+                <a:hlinkClick r:id="rId5"/>
+              </a:rPr>
+              <a:t>igor-stureiko</a:t>
+            </a:r>
+            <a:r>
+              <a:rPr lang="en-US" sz="1150" kern="0" dirty="0"/>
+              <a:t> </a:t>
+            </a:r>
+          </a:p>
+          <a:p>
+            <a:pPr rtl="0"/>
+            <a:endParaRPr lang="en-US" sz="1150" kern="0" dirty="0"/>
+          </a:p>
+          <a:p>
+            <a:pPr rtl="0"/>
+            <a:r>
+              <a:rPr lang="en-US" sz="1150" b="1" kern="0" dirty="0"/>
+              <a:t>@</a:t>
+            </a:r>
+            <a:r>
+              <a:rPr lang="en-US" sz="1150" b="1" kern="0" dirty="0" err="1"/>
+              <a:t>rl_fintech</a:t>
+            </a:r>
+            <a:r>
+              <a:rPr lang="en-US" sz="1150" b="1" kern="0" dirty="0"/>
+              <a:t> </a:t>
+            </a:r>
+            <a:r>
+              <a:rPr lang="en-US" sz="1150" kern="0" dirty="0"/>
+              <a:t>(</a:t>
+            </a:r>
+            <a:r>
+              <a:rPr lang="ru-RU" sz="1150" kern="0" dirty="0"/>
+              <a:t>Мой канал о моделях в бизнесе)</a:t>
+            </a:r>
+            <a:endParaRPr lang="ru-RU" sz="1400" kern="0" dirty="0"/>
+          </a:p>
+        </p:txBody>
+      </p:sp>
+    </p:spTree>
+  </p:cSld>
+  <p:clrMapOvr>
+    <a:masterClrMapping/>
+  </p:clrMapOvr>
+</p:sld>
+</file>
+
+<file path=ppt/slides/slide30.xml><?xml version="1.0" encoding="utf-8"?>
 <p:sld xmlns:a="http://schemas.openxmlformats.org/drawingml/2006/main" xmlns:r="http://schemas.openxmlformats.org/officeDocument/2006/relationships" xmlns:p="http://schemas.openxmlformats.org/presentationml/2006/main">
   <p:cSld>
     <p:spTree>
@@ -24052,7 +23058,7 @@
 </p:sld>
 </file>
 
-<file path=ppt/slides/slide33.xml><?xml version="1.0" encoding="utf-8"?>
+<file path=ppt/slides/slide31.xml><?xml version="1.0" encoding="utf-8"?>
 <p:sld xmlns:a="http://schemas.openxmlformats.org/drawingml/2006/main" xmlns:r="http://schemas.openxmlformats.org/officeDocument/2006/relationships" xmlns:p="http://schemas.openxmlformats.org/presentationml/2006/main">
   <p:cSld>
     <p:spTree>
@@ -24292,7 +23298,7 @@
 </p:sld>
 </file>
 
-<file path=ppt/slides/slide34.xml><?xml version="1.0" encoding="utf-8"?>
+<file path=ppt/slides/slide32.xml><?xml version="1.0" encoding="utf-8"?>
 <p:sld xmlns:a="http://schemas.openxmlformats.org/drawingml/2006/main" xmlns:r="http://schemas.openxmlformats.org/officeDocument/2006/relationships" xmlns:p="http://schemas.openxmlformats.org/presentationml/2006/main">
   <p:cSld>
     <p:spTree>
@@ -24652,7 +23658,7 @@
 </p:sld>
 </file>
 
-<file path=ppt/slides/slide35.xml><?xml version="1.0" encoding="utf-8"?>
+<file path=ppt/slides/slide33.xml><?xml version="1.0" encoding="utf-8"?>
 <p:sld xmlns:a="http://schemas.openxmlformats.org/drawingml/2006/main" xmlns:r="http://schemas.openxmlformats.org/officeDocument/2006/relationships" xmlns:p="http://schemas.openxmlformats.org/presentationml/2006/main">
   <p:cSld>
     <p:spTree>
@@ -24748,7 +23754,7 @@
 </p:sld>
 </file>
 
-<file path=ppt/slides/slide36.xml><?xml version="1.0" encoding="utf-8"?>
+<file path=ppt/slides/slide34.xml><?xml version="1.0" encoding="utf-8"?>
 <p:sld xmlns:a="http://schemas.openxmlformats.org/drawingml/2006/main" xmlns:r="http://schemas.openxmlformats.org/officeDocument/2006/relationships" xmlns:p="http://schemas.openxmlformats.org/presentationml/2006/main">
   <p:cSld>
     <p:spTree>
@@ -24788,7 +23794,7 @@
           <a:p>
             <a:r>
               <a:rPr lang="ru-RU" dirty="0"/>
-              <a:t>Недостатки модели тех анализа</a:t>
+              <a:t>Недостатки модели скользящих средних</a:t>
             </a:r>
             <a:endParaRPr lang="en-US" dirty="0"/>
           </a:p>
@@ -25093,7 +24099,7 @@
 </p:sld>
 </file>
 
-<file path=ppt/slides/slide37.xml><?xml version="1.0" encoding="utf-8"?>
+<file path=ppt/slides/slide35.xml><?xml version="1.0" encoding="utf-8"?>
 <p:sld xmlns:a="http://schemas.openxmlformats.org/drawingml/2006/main" xmlns:r="http://schemas.openxmlformats.org/officeDocument/2006/relationships" xmlns:p="http://schemas.openxmlformats.org/presentationml/2006/main">
   <p:cSld>
     <p:spTree>
@@ -25172,7 +24178,7 @@
 </p:sld>
 </file>
 
-<file path=ppt/slides/slide38.xml><?xml version="1.0" encoding="utf-8"?>
+<file path=ppt/slides/slide36.xml><?xml version="1.0" encoding="utf-8"?>
 <p:sld xmlns:a="http://schemas.openxmlformats.org/drawingml/2006/main" xmlns:r="http://schemas.openxmlformats.org/officeDocument/2006/relationships" xmlns:p="http://schemas.openxmlformats.org/presentationml/2006/main">
   <p:cSld>
     <p:spTree>
@@ -25472,7 +24478,7 @@
 </p:sld>
 </file>
 
-<file path=ppt/slides/slide39.xml><?xml version="1.0" encoding="utf-8"?>
+<file path=ppt/slides/slide37.xml><?xml version="1.0" encoding="utf-8"?>
 <p:sld xmlns:a="http://schemas.openxmlformats.org/drawingml/2006/main" xmlns:r="http://schemas.openxmlformats.org/officeDocument/2006/relationships" xmlns:p="http://schemas.openxmlformats.org/presentationml/2006/main">
   <p:cSld>
     <p:spTree>
@@ -25544,460 +24550,7 @@
 </p:sld>
 </file>
 
-<file path=ppt/slides/slide4.xml><?xml version="1.0" encoding="utf-8"?>
-<p:sld xmlns:a="http://schemas.openxmlformats.org/drawingml/2006/main" xmlns:r="http://schemas.openxmlformats.org/officeDocument/2006/relationships" xmlns:p="http://schemas.openxmlformats.org/presentationml/2006/main">
-  <p:cSld>
-    <p:spTree>
-      <p:nvGrpSpPr>
-        <p:cNvPr id="1" name="Shape 282"/>
-        <p:cNvGrpSpPr/>
-        <p:nvPr/>
-      </p:nvGrpSpPr>
-      <p:grpSpPr>
-        <a:xfrm>
-          <a:off x="0" y="0"/>
-          <a:ext cx="0" cy="0"/>
-          <a:chOff x="0" y="0"/>
-          <a:chExt cx="0" cy="0"/>
-        </a:xfrm>
-      </p:grpSpPr>
-      <p:sp>
-        <p:nvSpPr>
-          <p:cNvPr id="283" name="Google Shape;283;p65"/>
-          <p:cNvSpPr txBox="1">
-            <a:spLocks noGrp="1"/>
-          </p:cNvSpPr>
-          <p:nvPr>
-            <p:ph type="title"/>
-          </p:nvPr>
-        </p:nvSpPr>
-        <p:spPr>
-          <a:xfrm>
-            <a:off x="500550" y="330736"/>
-            <a:ext cx="8520600" cy="979800"/>
-          </a:xfrm>
-          <a:prstGeom prst="rect">
-            <a:avLst/>
-          </a:prstGeom>
-        </p:spPr>
-        <p:txBody>
-          <a:bodyPr spcFirstLastPara="1" wrap="square" lIns="91425" tIns="91425" rIns="91425" bIns="91425" anchor="t" anchorCtr="0">
-            <a:noAutofit/>
-          </a:bodyPr>
-          <a:lstStyle/>
-          <a:p>
-            <a:pPr marL="0" lvl="0" indent="0" algn="l" rtl="0">
-              <a:spcBef>
-                <a:spcPts val="0"/>
-              </a:spcBef>
-              <a:spcAft>
-                <a:spcPts val="0"/>
-              </a:spcAft>
-              <a:buNone/>
-            </a:pPr>
-            <a:r>
-              <a:rPr lang="ru"/>
-              <a:t>Маршрут вебинара</a:t>
-            </a:r>
-            <a:endParaRPr/>
-          </a:p>
-        </p:txBody>
-      </p:sp>
-      <p:sp>
-        <p:nvSpPr>
-          <p:cNvPr id="284" name="Google Shape;284;p65"/>
-          <p:cNvSpPr/>
-          <p:nvPr/>
-        </p:nvSpPr>
-        <p:spPr>
-          <a:xfrm>
-            <a:off x="680150" y="1521159"/>
-            <a:ext cx="3384900" cy="376200"/>
-          </a:xfrm>
-          <a:prstGeom prst="roundRect">
-            <a:avLst>
-              <a:gd name="adj" fmla="val 16667"/>
-            </a:avLst>
-          </a:prstGeom>
-          <a:solidFill>
-            <a:srgbClr val="FFD966"/>
-          </a:solidFill>
-          <a:ln>
-            <a:noFill/>
-          </a:ln>
-        </p:spPr>
-        <p:txBody>
-          <a:bodyPr spcFirstLastPara="1" wrap="square" lIns="270000" tIns="91425" rIns="270000" bIns="91425" anchor="ctr" anchorCtr="0">
-            <a:noAutofit/>
-          </a:bodyPr>
-          <a:lstStyle/>
-          <a:p>
-            <a:pPr marL="0" lvl="0" indent="0" algn="l" rtl="0">
-              <a:spcBef>
-                <a:spcPts val="0"/>
-              </a:spcBef>
-              <a:spcAft>
-                <a:spcPts val="0"/>
-              </a:spcAft>
-              <a:buNone/>
-            </a:pPr>
-            <a:r>
-              <a:rPr lang="ru" sz="1500">
-                <a:solidFill>
-                  <a:schemeClr val="dk1"/>
-                </a:solidFill>
-                <a:latin typeface="Roboto"/>
-                <a:ea typeface="Roboto"/>
-                <a:cs typeface="Roboto"/>
-                <a:sym typeface="Roboto"/>
-              </a:rPr>
-              <a:t>1. Знакомство</a:t>
-            </a:r>
-            <a:endParaRPr sz="1300">
-              <a:solidFill>
-                <a:schemeClr val="dk1"/>
-              </a:solidFill>
-              <a:latin typeface="Roboto"/>
-              <a:ea typeface="Roboto"/>
-              <a:cs typeface="Roboto"/>
-              <a:sym typeface="Roboto"/>
-            </a:endParaRPr>
-          </a:p>
-        </p:txBody>
-      </p:sp>
-      <p:sp>
-        <p:nvSpPr>
-          <p:cNvPr id="285" name="Google Shape;285;p65"/>
-          <p:cNvSpPr/>
-          <p:nvPr/>
-        </p:nvSpPr>
-        <p:spPr>
-          <a:xfrm>
-            <a:off x="680150" y="2108144"/>
-            <a:ext cx="3384900" cy="376200"/>
-          </a:xfrm>
-          <a:prstGeom prst="roundRect">
-            <a:avLst>
-              <a:gd name="adj" fmla="val 16667"/>
-            </a:avLst>
-          </a:prstGeom>
-          <a:solidFill>
-            <a:srgbClr val="FFD966"/>
-          </a:solidFill>
-          <a:ln>
-            <a:noFill/>
-          </a:ln>
-        </p:spPr>
-        <p:txBody>
-          <a:bodyPr spcFirstLastPara="1" wrap="square" lIns="270000" tIns="91425" rIns="270000" bIns="91425" anchor="ctr" anchorCtr="0">
-            <a:noAutofit/>
-          </a:bodyPr>
-          <a:lstStyle/>
-          <a:p>
-            <a:pPr marL="0" lvl="0" indent="0" algn="l" rtl="0">
-              <a:spcBef>
-                <a:spcPts val="0"/>
-              </a:spcBef>
-              <a:spcAft>
-                <a:spcPts val="0"/>
-              </a:spcAft>
-              <a:buClr>
-                <a:schemeClr val="dk1"/>
-              </a:buClr>
-              <a:buSzPts val="1100"/>
-              <a:buFont typeface="Arial"/>
-              <a:buNone/>
-            </a:pPr>
-            <a:r>
-              <a:rPr lang="ru" sz="1500">
-                <a:solidFill>
-                  <a:schemeClr val="dk1"/>
-                </a:solidFill>
-                <a:latin typeface="Roboto"/>
-                <a:ea typeface="Roboto"/>
-                <a:cs typeface="Roboto"/>
-                <a:sym typeface="Roboto"/>
-              </a:rPr>
-              <a:t>2. Об ОТУС</a:t>
-            </a:r>
-            <a:endParaRPr sz="1300">
-              <a:solidFill>
-                <a:schemeClr val="dk1"/>
-              </a:solidFill>
-              <a:latin typeface="Roboto"/>
-              <a:ea typeface="Roboto"/>
-              <a:cs typeface="Roboto"/>
-              <a:sym typeface="Roboto"/>
-            </a:endParaRPr>
-          </a:p>
-        </p:txBody>
-      </p:sp>
-      <p:sp>
-        <p:nvSpPr>
-          <p:cNvPr id="287" name="Google Shape;287;p65"/>
-          <p:cNvSpPr/>
-          <p:nvPr/>
-        </p:nvSpPr>
-        <p:spPr>
-          <a:xfrm>
-            <a:off x="680150" y="2737038"/>
-            <a:ext cx="3384900" cy="376200"/>
-          </a:xfrm>
-          <a:prstGeom prst="roundRect">
-            <a:avLst>
-              <a:gd name="adj" fmla="val 16667"/>
-            </a:avLst>
-          </a:prstGeom>
-          <a:solidFill>
-            <a:srgbClr val="FFD966"/>
-          </a:solidFill>
-          <a:ln>
-            <a:noFill/>
-          </a:ln>
-        </p:spPr>
-        <p:txBody>
-          <a:bodyPr spcFirstLastPara="1" wrap="square" lIns="270000" tIns="91425" rIns="270000" bIns="91425" anchor="ctr" anchorCtr="0">
-            <a:noAutofit/>
-          </a:bodyPr>
-          <a:lstStyle/>
-          <a:p>
-            <a:pPr marL="0" lvl="0" indent="0" algn="l" rtl="0">
-              <a:spcBef>
-                <a:spcPts val="0"/>
-              </a:spcBef>
-              <a:spcAft>
-                <a:spcPts val="0"/>
-              </a:spcAft>
-              <a:buNone/>
-            </a:pPr>
-            <a:r>
-              <a:rPr lang="ru" sz="1500" dirty="0">
-                <a:solidFill>
-                  <a:schemeClr val="dk1"/>
-                </a:solidFill>
-                <a:latin typeface="Roboto"/>
-                <a:ea typeface="Roboto"/>
-                <a:cs typeface="Roboto"/>
-                <a:sym typeface="Roboto"/>
-              </a:rPr>
-              <a:t>3. </a:t>
-            </a:r>
-            <a:r>
-              <a:rPr lang="ru-RU" sz="1500" dirty="0">
-                <a:solidFill>
-                  <a:schemeClr val="dk1"/>
-                </a:solidFill>
-                <a:latin typeface="Roboto"/>
-                <a:ea typeface="Roboto"/>
-                <a:cs typeface="Roboto"/>
-                <a:sym typeface="Roboto"/>
-              </a:rPr>
-              <a:t>Типы графиков</a:t>
-            </a:r>
-            <a:endParaRPr sz="1500" dirty="0">
-              <a:solidFill>
-                <a:schemeClr val="dk1"/>
-              </a:solidFill>
-              <a:latin typeface="Roboto"/>
-              <a:ea typeface="Roboto"/>
-              <a:cs typeface="Roboto"/>
-              <a:sym typeface="Roboto"/>
-            </a:endParaRPr>
-          </a:p>
-        </p:txBody>
-      </p:sp>
-      <p:sp>
-        <p:nvSpPr>
-          <p:cNvPr id="288" name="Google Shape;288;p65"/>
-          <p:cNvSpPr/>
-          <p:nvPr/>
-        </p:nvSpPr>
-        <p:spPr>
-          <a:xfrm>
-            <a:off x="680150" y="3349125"/>
-            <a:ext cx="3384900" cy="376200"/>
-          </a:xfrm>
-          <a:prstGeom prst="roundRect">
-            <a:avLst>
-              <a:gd name="adj" fmla="val 16667"/>
-            </a:avLst>
-          </a:prstGeom>
-          <a:solidFill>
-            <a:srgbClr val="FFD966"/>
-          </a:solidFill>
-          <a:ln>
-            <a:noFill/>
-          </a:ln>
-        </p:spPr>
-        <p:txBody>
-          <a:bodyPr spcFirstLastPara="1" wrap="square" lIns="270000" tIns="91425" rIns="270000" bIns="91425" anchor="ctr" anchorCtr="0">
-            <a:noAutofit/>
-          </a:bodyPr>
-          <a:lstStyle/>
-          <a:p>
-            <a:pPr marL="0" lvl="0" indent="0" algn="l" rtl="0">
-              <a:spcBef>
-                <a:spcPts val="0"/>
-              </a:spcBef>
-              <a:spcAft>
-                <a:spcPts val="0"/>
-              </a:spcAft>
-              <a:buNone/>
-            </a:pPr>
-            <a:r>
-              <a:rPr lang="ru" sz="1500" dirty="0">
-                <a:solidFill>
-                  <a:schemeClr val="dk1"/>
-                </a:solidFill>
-                <a:latin typeface="Roboto"/>
-                <a:ea typeface="Roboto"/>
-                <a:cs typeface="Roboto"/>
-                <a:sym typeface="Roboto"/>
-              </a:rPr>
-              <a:t>4. </a:t>
-            </a:r>
-            <a:r>
-              <a:rPr lang="ru-RU" sz="1500" dirty="0">
-                <a:solidFill>
-                  <a:schemeClr val="dk1"/>
-                </a:solidFill>
-                <a:latin typeface="Roboto"/>
-                <a:ea typeface="Roboto"/>
-                <a:cs typeface="Roboto"/>
-                <a:sym typeface="Roboto"/>
-              </a:rPr>
-              <a:t>Паттерны на графике</a:t>
-            </a:r>
-            <a:endParaRPr sz="1300" dirty="0">
-              <a:solidFill>
-                <a:schemeClr val="dk1"/>
-              </a:solidFill>
-              <a:latin typeface="Roboto"/>
-              <a:ea typeface="Roboto"/>
-              <a:cs typeface="Roboto"/>
-              <a:sym typeface="Roboto"/>
-            </a:endParaRPr>
-          </a:p>
-        </p:txBody>
-      </p:sp>
-      <p:sp>
-        <p:nvSpPr>
-          <p:cNvPr id="11" name="Google Shape;288;p65">
-            <a:extLst>
-              <a:ext uri="{FF2B5EF4-FFF2-40B4-BE49-F238E27FC236}">
-                <a16:creationId xmlns:a16="http://schemas.microsoft.com/office/drawing/2014/main" id="{E70A6281-3704-B54B-BD03-7CD165FF9994}"/>
-              </a:ext>
-            </a:extLst>
-          </p:cNvPr>
-          <p:cNvSpPr/>
-          <p:nvPr/>
-        </p:nvSpPr>
-        <p:spPr>
-          <a:xfrm>
-            <a:off x="680150" y="3970880"/>
-            <a:ext cx="3384900" cy="376200"/>
-          </a:xfrm>
-          <a:prstGeom prst="roundRect">
-            <a:avLst>
-              <a:gd name="adj" fmla="val 16667"/>
-            </a:avLst>
-          </a:prstGeom>
-          <a:solidFill>
-            <a:srgbClr val="FFD966"/>
-          </a:solidFill>
-          <a:ln>
-            <a:noFill/>
-          </a:ln>
-        </p:spPr>
-        <p:txBody>
-          <a:bodyPr spcFirstLastPara="1" wrap="square" lIns="270000" tIns="91425" rIns="270000" bIns="91425" anchor="ctr" anchorCtr="0">
-            <a:noAutofit/>
-          </a:bodyPr>
-          <a:lstStyle/>
-          <a:p>
-            <a:pPr marL="0" lvl="0" indent="0" algn="l" rtl="0">
-              <a:spcBef>
-                <a:spcPts val="0"/>
-              </a:spcBef>
-              <a:spcAft>
-                <a:spcPts val="0"/>
-              </a:spcAft>
-              <a:buNone/>
-            </a:pPr>
-            <a:r>
-              <a:rPr lang="ru" sz="1500" dirty="0">
-                <a:solidFill>
-                  <a:schemeClr val="dk1"/>
-                </a:solidFill>
-                <a:latin typeface="Roboto"/>
-                <a:ea typeface="Roboto"/>
-                <a:cs typeface="Roboto"/>
-                <a:sym typeface="Roboto"/>
-              </a:rPr>
-              <a:t>5. </a:t>
-            </a:r>
-            <a:r>
-              <a:rPr lang="ru-RU" sz="1500" dirty="0">
-                <a:solidFill>
-                  <a:schemeClr val="dk1"/>
-                </a:solidFill>
-                <a:latin typeface="Roboto"/>
-                <a:ea typeface="Roboto"/>
-                <a:cs typeface="Roboto"/>
-                <a:sym typeface="Roboto"/>
-              </a:rPr>
-              <a:t>О курсе</a:t>
-            </a:r>
-            <a:endParaRPr sz="1300" dirty="0">
-              <a:solidFill>
-                <a:schemeClr val="dk1"/>
-              </a:solidFill>
-              <a:latin typeface="Roboto"/>
-              <a:ea typeface="Roboto"/>
-              <a:cs typeface="Roboto"/>
-              <a:sym typeface="Roboto"/>
-            </a:endParaRPr>
-          </a:p>
-        </p:txBody>
-      </p:sp>
-      <p:pic>
-        <p:nvPicPr>
-          <p:cNvPr id="3" name="Picture 2">
-            <a:extLst>
-              <a:ext uri="{FF2B5EF4-FFF2-40B4-BE49-F238E27FC236}">
-                <a16:creationId xmlns:a16="http://schemas.microsoft.com/office/drawing/2014/main" id="{F546CF15-E72E-E64E-B624-46A6D7BEEE65}"/>
-              </a:ext>
-            </a:extLst>
-          </p:cNvPr>
-          <p:cNvPicPr>
-            <a:picLocks noChangeAspect="1"/>
-          </p:cNvPicPr>
-          <p:nvPr/>
-        </p:nvPicPr>
-        <p:blipFill rotWithShape="1">
-          <a:blip r:embed="rId3"/>
-          <a:srcRect r="5863"/>
-          <a:stretch/>
-        </p:blipFill>
-        <p:spPr>
-          <a:xfrm>
-            <a:off x="4760850" y="1521159"/>
-            <a:ext cx="4260300" cy="2828526"/>
-          </a:xfrm>
-          <a:prstGeom prst="rect">
-            <a:avLst/>
-          </a:prstGeom>
-        </p:spPr>
-      </p:pic>
-    </p:spTree>
-  </p:cSld>
-  <p:clrMapOvr>
-    <a:masterClrMapping/>
-  </p:clrMapOvr>
-</p:sld>
-</file>
-
-<file path=ppt/slides/slide40.xml><?xml version="1.0" encoding="utf-8"?>
+<file path=ppt/slides/slide38.xml><?xml version="1.0" encoding="utf-8"?>
 <p:sld xmlns:a="http://schemas.openxmlformats.org/drawingml/2006/main" xmlns:r="http://schemas.openxmlformats.org/officeDocument/2006/relationships" xmlns:p="http://schemas.openxmlformats.org/presentationml/2006/main">
   <p:cSld>
     <p:spTree>
@@ -26474,7 +25027,7 @@
 </p:sld>
 </file>
 
-<file path=ppt/slides/slide41.xml><?xml version="1.0" encoding="utf-8"?>
+<file path=ppt/slides/slide39.xml><?xml version="1.0" encoding="utf-8"?>
 <p:sld xmlns:a="http://schemas.openxmlformats.org/drawingml/2006/main" xmlns:r="http://schemas.openxmlformats.org/officeDocument/2006/relationships" xmlns:p="http://schemas.openxmlformats.org/presentationml/2006/main">
   <p:cSld>
     <p:spTree>
@@ -26748,7 +25301,460 @@
 </p:sld>
 </file>
 
-<file path=ppt/slides/slide42.xml><?xml version="1.0" encoding="utf-8"?>
+<file path=ppt/slides/slide4.xml><?xml version="1.0" encoding="utf-8"?>
+<p:sld xmlns:a="http://schemas.openxmlformats.org/drawingml/2006/main" xmlns:r="http://schemas.openxmlformats.org/officeDocument/2006/relationships" xmlns:p="http://schemas.openxmlformats.org/presentationml/2006/main">
+  <p:cSld>
+    <p:spTree>
+      <p:nvGrpSpPr>
+        <p:cNvPr id="1" name="Shape 282"/>
+        <p:cNvGrpSpPr/>
+        <p:nvPr/>
+      </p:nvGrpSpPr>
+      <p:grpSpPr>
+        <a:xfrm>
+          <a:off x="0" y="0"/>
+          <a:ext cx="0" cy="0"/>
+          <a:chOff x="0" y="0"/>
+          <a:chExt cx="0" cy="0"/>
+        </a:xfrm>
+      </p:grpSpPr>
+      <p:sp>
+        <p:nvSpPr>
+          <p:cNvPr id="283" name="Google Shape;283;p65"/>
+          <p:cNvSpPr txBox="1">
+            <a:spLocks noGrp="1"/>
+          </p:cNvSpPr>
+          <p:nvPr>
+            <p:ph type="title"/>
+          </p:nvPr>
+        </p:nvSpPr>
+        <p:spPr>
+          <a:xfrm>
+            <a:off x="500550" y="330736"/>
+            <a:ext cx="8520600" cy="979800"/>
+          </a:xfrm>
+          <a:prstGeom prst="rect">
+            <a:avLst/>
+          </a:prstGeom>
+        </p:spPr>
+        <p:txBody>
+          <a:bodyPr spcFirstLastPara="1" wrap="square" lIns="91425" tIns="91425" rIns="91425" bIns="91425" anchor="t" anchorCtr="0">
+            <a:noAutofit/>
+          </a:bodyPr>
+          <a:lstStyle/>
+          <a:p>
+            <a:pPr marL="0" lvl="0" indent="0" algn="l" rtl="0">
+              <a:spcBef>
+                <a:spcPts val="0"/>
+              </a:spcBef>
+              <a:spcAft>
+                <a:spcPts val="0"/>
+              </a:spcAft>
+              <a:buNone/>
+            </a:pPr>
+            <a:r>
+              <a:rPr lang="ru"/>
+              <a:t>Маршрут вебинара</a:t>
+            </a:r>
+            <a:endParaRPr/>
+          </a:p>
+        </p:txBody>
+      </p:sp>
+      <p:sp>
+        <p:nvSpPr>
+          <p:cNvPr id="284" name="Google Shape;284;p65"/>
+          <p:cNvSpPr/>
+          <p:nvPr/>
+        </p:nvSpPr>
+        <p:spPr>
+          <a:xfrm>
+            <a:off x="680150" y="1521159"/>
+            <a:ext cx="3384900" cy="376200"/>
+          </a:xfrm>
+          <a:prstGeom prst="roundRect">
+            <a:avLst>
+              <a:gd name="adj" fmla="val 16667"/>
+            </a:avLst>
+          </a:prstGeom>
+          <a:solidFill>
+            <a:srgbClr val="FFD966"/>
+          </a:solidFill>
+          <a:ln>
+            <a:noFill/>
+          </a:ln>
+        </p:spPr>
+        <p:txBody>
+          <a:bodyPr spcFirstLastPara="1" wrap="square" lIns="270000" tIns="91425" rIns="270000" bIns="91425" anchor="ctr" anchorCtr="0">
+            <a:noAutofit/>
+          </a:bodyPr>
+          <a:lstStyle/>
+          <a:p>
+            <a:pPr marL="0" lvl="0" indent="0" algn="l" rtl="0">
+              <a:spcBef>
+                <a:spcPts val="0"/>
+              </a:spcBef>
+              <a:spcAft>
+                <a:spcPts val="0"/>
+              </a:spcAft>
+              <a:buNone/>
+            </a:pPr>
+            <a:r>
+              <a:rPr lang="ru" sz="1500">
+                <a:solidFill>
+                  <a:schemeClr val="dk1"/>
+                </a:solidFill>
+                <a:latin typeface="Roboto"/>
+                <a:ea typeface="Roboto"/>
+                <a:cs typeface="Roboto"/>
+                <a:sym typeface="Roboto"/>
+              </a:rPr>
+              <a:t>1. Знакомство</a:t>
+            </a:r>
+            <a:endParaRPr sz="1300">
+              <a:solidFill>
+                <a:schemeClr val="dk1"/>
+              </a:solidFill>
+              <a:latin typeface="Roboto"/>
+              <a:ea typeface="Roboto"/>
+              <a:cs typeface="Roboto"/>
+              <a:sym typeface="Roboto"/>
+            </a:endParaRPr>
+          </a:p>
+        </p:txBody>
+      </p:sp>
+      <p:sp>
+        <p:nvSpPr>
+          <p:cNvPr id="285" name="Google Shape;285;p65"/>
+          <p:cNvSpPr/>
+          <p:nvPr/>
+        </p:nvSpPr>
+        <p:spPr>
+          <a:xfrm>
+            <a:off x="680150" y="2108144"/>
+            <a:ext cx="3384900" cy="376200"/>
+          </a:xfrm>
+          <a:prstGeom prst="roundRect">
+            <a:avLst>
+              <a:gd name="adj" fmla="val 16667"/>
+            </a:avLst>
+          </a:prstGeom>
+          <a:solidFill>
+            <a:srgbClr val="FFD966"/>
+          </a:solidFill>
+          <a:ln>
+            <a:noFill/>
+          </a:ln>
+        </p:spPr>
+        <p:txBody>
+          <a:bodyPr spcFirstLastPara="1" wrap="square" lIns="270000" tIns="91425" rIns="270000" bIns="91425" anchor="ctr" anchorCtr="0">
+            <a:noAutofit/>
+          </a:bodyPr>
+          <a:lstStyle/>
+          <a:p>
+            <a:pPr marL="0" lvl="0" indent="0" algn="l" rtl="0">
+              <a:spcBef>
+                <a:spcPts val="0"/>
+              </a:spcBef>
+              <a:spcAft>
+                <a:spcPts val="0"/>
+              </a:spcAft>
+              <a:buClr>
+                <a:schemeClr val="dk1"/>
+              </a:buClr>
+              <a:buSzPts val="1100"/>
+              <a:buFont typeface="Arial"/>
+              <a:buNone/>
+            </a:pPr>
+            <a:r>
+              <a:rPr lang="ru" sz="1500">
+                <a:solidFill>
+                  <a:schemeClr val="dk1"/>
+                </a:solidFill>
+                <a:latin typeface="Roboto"/>
+                <a:ea typeface="Roboto"/>
+                <a:cs typeface="Roboto"/>
+                <a:sym typeface="Roboto"/>
+              </a:rPr>
+              <a:t>2. Об ОТУС</a:t>
+            </a:r>
+            <a:endParaRPr sz="1300">
+              <a:solidFill>
+                <a:schemeClr val="dk1"/>
+              </a:solidFill>
+              <a:latin typeface="Roboto"/>
+              <a:ea typeface="Roboto"/>
+              <a:cs typeface="Roboto"/>
+              <a:sym typeface="Roboto"/>
+            </a:endParaRPr>
+          </a:p>
+        </p:txBody>
+      </p:sp>
+      <p:sp>
+        <p:nvSpPr>
+          <p:cNvPr id="287" name="Google Shape;287;p65"/>
+          <p:cNvSpPr/>
+          <p:nvPr/>
+        </p:nvSpPr>
+        <p:spPr>
+          <a:xfrm>
+            <a:off x="680150" y="2737038"/>
+            <a:ext cx="3384900" cy="376200"/>
+          </a:xfrm>
+          <a:prstGeom prst="roundRect">
+            <a:avLst>
+              <a:gd name="adj" fmla="val 16667"/>
+            </a:avLst>
+          </a:prstGeom>
+          <a:solidFill>
+            <a:srgbClr val="FFD966"/>
+          </a:solidFill>
+          <a:ln>
+            <a:noFill/>
+          </a:ln>
+        </p:spPr>
+        <p:txBody>
+          <a:bodyPr spcFirstLastPara="1" wrap="square" lIns="270000" tIns="91425" rIns="270000" bIns="91425" anchor="ctr" anchorCtr="0">
+            <a:noAutofit/>
+          </a:bodyPr>
+          <a:lstStyle/>
+          <a:p>
+            <a:pPr marL="0" lvl="0" indent="0" algn="l" rtl="0">
+              <a:spcBef>
+                <a:spcPts val="0"/>
+              </a:spcBef>
+              <a:spcAft>
+                <a:spcPts val="0"/>
+              </a:spcAft>
+              <a:buNone/>
+            </a:pPr>
+            <a:r>
+              <a:rPr lang="ru" sz="1500" dirty="0">
+                <a:solidFill>
+                  <a:schemeClr val="dk1"/>
+                </a:solidFill>
+                <a:latin typeface="Roboto"/>
+                <a:ea typeface="Roboto"/>
+                <a:cs typeface="Roboto"/>
+                <a:sym typeface="Roboto"/>
+              </a:rPr>
+              <a:t>3. </a:t>
+            </a:r>
+            <a:r>
+              <a:rPr lang="ru-RU" sz="1500" dirty="0">
+                <a:solidFill>
+                  <a:schemeClr val="dk1"/>
+                </a:solidFill>
+                <a:latin typeface="Roboto"/>
+                <a:ea typeface="Roboto"/>
+                <a:cs typeface="Roboto"/>
+                <a:sym typeface="Roboto"/>
+              </a:rPr>
+              <a:t>Типы графиков</a:t>
+            </a:r>
+            <a:endParaRPr sz="1500" dirty="0">
+              <a:solidFill>
+                <a:schemeClr val="dk1"/>
+              </a:solidFill>
+              <a:latin typeface="Roboto"/>
+              <a:ea typeface="Roboto"/>
+              <a:cs typeface="Roboto"/>
+              <a:sym typeface="Roboto"/>
+            </a:endParaRPr>
+          </a:p>
+        </p:txBody>
+      </p:sp>
+      <p:sp>
+        <p:nvSpPr>
+          <p:cNvPr id="288" name="Google Shape;288;p65"/>
+          <p:cNvSpPr/>
+          <p:nvPr/>
+        </p:nvSpPr>
+        <p:spPr>
+          <a:xfrm>
+            <a:off x="680150" y="3349125"/>
+            <a:ext cx="3384900" cy="376200"/>
+          </a:xfrm>
+          <a:prstGeom prst="roundRect">
+            <a:avLst>
+              <a:gd name="adj" fmla="val 16667"/>
+            </a:avLst>
+          </a:prstGeom>
+          <a:solidFill>
+            <a:srgbClr val="FFD966"/>
+          </a:solidFill>
+          <a:ln>
+            <a:noFill/>
+          </a:ln>
+        </p:spPr>
+        <p:txBody>
+          <a:bodyPr spcFirstLastPara="1" wrap="square" lIns="270000" tIns="91425" rIns="270000" bIns="91425" anchor="ctr" anchorCtr="0">
+            <a:noAutofit/>
+          </a:bodyPr>
+          <a:lstStyle/>
+          <a:p>
+            <a:pPr marL="0" lvl="0" indent="0" algn="l" rtl="0">
+              <a:spcBef>
+                <a:spcPts val="0"/>
+              </a:spcBef>
+              <a:spcAft>
+                <a:spcPts val="0"/>
+              </a:spcAft>
+              <a:buNone/>
+            </a:pPr>
+            <a:r>
+              <a:rPr lang="ru" sz="1500" dirty="0">
+                <a:solidFill>
+                  <a:schemeClr val="dk1"/>
+                </a:solidFill>
+                <a:latin typeface="Roboto"/>
+                <a:ea typeface="Roboto"/>
+                <a:cs typeface="Roboto"/>
+                <a:sym typeface="Roboto"/>
+              </a:rPr>
+              <a:t>4. </a:t>
+            </a:r>
+            <a:r>
+              <a:rPr lang="ru-RU" sz="1500" dirty="0">
+                <a:solidFill>
+                  <a:schemeClr val="dk1"/>
+                </a:solidFill>
+                <a:latin typeface="Roboto"/>
+                <a:ea typeface="Roboto"/>
+                <a:cs typeface="Roboto"/>
+                <a:sym typeface="Roboto"/>
+              </a:rPr>
+              <a:t>Паттерны на графике</a:t>
+            </a:r>
+            <a:endParaRPr sz="1300" dirty="0">
+              <a:solidFill>
+                <a:schemeClr val="dk1"/>
+              </a:solidFill>
+              <a:latin typeface="Roboto"/>
+              <a:ea typeface="Roboto"/>
+              <a:cs typeface="Roboto"/>
+              <a:sym typeface="Roboto"/>
+            </a:endParaRPr>
+          </a:p>
+        </p:txBody>
+      </p:sp>
+      <p:sp>
+        <p:nvSpPr>
+          <p:cNvPr id="11" name="Google Shape;288;p65">
+            <a:extLst>
+              <a:ext uri="{FF2B5EF4-FFF2-40B4-BE49-F238E27FC236}">
+                <a16:creationId xmlns:a16="http://schemas.microsoft.com/office/drawing/2014/main" id="{E70A6281-3704-B54B-BD03-7CD165FF9994}"/>
+              </a:ext>
+            </a:extLst>
+          </p:cNvPr>
+          <p:cNvSpPr/>
+          <p:nvPr/>
+        </p:nvSpPr>
+        <p:spPr>
+          <a:xfrm>
+            <a:off x="680150" y="3970880"/>
+            <a:ext cx="3384900" cy="376200"/>
+          </a:xfrm>
+          <a:prstGeom prst="roundRect">
+            <a:avLst>
+              <a:gd name="adj" fmla="val 16667"/>
+            </a:avLst>
+          </a:prstGeom>
+          <a:solidFill>
+            <a:srgbClr val="FFD966"/>
+          </a:solidFill>
+          <a:ln>
+            <a:noFill/>
+          </a:ln>
+        </p:spPr>
+        <p:txBody>
+          <a:bodyPr spcFirstLastPara="1" wrap="square" lIns="270000" tIns="91425" rIns="270000" bIns="91425" anchor="ctr" anchorCtr="0">
+            <a:noAutofit/>
+          </a:bodyPr>
+          <a:lstStyle/>
+          <a:p>
+            <a:pPr marL="0" lvl="0" indent="0" algn="l" rtl="0">
+              <a:spcBef>
+                <a:spcPts val="0"/>
+              </a:spcBef>
+              <a:spcAft>
+                <a:spcPts val="0"/>
+              </a:spcAft>
+              <a:buNone/>
+            </a:pPr>
+            <a:r>
+              <a:rPr lang="ru" sz="1500" dirty="0">
+                <a:solidFill>
+                  <a:schemeClr val="dk1"/>
+                </a:solidFill>
+                <a:latin typeface="Roboto"/>
+                <a:ea typeface="Roboto"/>
+                <a:cs typeface="Roboto"/>
+                <a:sym typeface="Roboto"/>
+              </a:rPr>
+              <a:t>5. </a:t>
+            </a:r>
+            <a:r>
+              <a:rPr lang="ru-RU" sz="1500" dirty="0">
+                <a:solidFill>
+                  <a:schemeClr val="dk1"/>
+                </a:solidFill>
+                <a:latin typeface="Roboto"/>
+                <a:ea typeface="Roboto"/>
+                <a:cs typeface="Roboto"/>
+                <a:sym typeface="Roboto"/>
+              </a:rPr>
+              <a:t>О курсе</a:t>
+            </a:r>
+            <a:endParaRPr sz="1300" dirty="0">
+              <a:solidFill>
+                <a:schemeClr val="dk1"/>
+              </a:solidFill>
+              <a:latin typeface="Roboto"/>
+              <a:ea typeface="Roboto"/>
+              <a:cs typeface="Roboto"/>
+              <a:sym typeface="Roboto"/>
+            </a:endParaRPr>
+          </a:p>
+        </p:txBody>
+      </p:sp>
+      <p:pic>
+        <p:nvPicPr>
+          <p:cNvPr id="3" name="Picture 2">
+            <a:extLst>
+              <a:ext uri="{FF2B5EF4-FFF2-40B4-BE49-F238E27FC236}">
+                <a16:creationId xmlns:a16="http://schemas.microsoft.com/office/drawing/2014/main" id="{F546CF15-E72E-E64E-B624-46A6D7BEEE65}"/>
+              </a:ext>
+            </a:extLst>
+          </p:cNvPr>
+          <p:cNvPicPr>
+            <a:picLocks noChangeAspect="1"/>
+          </p:cNvPicPr>
+          <p:nvPr/>
+        </p:nvPicPr>
+        <p:blipFill rotWithShape="1">
+          <a:blip r:embed="rId3"/>
+          <a:srcRect r="5863"/>
+          <a:stretch/>
+        </p:blipFill>
+        <p:spPr>
+          <a:xfrm>
+            <a:off x="4760850" y="1521159"/>
+            <a:ext cx="4260300" cy="2828526"/>
+          </a:xfrm>
+          <a:prstGeom prst="rect">
+            <a:avLst/>
+          </a:prstGeom>
+        </p:spPr>
+      </p:pic>
+    </p:spTree>
+  </p:cSld>
+  <p:clrMapOvr>
+    <a:masterClrMapping/>
+  </p:clrMapOvr>
+</p:sld>
+</file>
+
+<file path=ppt/slides/slide40.xml><?xml version="1.0" encoding="utf-8"?>
 <p:sld xmlns:a="http://schemas.openxmlformats.org/drawingml/2006/main" xmlns:r="http://schemas.openxmlformats.org/officeDocument/2006/relationships" xmlns:p="http://schemas.openxmlformats.org/presentationml/2006/main">
   <p:cSld>
     <p:spTree>
@@ -27695,7 +26701,7 @@
 </p:sld>
 </file>
 
-<file path=ppt/slides/slide43.xml><?xml version="1.0" encoding="utf-8"?>
+<file path=ppt/slides/slide41.xml><?xml version="1.0" encoding="utf-8"?>
 <p:sld xmlns:a="http://schemas.openxmlformats.org/drawingml/2006/main" xmlns:r="http://schemas.openxmlformats.org/officeDocument/2006/relationships" xmlns:p="http://schemas.openxmlformats.org/presentationml/2006/main">
   <p:cSld>
     <p:spTree>
@@ -27774,7 +26780,7 @@
 </p:sld>
 </file>
 
-<file path=ppt/slides/slide44.xml><?xml version="1.0" encoding="utf-8"?>
+<file path=ppt/slides/slide42.xml><?xml version="1.0" encoding="utf-8"?>
 <p:sld xmlns:a="http://schemas.openxmlformats.org/drawingml/2006/main" xmlns:r="http://schemas.openxmlformats.org/officeDocument/2006/relationships" xmlns:p="http://schemas.openxmlformats.org/presentationml/2006/main">
   <p:cSld>
     <p:spTree>
@@ -29232,7 +28238,7 @@
 </p:sld>
 </file>
 
-<file path=ppt/slides/slide45.xml><?xml version="1.0" encoding="utf-8"?>
+<file path=ppt/slides/slide43.xml><?xml version="1.0" encoding="utf-8"?>
 <p:sld xmlns:a="http://schemas.openxmlformats.org/drawingml/2006/main" xmlns:r="http://schemas.openxmlformats.org/officeDocument/2006/relationships" xmlns:p="http://schemas.openxmlformats.org/presentationml/2006/main">
   <p:cSld>
     <p:spTree>
@@ -30294,185 +29300,6 @@
           </a:fontRef>
         </p:style>
       </p:cxnSp>
-      <p:sp>
-        <p:nvSpPr>
-          <p:cNvPr id="8" name="TextBox 7">
-            <a:extLst>
-              <a:ext uri="{FF2B5EF4-FFF2-40B4-BE49-F238E27FC236}">
-                <a16:creationId xmlns:a16="http://schemas.microsoft.com/office/drawing/2014/main" id="{6F6F7B92-1FC8-F044-8809-FBF8C1B8F030}"/>
-              </a:ext>
-            </a:extLst>
-          </p:cNvPr>
-          <p:cNvSpPr txBox="1"/>
-          <p:nvPr/>
-        </p:nvSpPr>
-        <p:spPr>
-          <a:xfrm>
-            <a:off x="1082487" y="1951507"/>
-            <a:ext cx="662361" cy="276999"/>
-          </a:xfrm>
-          <a:prstGeom prst="rect">
-            <a:avLst/>
-          </a:prstGeom>
-          <a:noFill/>
-        </p:spPr>
-        <p:txBody>
-          <a:bodyPr wrap="none" rtlCol="0">
-            <a:spAutoFit/>
-          </a:bodyPr>
-          <a:lstStyle/>
-          <a:p>
-            <a:r>
-              <a:rPr lang="ru-RU" sz="1200" dirty="0"/>
-              <a:t>31</a:t>
-            </a:r>
-            <a:r>
-              <a:rPr lang="en-US" sz="1200" dirty="0"/>
-              <a:t>.07 -</a:t>
-            </a:r>
-          </a:p>
-        </p:txBody>
-      </p:sp>
-      <p:sp>
-        <p:nvSpPr>
-          <p:cNvPr id="24" name="TextBox 23">
-            <a:extLst>
-              <a:ext uri="{FF2B5EF4-FFF2-40B4-BE49-F238E27FC236}">
-                <a16:creationId xmlns:a16="http://schemas.microsoft.com/office/drawing/2014/main" id="{E5434182-F8BC-6A45-B76D-A6DDAA3D9E00}"/>
-              </a:ext>
-            </a:extLst>
-          </p:cNvPr>
-          <p:cNvSpPr txBox="1"/>
-          <p:nvPr/>
-        </p:nvSpPr>
-        <p:spPr>
-          <a:xfrm>
-            <a:off x="1082487" y="2451661"/>
-            <a:ext cx="662361" cy="276999"/>
-          </a:xfrm>
-          <a:prstGeom prst="rect">
-            <a:avLst/>
-          </a:prstGeom>
-          <a:noFill/>
-        </p:spPr>
-        <p:txBody>
-          <a:bodyPr wrap="none" rtlCol="0">
-            <a:spAutoFit/>
-          </a:bodyPr>
-          <a:lstStyle/>
-          <a:p>
-            <a:r>
-              <a:rPr lang="en-US" sz="1200" dirty="0"/>
-              <a:t>07.08 -</a:t>
-            </a:r>
-          </a:p>
-        </p:txBody>
-      </p:sp>
-      <p:sp>
-        <p:nvSpPr>
-          <p:cNvPr id="25" name="TextBox 24">
-            <a:extLst>
-              <a:ext uri="{FF2B5EF4-FFF2-40B4-BE49-F238E27FC236}">
-                <a16:creationId xmlns:a16="http://schemas.microsoft.com/office/drawing/2014/main" id="{B1FFEC08-4192-194E-9CDB-196400C6DFCC}"/>
-              </a:ext>
-            </a:extLst>
-          </p:cNvPr>
-          <p:cNvSpPr txBox="1"/>
-          <p:nvPr/>
-        </p:nvSpPr>
-        <p:spPr>
-          <a:xfrm>
-            <a:off x="1082487" y="2966252"/>
-            <a:ext cx="662361" cy="276999"/>
-          </a:xfrm>
-          <a:prstGeom prst="rect">
-            <a:avLst/>
-          </a:prstGeom>
-          <a:noFill/>
-        </p:spPr>
-        <p:txBody>
-          <a:bodyPr wrap="none" rtlCol="0">
-            <a:spAutoFit/>
-          </a:bodyPr>
-          <a:lstStyle/>
-          <a:p>
-            <a:r>
-              <a:rPr lang="en-US" sz="1200" dirty="0"/>
-              <a:t>12.08 -</a:t>
-            </a:r>
-          </a:p>
-        </p:txBody>
-      </p:sp>
-      <p:sp>
-        <p:nvSpPr>
-          <p:cNvPr id="26" name="TextBox 25">
-            <a:extLst>
-              <a:ext uri="{FF2B5EF4-FFF2-40B4-BE49-F238E27FC236}">
-                <a16:creationId xmlns:a16="http://schemas.microsoft.com/office/drawing/2014/main" id="{63DA3473-8780-494C-8D9C-4086F1D06A63}"/>
-              </a:ext>
-            </a:extLst>
-          </p:cNvPr>
-          <p:cNvSpPr txBox="1"/>
-          <p:nvPr/>
-        </p:nvSpPr>
-        <p:spPr>
-          <a:xfrm>
-            <a:off x="1082487" y="3469826"/>
-            <a:ext cx="662361" cy="276999"/>
-          </a:xfrm>
-          <a:prstGeom prst="rect">
-            <a:avLst/>
-          </a:prstGeom>
-          <a:noFill/>
-        </p:spPr>
-        <p:txBody>
-          <a:bodyPr wrap="none" rtlCol="0">
-            <a:spAutoFit/>
-          </a:bodyPr>
-          <a:lstStyle/>
-          <a:p>
-            <a:r>
-              <a:rPr lang="en-US" sz="1200" dirty="0"/>
-              <a:t>14.08 -</a:t>
-            </a:r>
-          </a:p>
-        </p:txBody>
-      </p:sp>
-      <p:sp>
-        <p:nvSpPr>
-          <p:cNvPr id="27" name="TextBox 26">
-            <a:extLst>
-              <a:ext uri="{FF2B5EF4-FFF2-40B4-BE49-F238E27FC236}">
-                <a16:creationId xmlns:a16="http://schemas.microsoft.com/office/drawing/2014/main" id="{41F47461-4FA5-1F4E-B2BC-75B5E5DD97B3}"/>
-              </a:ext>
-            </a:extLst>
-          </p:cNvPr>
-          <p:cNvSpPr txBox="1"/>
-          <p:nvPr/>
-        </p:nvSpPr>
-        <p:spPr>
-          <a:xfrm>
-            <a:off x="1082487" y="3980043"/>
-            <a:ext cx="662361" cy="276999"/>
-          </a:xfrm>
-          <a:prstGeom prst="rect">
-            <a:avLst/>
-          </a:prstGeom>
-          <a:noFill/>
-        </p:spPr>
-        <p:txBody>
-          <a:bodyPr wrap="none" rtlCol="0">
-            <a:spAutoFit/>
-          </a:bodyPr>
-          <a:lstStyle/>
-          <a:p>
-            <a:r>
-              <a:rPr lang="en-US" sz="1200" dirty="0"/>
-              <a:t>19.08 -</a:t>
-            </a:r>
-          </a:p>
-        </p:txBody>
-      </p:sp>
       <p:pic>
         <p:nvPicPr>
           <p:cNvPr id="32" name="Google Shape;225;p40">
@@ -30517,7 +29344,7 @@
 </p:sld>
 </file>
 
-<file path=ppt/slides/slide46.xml><?xml version="1.0" encoding="utf-8"?>
+<file path=ppt/slides/slide44.xml><?xml version="1.0" encoding="utf-8"?>
 <p:sld xmlns:a="http://schemas.openxmlformats.org/drawingml/2006/main" xmlns:r="http://schemas.openxmlformats.org/officeDocument/2006/relationships" xmlns:p="http://schemas.openxmlformats.org/presentationml/2006/main">
   <p:cSld>
     <p:spTree>
@@ -31446,189 +30273,6 @@
           </a:fontRef>
         </p:style>
       </p:cxnSp>
-      <p:sp>
-        <p:nvSpPr>
-          <p:cNvPr id="8" name="TextBox 7">
-            <a:extLst>
-              <a:ext uri="{FF2B5EF4-FFF2-40B4-BE49-F238E27FC236}">
-                <a16:creationId xmlns:a16="http://schemas.microsoft.com/office/drawing/2014/main" id="{6F6F7B92-1FC8-F044-8809-FBF8C1B8F030}"/>
-              </a:ext>
-            </a:extLst>
-          </p:cNvPr>
-          <p:cNvSpPr txBox="1"/>
-          <p:nvPr/>
-        </p:nvSpPr>
-        <p:spPr>
-          <a:xfrm>
-            <a:off x="1082487" y="1951507"/>
-            <a:ext cx="662361" cy="276999"/>
-          </a:xfrm>
-          <a:prstGeom prst="rect">
-            <a:avLst/>
-          </a:prstGeom>
-          <a:noFill/>
-        </p:spPr>
-        <p:txBody>
-          <a:bodyPr wrap="none" rtlCol="0">
-            <a:spAutoFit/>
-          </a:bodyPr>
-          <a:lstStyle/>
-          <a:p>
-            <a:r>
-              <a:rPr lang="en-US" sz="1200" dirty="0"/>
-              <a:t>2</a:t>
-            </a:r>
-            <a:r>
-              <a:rPr lang="ru-RU" sz="1200" dirty="0"/>
-              <a:t>1</a:t>
-            </a:r>
-            <a:r>
-              <a:rPr lang="en-US" sz="1200" dirty="0"/>
-              <a:t>.08 -</a:t>
-            </a:r>
-          </a:p>
-        </p:txBody>
-      </p:sp>
-      <p:sp>
-        <p:nvSpPr>
-          <p:cNvPr id="24" name="TextBox 23">
-            <a:extLst>
-              <a:ext uri="{FF2B5EF4-FFF2-40B4-BE49-F238E27FC236}">
-                <a16:creationId xmlns:a16="http://schemas.microsoft.com/office/drawing/2014/main" id="{E5434182-F8BC-6A45-B76D-A6DDAA3D9E00}"/>
-              </a:ext>
-            </a:extLst>
-          </p:cNvPr>
-          <p:cNvSpPr txBox="1"/>
-          <p:nvPr/>
-        </p:nvSpPr>
-        <p:spPr>
-          <a:xfrm>
-            <a:off x="1082487" y="2451661"/>
-            <a:ext cx="662361" cy="276999"/>
-          </a:xfrm>
-          <a:prstGeom prst="rect">
-            <a:avLst/>
-          </a:prstGeom>
-          <a:noFill/>
-        </p:spPr>
-        <p:txBody>
-          <a:bodyPr wrap="none" rtlCol="0">
-            <a:spAutoFit/>
-          </a:bodyPr>
-          <a:lstStyle/>
-          <a:p>
-            <a:r>
-              <a:rPr lang="en-US" sz="1200" dirty="0"/>
-              <a:t>26.08 -</a:t>
-            </a:r>
-          </a:p>
-        </p:txBody>
-      </p:sp>
-      <p:sp>
-        <p:nvSpPr>
-          <p:cNvPr id="25" name="TextBox 24">
-            <a:extLst>
-              <a:ext uri="{FF2B5EF4-FFF2-40B4-BE49-F238E27FC236}">
-                <a16:creationId xmlns:a16="http://schemas.microsoft.com/office/drawing/2014/main" id="{B1FFEC08-4192-194E-9CDB-196400C6DFCC}"/>
-              </a:ext>
-            </a:extLst>
-          </p:cNvPr>
-          <p:cNvSpPr txBox="1"/>
-          <p:nvPr/>
-        </p:nvSpPr>
-        <p:spPr>
-          <a:xfrm>
-            <a:off x="1082487" y="2966252"/>
-            <a:ext cx="662361" cy="276999"/>
-          </a:xfrm>
-          <a:prstGeom prst="rect">
-            <a:avLst/>
-          </a:prstGeom>
-          <a:noFill/>
-        </p:spPr>
-        <p:txBody>
-          <a:bodyPr wrap="none" rtlCol="0">
-            <a:spAutoFit/>
-          </a:bodyPr>
-          <a:lstStyle/>
-          <a:p>
-            <a:r>
-              <a:rPr lang="en-US" sz="1200" dirty="0"/>
-              <a:t>28.08 -</a:t>
-            </a:r>
-          </a:p>
-        </p:txBody>
-      </p:sp>
-      <p:sp>
-        <p:nvSpPr>
-          <p:cNvPr id="26" name="TextBox 25">
-            <a:extLst>
-              <a:ext uri="{FF2B5EF4-FFF2-40B4-BE49-F238E27FC236}">
-                <a16:creationId xmlns:a16="http://schemas.microsoft.com/office/drawing/2014/main" id="{63DA3473-8780-494C-8D9C-4086F1D06A63}"/>
-              </a:ext>
-            </a:extLst>
-          </p:cNvPr>
-          <p:cNvSpPr txBox="1"/>
-          <p:nvPr/>
-        </p:nvSpPr>
-        <p:spPr>
-          <a:xfrm>
-            <a:off x="1082487" y="3469826"/>
-            <a:ext cx="662361" cy="276999"/>
-          </a:xfrm>
-          <a:prstGeom prst="rect">
-            <a:avLst/>
-          </a:prstGeom>
-          <a:noFill/>
-        </p:spPr>
-        <p:txBody>
-          <a:bodyPr wrap="none" rtlCol="0">
-            <a:spAutoFit/>
-          </a:bodyPr>
-          <a:lstStyle/>
-          <a:p>
-            <a:r>
-              <a:rPr lang="en-US" sz="1200" dirty="0"/>
-              <a:t>02.09 -</a:t>
-            </a:r>
-          </a:p>
-        </p:txBody>
-      </p:sp>
-      <p:sp>
-        <p:nvSpPr>
-          <p:cNvPr id="27" name="TextBox 26">
-            <a:extLst>
-              <a:ext uri="{FF2B5EF4-FFF2-40B4-BE49-F238E27FC236}">
-                <a16:creationId xmlns:a16="http://schemas.microsoft.com/office/drawing/2014/main" id="{41F47461-4FA5-1F4E-B2BC-75B5E5DD97B3}"/>
-              </a:ext>
-            </a:extLst>
-          </p:cNvPr>
-          <p:cNvSpPr txBox="1"/>
-          <p:nvPr/>
-        </p:nvSpPr>
-        <p:spPr>
-          <a:xfrm>
-            <a:off x="1082487" y="3980043"/>
-            <a:ext cx="662361" cy="276999"/>
-          </a:xfrm>
-          <a:prstGeom prst="rect">
-            <a:avLst/>
-          </a:prstGeom>
-          <a:noFill/>
-        </p:spPr>
-        <p:txBody>
-          <a:bodyPr wrap="none" rtlCol="0">
-            <a:spAutoFit/>
-          </a:bodyPr>
-          <a:lstStyle/>
-          <a:p>
-            <a:r>
-              <a:rPr lang="en-US" sz="1200" dirty="0"/>
-              <a:t>04.09 -</a:t>
-            </a:r>
-          </a:p>
-        </p:txBody>
-      </p:sp>
       <p:pic>
         <p:nvPicPr>
           <p:cNvPr id="28" name="Google Shape;225;p40">
@@ -31757,7 +30401,7 @@
 </p:sld>
 </file>
 
-<file path=ppt/slides/slide47.xml><?xml version="1.0" encoding="utf-8"?>
+<file path=ppt/slides/slide45.xml><?xml version="1.0" encoding="utf-8"?>
 <p:sld xmlns:a="http://schemas.openxmlformats.org/drawingml/2006/main" xmlns:r="http://schemas.openxmlformats.org/officeDocument/2006/relationships" xmlns:p="http://schemas.openxmlformats.org/presentationml/2006/main">
   <p:cSld>
     <p:spTree>
@@ -32688,181 +31332,6 @@
           </a:fontRef>
         </p:style>
       </p:cxnSp>
-      <p:sp>
-        <p:nvSpPr>
-          <p:cNvPr id="8" name="TextBox 7">
-            <a:extLst>
-              <a:ext uri="{FF2B5EF4-FFF2-40B4-BE49-F238E27FC236}">
-                <a16:creationId xmlns:a16="http://schemas.microsoft.com/office/drawing/2014/main" id="{6F6F7B92-1FC8-F044-8809-FBF8C1B8F030}"/>
-              </a:ext>
-            </a:extLst>
-          </p:cNvPr>
-          <p:cNvSpPr txBox="1"/>
-          <p:nvPr/>
-        </p:nvSpPr>
-        <p:spPr>
-          <a:xfrm>
-            <a:off x="1082487" y="1951507"/>
-            <a:ext cx="662361" cy="276999"/>
-          </a:xfrm>
-          <a:prstGeom prst="rect">
-            <a:avLst/>
-          </a:prstGeom>
-          <a:noFill/>
-        </p:spPr>
-        <p:txBody>
-          <a:bodyPr wrap="none" rtlCol="0">
-            <a:spAutoFit/>
-          </a:bodyPr>
-          <a:lstStyle/>
-          <a:p>
-            <a:r>
-              <a:rPr lang="en-US" sz="1200" dirty="0"/>
-              <a:t>09.09 -</a:t>
-            </a:r>
-          </a:p>
-        </p:txBody>
-      </p:sp>
-      <p:sp>
-        <p:nvSpPr>
-          <p:cNvPr id="24" name="TextBox 23">
-            <a:extLst>
-              <a:ext uri="{FF2B5EF4-FFF2-40B4-BE49-F238E27FC236}">
-                <a16:creationId xmlns:a16="http://schemas.microsoft.com/office/drawing/2014/main" id="{E5434182-F8BC-6A45-B76D-A6DDAA3D9E00}"/>
-              </a:ext>
-            </a:extLst>
-          </p:cNvPr>
-          <p:cNvSpPr txBox="1"/>
-          <p:nvPr/>
-        </p:nvSpPr>
-        <p:spPr>
-          <a:xfrm>
-            <a:off x="1082487" y="2451661"/>
-            <a:ext cx="662361" cy="276999"/>
-          </a:xfrm>
-          <a:prstGeom prst="rect">
-            <a:avLst/>
-          </a:prstGeom>
-          <a:noFill/>
-        </p:spPr>
-        <p:txBody>
-          <a:bodyPr wrap="none" rtlCol="0">
-            <a:spAutoFit/>
-          </a:bodyPr>
-          <a:lstStyle/>
-          <a:p>
-            <a:r>
-              <a:rPr lang="en-US" sz="1200" dirty="0"/>
-              <a:t>11.09 -</a:t>
-            </a:r>
-          </a:p>
-        </p:txBody>
-      </p:sp>
-      <p:sp>
-        <p:nvSpPr>
-          <p:cNvPr id="25" name="TextBox 24">
-            <a:extLst>
-              <a:ext uri="{FF2B5EF4-FFF2-40B4-BE49-F238E27FC236}">
-                <a16:creationId xmlns:a16="http://schemas.microsoft.com/office/drawing/2014/main" id="{B1FFEC08-4192-194E-9CDB-196400C6DFCC}"/>
-              </a:ext>
-            </a:extLst>
-          </p:cNvPr>
-          <p:cNvSpPr txBox="1"/>
-          <p:nvPr/>
-        </p:nvSpPr>
-        <p:spPr>
-          <a:xfrm>
-            <a:off x="1082487" y="2966252"/>
-            <a:ext cx="662361" cy="276999"/>
-          </a:xfrm>
-          <a:prstGeom prst="rect">
-            <a:avLst/>
-          </a:prstGeom>
-          <a:noFill/>
-        </p:spPr>
-        <p:txBody>
-          <a:bodyPr wrap="none" rtlCol="0">
-            <a:spAutoFit/>
-          </a:bodyPr>
-          <a:lstStyle/>
-          <a:p>
-            <a:r>
-              <a:rPr lang="en-US" sz="1200" dirty="0"/>
-              <a:t>16.09 -</a:t>
-            </a:r>
-          </a:p>
-        </p:txBody>
-      </p:sp>
-      <p:sp>
-        <p:nvSpPr>
-          <p:cNvPr id="26" name="TextBox 25">
-            <a:extLst>
-              <a:ext uri="{FF2B5EF4-FFF2-40B4-BE49-F238E27FC236}">
-                <a16:creationId xmlns:a16="http://schemas.microsoft.com/office/drawing/2014/main" id="{63DA3473-8780-494C-8D9C-4086F1D06A63}"/>
-              </a:ext>
-            </a:extLst>
-          </p:cNvPr>
-          <p:cNvSpPr txBox="1"/>
-          <p:nvPr/>
-        </p:nvSpPr>
-        <p:spPr>
-          <a:xfrm>
-            <a:off x="1082487" y="3469826"/>
-            <a:ext cx="662361" cy="276999"/>
-          </a:xfrm>
-          <a:prstGeom prst="rect">
-            <a:avLst/>
-          </a:prstGeom>
-          <a:noFill/>
-        </p:spPr>
-        <p:txBody>
-          <a:bodyPr wrap="none" rtlCol="0">
-            <a:spAutoFit/>
-          </a:bodyPr>
-          <a:lstStyle/>
-          <a:p>
-            <a:r>
-              <a:rPr lang="en-US" sz="1200" dirty="0"/>
-              <a:t>18.09 -</a:t>
-            </a:r>
-          </a:p>
-        </p:txBody>
-      </p:sp>
-      <p:sp>
-        <p:nvSpPr>
-          <p:cNvPr id="27" name="TextBox 26">
-            <a:extLst>
-              <a:ext uri="{FF2B5EF4-FFF2-40B4-BE49-F238E27FC236}">
-                <a16:creationId xmlns:a16="http://schemas.microsoft.com/office/drawing/2014/main" id="{41F47461-4FA5-1F4E-B2BC-75B5E5DD97B3}"/>
-              </a:ext>
-            </a:extLst>
-          </p:cNvPr>
-          <p:cNvSpPr txBox="1"/>
-          <p:nvPr/>
-        </p:nvSpPr>
-        <p:spPr>
-          <a:xfrm>
-            <a:off x="1082487" y="3980043"/>
-            <a:ext cx="662361" cy="276999"/>
-          </a:xfrm>
-          <a:prstGeom prst="rect">
-            <a:avLst/>
-          </a:prstGeom>
-          <a:noFill/>
-        </p:spPr>
-        <p:txBody>
-          <a:bodyPr wrap="none" rtlCol="0">
-            <a:spAutoFit/>
-          </a:bodyPr>
-          <a:lstStyle/>
-          <a:p>
-            <a:r>
-              <a:rPr lang="en-US" sz="1200" dirty="0"/>
-              <a:t>23.09 -</a:t>
-            </a:r>
-          </a:p>
-        </p:txBody>
-      </p:sp>
       <p:pic>
         <p:nvPicPr>
           <p:cNvPr id="46" name="Google Shape;530;p82">
@@ -32991,7 +31460,7 @@
 </p:sld>
 </file>
 
-<file path=ppt/slides/slide48.xml><?xml version="1.0" encoding="utf-8"?>
+<file path=ppt/slides/slide46.xml><?xml version="1.0" encoding="utf-8"?>
 <p:sld xmlns:a="http://schemas.openxmlformats.org/drawingml/2006/main" xmlns:r="http://schemas.openxmlformats.org/officeDocument/2006/relationships" xmlns:p="http://schemas.openxmlformats.org/presentationml/2006/main">
   <p:cSld>
     <p:spTree>
@@ -33934,181 +32403,6 @@
           </a:fontRef>
         </p:style>
       </p:cxnSp>
-      <p:sp>
-        <p:nvSpPr>
-          <p:cNvPr id="8" name="TextBox 7">
-            <a:extLst>
-              <a:ext uri="{FF2B5EF4-FFF2-40B4-BE49-F238E27FC236}">
-                <a16:creationId xmlns:a16="http://schemas.microsoft.com/office/drawing/2014/main" id="{6F6F7B92-1FC8-F044-8809-FBF8C1B8F030}"/>
-              </a:ext>
-            </a:extLst>
-          </p:cNvPr>
-          <p:cNvSpPr txBox="1"/>
-          <p:nvPr/>
-        </p:nvSpPr>
-        <p:spPr>
-          <a:xfrm>
-            <a:off x="1082487" y="1951507"/>
-            <a:ext cx="662361" cy="276999"/>
-          </a:xfrm>
-          <a:prstGeom prst="rect">
-            <a:avLst/>
-          </a:prstGeom>
-          <a:noFill/>
-        </p:spPr>
-        <p:txBody>
-          <a:bodyPr wrap="none" rtlCol="0">
-            <a:spAutoFit/>
-          </a:bodyPr>
-          <a:lstStyle/>
-          <a:p>
-            <a:r>
-              <a:rPr lang="en-US" sz="1200" dirty="0"/>
-              <a:t>02.10 -</a:t>
-            </a:r>
-          </a:p>
-        </p:txBody>
-      </p:sp>
-      <p:sp>
-        <p:nvSpPr>
-          <p:cNvPr id="24" name="TextBox 23">
-            <a:extLst>
-              <a:ext uri="{FF2B5EF4-FFF2-40B4-BE49-F238E27FC236}">
-                <a16:creationId xmlns:a16="http://schemas.microsoft.com/office/drawing/2014/main" id="{E5434182-F8BC-6A45-B76D-A6DDAA3D9E00}"/>
-              </a:ext>
-            </a:extLst>
-          </p:cNvPr>
-          <p:cNvSpPr txBox="1"/>
-          <p:nvPr/>
-        </p:nvSpPr>
-        <p:spPr>
-          <a:xfrm>
-            <a:off x="1082487" y="2451661"/>
-            <a:ext cx="662361" cy="276999"/>
-          </a:xfrm>
-          <a:prstGeom prst="rect">
-            <a:avLst/>
-          </a:prstGeom>
-          <a:noFill/>
-        </p:spPr>
-        <p:txBody>
-          <a:bodyPr wrap="none" rtlCol="0">
-            <a:spAutoFit/>
-          </a:bodyPr>
-          <a:lstStyle/>
-          <a:p>
-            <a:r>
-              <a:rPr lang="en-US" sz="1200" dirty="0"/>
-              <a:t>07.10 -</a:t>
-            </a:r>
-          </a:p>
-        </p:txBody>
-      </p:sp>
-      <p:sp>
-        <p:nvSpPr>
-          <p:cNvPr id="25" name="TextBox 24">
-            <a:extLst>
-              <a:ext uri="{FF2B5EF4-FFF2-40B4-BE49-F238E27FC236}">
-                <a16:creationId xmlns:a16="http://schemas.microsoft.com/office/drawing/2014/main" id="{B1FFEC08-4192-194E-9CDB-196400C6DFCC}"/>
-              </a:ext>
-            </a:extLst>
-          </p:cNvPr>
-          <p:cNvSpPr txBox="1"/>
-          <p:nvPr/>
-        </p:nvSpPr>
-        <p:spPr>
-          <a:xfrm>
-            <a:off x="1082487" y="2966252"/>
-            <a:ext cx="662361" cy="276999"/>
-          </a:xfrm>
-          <a:prstGeom prst="rect">
-            <a:avLst/>
-          </a:prstGeom>
-          <a:noFill/>
-        </p:spPr>
-        <p:txBody>
-          <a:bodyPr wrap="none" rtlCol="0">
-            <a:spAutoFit/>
-          </a:bodyPr>
-          <a:lstStyle/>
-          <a:p>
-            <a:r>
-              <a:rPr lang="en-US" sz="1200" dirty="0"/>
-              <a:t>09.10 -</a:t>
-            </a:r>
-          </a:p>
-        </p:txBody>
-      </p:sp>
-      <p:sp>
-        <p:nvSpPr>
-          <p:cNvPr id="26" name="TextBox 25">
-            <a:extLst>
-              <a:ext uri="{FF2B5EF4-FFF2-40B4-BE49-F238E27FC236}">
-                <a16:creationId xmlns:a16="http://schemas.microsoft.com/office/drawing/2014/main" id="{63DA3473-8780-494C-8D9C-4086F1D06A63}"/>
-              </a:ext>
-            </a:extLst>
-          </p:cNvPr>
-          <p:cNvSpPr txBox="1"/>
-          <p:nvPr/>
-        </p:nvSpPr>
-        <p:spPr>
-          <a:xfrm>
-            <a:off x="1082487" y="3469826"/>
-            <a:ext cx="662361" cy="276999"/>
-          </a:xfrm>
-          <a:prstGeom prst="rect">
-            <a:avLst/>
-          </a:prstGeom>
-          <a:noFill/>
-        </p:spPr>
-        <p:txBody>
-          <a:bodyPr wrap="none" rtlCol="0">
-            <a:spAutoFit/>
-          </a:bodyPr>
-          <a:lstStyle/>
-          <a:p>
-            <a:r>
-              <a:rPr lang="en-US" sz="1200" dirty="0"/>
-              <a:t>14.10 -</a:t>
-            </a:r>
-          </a:p>
-        </p:txBody>
-      </p:sp>
-      <p:sp>
-        <p:nvSpPr>
-          <p:cNvPr id="27" name="TextBox 26">
-            <a:extLst>
-              <a:ext uri="{FF2B5EF4-FFF2-40B4-BE49-F238E27FC236}">
-                <a16:creationId xmlns:a16="http://schemas.microsoft.com/office/drawing/2014/main" id="{41F47461-4FA5-1F4E-B2BC-75B5E5DD97B3}"/>
-              </a:ext>
-            </a:extLst>
-          </p:cNvPr>
-          <p:cNvSpPr txBox="1"/>
-          <p:nvPr/>
-        </p:nvSpPr>
-        <p:spPr>
-          <a:xfrm>
-            <a:off x="1082487" y="3980043"/>
-            <a:ext cx="662361" cy="276999"/>
-          </a:xfrm>
-          <a:prstGeom prst="rect">
-            <a:avLst/>
-          </a:prstGeom>
-          <a:noFill/>
-        </p:spPr>
-        <p:txBody>
-          <a:bodyPr wrap="none" rtlCol="0">
-            <a:spAutoFit/>
-          </a:bodyPr>
-          <a:lstStyle/>
-          <a:p>
-            <a:r>
-              <a:rPr lang="en-US" sz="1200" dirty="0"/>
-              <a:t>16.10 -</a:t>
-            </a:r>
-          </a:p>
-        </p:txBody>
-      </p:sp>
       <p:pic>
         <p:nvPicPr>
           <p:cNvPr id="46" name="Google Shape;530;p82">
@@ -34237,7 +32531,7 @@
 </p:sld>
 </file>
 
-<file path=ppt/slides/slide49.xml><?xml version="1.0" encoding="utf-8"?>
+<file path=ppt/slides/slide47.xml><?xml version="1.0" encoding="utf-8"?>
 <p:sld xmlns:a="http://schemas.openxmlformats.org/drawingml/2006/main" xmlns:r="http://schemas.openxmlformats.org/officeDocument/2006/relationships" xmlns:p="http://schemas.openxmlformats.org/presentationml/2006/main">
   <p:cSld>
     <p:spTree>
@@ -35202,181 +33496,6 @@
           </a:fontRef>
         </p:style>
       </p:cxnSp>
-      <p:sp>
-        <p:nvSpPr>
-          <p:cNvPr id="8" name="TextBox 7">
-            <a:extLst>
-              <a:ext uri="{FF2B5EF4-FFF2-40B4-BE49-F238E27FC236}">
-                <a16:creationId xmlns:a16="http://schemas.microsoft.com/office/drawing/2014/main" id="{6F6F7B92-1FC8-F044-8809-FBF8C1B8F030}"/>
-              </a:ext>
-            </a:extLst>
-          </p:cNvPr>
-          <p:cNvSpPr txBox="1"/>
-          <p:nvPr/>
-        </p:nvSpPr>
-        <p:spPr>
-          <a:xfrm>
-            <a:off x="1082487" y="1951507"/>
-            <a:ext cx="662361" cy="276999"/>
-          </a:xfrm>
-          <a:prstGeom prst="rect">
-            <a:avLst/>
-          </a:prstGeom>
-          <a:noFill/>
-        </p:spPr>
-        <p:txBody>
-          <a:bodyPr wrap="none" rtlCol="0">
-            <a:spAutoFit/>
-          </a:bodyPr>
-          <a:lstStyle/>
-          <a:p>
-            <a:r>
-              <a:rPr lang="en-US" sz="1200" dirty="0"/>
-              <a:t>21.10 -</a:t>
-            </a:r>
-          </a:p>
-        </p:txBody>
-      </p:sp>
-      <p:sp>
-        <p:nvSpPr>
-          <p:cNvPr id="24" name="TextBox 23">
-            <a:extLst>
-              <a:ext uri="{FF2B5EF4-FFF2-40B4-BE49-F238E27FC236}">
-                <a16:creationId xmlns:a16="http://schemas.microsoft.com/office/drawing/2014/main" id="{E5434182-F8BC-6A45-B76D-A6DDAA3D9E00}"/>
-              </a:ext>
-            </a:extLst>
-          </p:cNvPr>
-          <p:cNvSpPr txBox="1"/>
-          <p:nvPr/>
-        </p:nvSpPr>
-        <p:spPr>
-          <a:xfrm>
-            <a:off x="1082487" y="2451661"/>
-            <a:ext cx="662361" cy="276999"/>
-          </a:xfrm>
-          <a:prstGeom prst="rect">
-            <a:avLst/>
-          </a:prstGeom>
-          <a:noFill/>
-        </p:spPr>
-        <p:txBody>
-          <a:bodyPr wrap="none" rtlCol="0">
-            <a:spAutoFit/>
-          </a:bodyPr>
-          <a:lstStyle/>
-          <a:p>
-            <a:r>
-              <a:rPr lang="en-US" sz="1200" dirty="0"/>
-              <a:t>23.10 -</a:t>
-            </a:r>
-          </a:p>
-        </p:txBody>
-      </p:sp>
-      <p:sp>
-        <p:nvSpPr>
-          <p:cNvPr id="25" name="TextBox 24">
-            <a:extLst>
-              <a:ext uri="{FF2B5EF4-FFF2-40B4-BE49-F238E27FC236}">
-                <a16:creationId xmlns:a16="http://schemas.microsoft.com/office/drawing/2014/main" id="{B1FFEC08-4192-194E-9CDB-196400C6DFCC}"/>
-              </a:ext>
-            </a:extLst>
-          </p:cNvPr>
-          <p:cNvSpPr txBox="1"/>
-          <p:nvPr/>
-        </p:nvSpPr>
-        <p:spPr>
-          <a:xfrm>
-            <a:off x="1082487" y="2966252"/>
-            <a:ext cx="662361" cy="276999"/>
-          </a:xfrm>
-          <a:prstGeom prst="rect">
-            <a:avLst/>
-          </a:prstGeom>
-          <a:noFill/>
-        </p:spPr>
-        <p:txBody>
-          <a:bodyPr wrap="none" rtlCol="0">
-            <a:spAutoFit/>
-          </a:bodyPr>
-          <a:lstStyle/>
-          <a:p>
-            <a:r>
-              <a:rPr lang="en-US" sz="1200" dirty="0"/>
-              <a:t>28.10 -</a:t>
-            </a:r>
-          </a:p>
-        </p:txBody>
-      </p:sp>
-      <p:sp>
-        <p:nvSpPr>
-          <p:cNvPr id="26" name="TextBox 25">
-            <a:extLst>
-              <a:ext uri="{FF2B5EF4-FFF2-40B4-BE49-F238E27FC236}">
-                <a16:creationId xmlns:a16="http://schemas.microsoft.com/office/drawing/2014/main" id="{63DA3473-8780-494C-8D9C-4086F1D06A63}"/>
-              </a:ext>
-            </a:extLst>
-          </p:cNvPr>
-          <p:cNvSpPr txBox="1"/>
-          <p:nvPr/>
-        </p:nvSpPr>
-        <p:spPr>
-          <a:xfrm>
-            <a:off x="1082487" y="3469826"/>
-            <a:ext cx="662361" cy="276999"/>
-          </a:xfrm>
-          <a:prstGeom prst="rect">
-            <a:avLst/>
-          </a:prstGeom>
-          <a:noFill/>
-        </p:spPr>
-        <p:txBody>
-          <a:bodyPr wrap="none" rtlCol="0">
-            <a:spAutoFit/>
-          </a:bodyPr>
-          <a:lstStyle/>
-          <a:p>
-            <a:r>
-              <a:rPr lang="en-US" sz="1200" dirty="0"/>
-              <a:t>30.10 -</a:t>
-            </a:r>
-          </a:p>
-        </p:txBody>
-      </p:sp>
-      <p:sp>
-        <p:nvSpPr>
-          <p:cNvPr id="27" name="TextBox 26">
-            <a:extLst>
-              <a:ext uri="{FF2B5EF4-FFF2-40B4-BE49-F238E27FC236}">
-                <a16:creationId xmlns:a16="http://schemas.microsoft.com/office/drawing/2014/main" id="{41F47461-4FA5-1F4E-B2BC-75B5E5DD97B3}"/>
-              </a:ext>
-            </a:extLst>
-          </p:cNvPr>
-          <p:cNvSpPr txBox="1"/>
-          <p:nvPr/>
-        </p:nvSpPr>
-        <p:spPr>
-          <a:xfrm>
-            <a:off x="1082487" y="3980043"/>
-            <a:ext cx="662361" cy="276999"/>
-          </a:xfrm>
-          <a:prstGeom prst="rect">
-            <a:avLst/>
-          </a:prstGeom>
-          <a:noFill/>
-        </p:spPr>
-        <p:txBody>
-          <a:bodyPr wrap="none" rtlCol="0">
-            <a:spAutoFit/>
-          </a:bodyPr>
-          <a:lstStyle/>
-          <a:p>
-            <a:r>
-              <a:rPr lang="en-US" sz="1200" dirty="0"/>
-              <a:t>11.11 -</a:t>
-            </a:r>
-          </a:p>
-        </p:txBody>
-      </p:sp>
       <p:pic>
         <p:nvPicPr>
           <p:cNvPr id="46" name="Google Shape;530;p82">
@@ -35505,270 +33624,7 @@
 </p:sld>
 </file>
 
-<file path=ppt/slides/slide5.xml><?xml version="1.0" encoding="utf-8"?>
-<p:sld xmlns:a="http://schemas.openxmlformats.org/drawingml/2006/main" xmlns:r="http://schemas.openxmlformats.org/officeDocument/2006/relationships" xmlns:p="http://schemas.openxmlformats.org/presentationml/2006/main">
-  <p:cSld>
-    <p:spTree>
-      <p:nvGrpSpPr>
-        <p:cNvPr id="1" name="Shape 295"/>
-        <p:cNvGrpSpPr/>
-        <p:nvPr/>
-      </p:nvGrpSpPr>
-      <p:grpSpPr>
-        <a:xfrm>
-          <a:off x="0" y="0"/>
-          <a:ext cx="0" cy="0"/>
-          <a:chOff x="0" y="0"/>
-          <a:chExt cx="0" cy="0"/>
-        </a:xfrm>
-      </p:grpSpPr>
-      <p:sp>
-        <p:nvSpPr>
-          <p:cNvPr id="296" name="Google Shape;296;p66"/>
-          <p:cNvSpPr txBox="1">
-            <a:spLocks noGrp="1"/>
-          </p:cNvSpPr>
-          <p:nvPr>
-            <p:ph type="body" idx="4294967295"/>
-          </p:nvPr>
-        </p:nvSpPr>
-        <p:spPr>
-          <a:xfrm>
-            <a:off x="560550" y="1665950"/>
-            <a:ext cx="7723800" cy="1629600"/>
-          </a:xfrm>
-          <a:prstGeom prst="rect">
-            <a:avLst/>
-          </a:prstGeom>
-          <a:noFill/>
-          <a:ln>
-            <a:noFill/>
-          </a:ln>
-        </p:spPr>
-        <p:txBody>
-          <a:bodyPr spcFirstLastPara="1" wrap="square" lIns="0" tIns="0" rIns="0" bIns="0" anchor="t" anchorCtr="0">
-            <a:noAutofit/>
-          </a:bodyPr>
-          <a:lstStyle/>
-          <a:p>
-            <a:pPr marL="457200" lvl="0" indent="-342900" algn="l" rtl="0">
-              <a:lnSpc>
-                <a:spcPct val="115000"/>
-              </a:lnSpc>
-              <a:spcBef>
-                <a:spcPts val="0"/>
-              </a:spcBef>
-              <a:spcAft>
-                <a:spcPts val="0"/>
-              </a:spcAft>
-              <a:buClr>
-                <a:srgbClr val="FF7700"/>
-              </a:buClr>
-              <a:buSzPts val="1800"/>
-              <a:buChar char="●"/>
-            </a:pPr>
-            <a:r>
-              <a:rPr lang="ru" sz="1800">
-                <a:solidFill>
-                  <a:srgbClr val="1E1F21"/>
-                </a:solidFill>
-              </a:rPr>
-              <a:t>Как вас зовут? Откуда вы? </a:t>
-            </a:r>
-            <a:endParaRPr sz="1800">
-              <a:solidFill>
-                <a:srgbClr val="1E1F21"/>
-              </a:solidFill>
-            </a:endParaRPr>
-          </a:p>
-          <a:p>
-            <a:pPr marL="457200" lvl="0" indent="-342900" algn="l" rtl="0">
-              <a:lnSpc>
-                <a:spcPct val="115000"/>
-              </a:lnSpc>
-              <a:spcBef>
-                <a:spcPts val="0"/>
-              </a:spcBef>
-              <a:spcAft>
-                <a:spcPts val="0"/>
-              </a:spcAft>
-              <a:buClr>
-                <a:srgbClr val="FF7700"/>
-              </a:buClr>
-              <a:buSzPts val="1800"/>
-              <a:buChar char="●"/>
-            </a:pPr>
-            <a:r>
-              <a:rPr lang="ru" sz="1800">
-                <a:solidFill>
-                  <a:srgbClr val="1E1F21"/>
-                </a:solidFill>
-              </a:rPr>
-              <a:t>Ваш опыт работы в IT?</a:t>
-            </a:r>
-            <a:endParaRPr sz="1800">
-              <a:solidFill>
-                <a:srgbClr val="1E1F21"/>
-              </a:solidFill>
-            </a:endParaRPr>
-          </a:p>
-          <a:p>
-            <a:pPr marL="457200" lvl="0" indent="-342900" algn="l" rtl="0">
-              <a:lnSpc>
-                <a:spcPct val="115000"/>
-              </a:lnSpc>
-              <a:spcBef>
-                <a:spcPts val="0"/>
-              </a:spcBef>
-              <a:spcAft>
-                <a:spcPts val="0"/>
-              </a:spcAft>
-              <a:buClr>
-                <a:srgbClr val="FF7700"/>
-              </a:buClr>
-              <a:buSzPts val="1800"/>
-              <a:buChar char="●"/>
-            </a:pPr>
-            <a:r>
-              <a:rPr lang="ru" sz="1800">
-                <a:solidFill>
-                  <a:srgbClr val="1E1F21"/>
-                </a:solidFill>
-              </a:rPr>
-              <a:t>С какой основной целью вы записались на занятие?</a:t>
-            </a:r>
-            <a:endParaRPr sz="1800">
-              <a:solidFill>
-                <a:srgbClr val="1E1F21"/>
-              </a:solidFill>
-            </a:endParaRPr>
-          </a:p>
-          <a:p>
-            <a:pPr marL="0" lvl="0" indent="0" algn="l" rtl="0">
-              <a:lnSpc>
-                <a:spcPct val="120000"/>
-              </a:lnSpc>
-              <a:spcBef>
-                <a:spcPts val="0"/>
-              </a:spcBef>
-              <a:spcAft>
-                <a:spcPts val="0"/>
-              </a:spcAft>
-              <a:buNone/>
-            </a:pPr>
-            <a:endParaRPr sz="1800">
-              <a:solidFill>
-                <a:srgbClr val="000000"/>
-              </a:solidFill>
-            </a:endParaRPr>
-          </a:p>
-        </p:txBody>
-      </p:sp>
-      <p:sp>
-        <p:nvSpPr>
-          <p:cNvPr id="297" name="Google Shape;297;p66"/>
-          <p:cNvSpPr txBox="1">
-            <a:spLocks noGrp="1"/>
-          </p:cNvSpPr>
-          <p:nvPr>
-            <p:ph type="title"/>
-          </p:nvPr>
-        </p:nvSpPr>
-        <p:spPr>
-          <a:xfrm>
-            <a:off x="500550" y="330736"/>
-            <a:ext cx="8520600" cy="979800"/>
-          </a:xfrm>
-          <a:prstGeom prst="rect">
-            <a:avLst/>
-          </a:prstGeom>
-        </p:spPr>
-        <p:txBody>
-          <a:bodyPr spcFirstLastPara="1" wrap="square" lIns="91425" tIns="91425" rIns="91425" bIns="91425" anchor="t" anchorCtr="0">
-            <a:noAutofit/>
-          </a:bodyPr>
-          <a:lstStyle/>
-          <a:p>
-            <a:pPr marL="0" lvl="0" indent="0" algn="l" rtl="0">
-              <a:spcBef>
-                <a:spcPts val="0"/>
-              </a:spcBef>
-              <a:spcAft>
-                <a:spcPts val="0"/>
-              </a:spcAft>
-              <a:buNone/>
-            </a:pPr>
-            <a:r>
-              <a:rPr lang="ru"/>
-              <a:t>Расскажите о себе</a:t>
-            </a:r>
-            <a:endParaRPr/>
-          </a:p>
-        </p:txBody>
-      </p:sp>
-      <p:pic>
-        <p:nvPicPr>
-          <p:cNvPr id="298" name="Google Shape;298;p66"/>
-          <p:cNvPicPr preferRelativeResize="0"/>
-          <p:nvPr/>
-        </p:nvPicPr>
-        <p:blipFill rotWithShape="1">
-          <a:blip r:embed="rId3">
-            <a:alphaModFix/>
-          </a:blip>
-          <a:srcRect/>
-          <a:stretch/>
-        </p:blipFill>
-        <p:spPr>
-          <a:xfrm>
-            <a:off x="880827" y="3412575"/>
-            <a:ext cx="620721" cy="620719"/>
-          </a:xfrm>
-          <a:prstGeom prst="rect">
-            <a:avLst/>
-          </a:prstGeom>
-          <a:noFill/>
-          <a:ln>
-            <a:noFill/>
-          </a:ln>
-        </p:spPr>
-      </p:pic>
-      <p:pic>
-        <p:nvPicPr>
-          <p:cNvPr id="299" name="Google Shape;299;p66"/>
-          <p:cNvPicPr preferRelativeResize="0"/>
-          <p:nvPr/>
-        </p:nvPicPr>
-        <p:blipFill rotWithShape="1">
-          <a:blip r:embed="rId4">
-            <a:alphaModFix/>
-          </a:blip>
-          <a:srcRect/>
-          <a:stretch/>
-        </p:blipFill>
-        <p:spPr>
-          <a:xfrm>
-            <a:off x="1646852" y="3412581"/>
-            <a:ext cx="620721" cy="620719"/>
-          </a:xfrm>
-          <a:prstGeom prst="rect">
-            <a:avLst/>
-          </a:prstGeom>
-          <a:noFill/>
-          <a:ln>
-            <a:noFill/>
-          </a:ln>
-        </p:spPr>
-      </p:pic>
-    </p:spTree>
-  </p:cSld>
-  <p:clrMapOvr>
-    <a:masterClrMapping/>
-  </p:clrMapOvr>
-</p:sld>
-</file>
-
-<file path=ppt/slides/slide50.xml><?xml version="1.0" encoding="utf-8"?>
+<file path=ppt/slides/slide48.xml><?xml version="1.0" encoding="utf-8"?>
 <p:sld xmlns:a="http://schemas.openxmlformats.org/drawingml/2006/main" xmlns:r="http://schemas.openxmlformats.org/officeDocument/2006/relationships" xmlns:p="http://schemas.openxmlformats.org/presentationml/2006/main">
   <p:cSld>
     <p:spTree>
@@ -36735,181 +34591,6 @@
           </a:fontRef>
         </p:style>
       </p:cxnSp>
-      <p:sp>
-        <p:nvSpPr>
-          <p:cNvPr id="8" name="TextBox 7">
-            <a:extLst>
-              <a:ext uri="{FF2B5EF4-FFF2-40B4-BE49-F238E27FC236}">
-                <a16:creationId xmlns:a16="http://schemas.microsoft.com/office/drawing/2014/main" id="{6F6F7B92-1FC8-F044-8809-FBF8C1B8F030}"/>
-              </a:ext>
-            </a:extLst>
-          </p:cNvPr>
-          <p:cNvSpPr txBox="1"/>
-          <p:nvPr/>
-        </p:nvSpPr>
-        <p:spPr>
-          <a:xfrm>
-            <a:off x="1082487" y="1951507"/>
-            <a:ext cx="662361" cy="276999"/>
-          </a:xfrm>
-          <a:prstGeom prst="rect">
-            <a:avLst/>
-          </a:prstGeom>
-          <a:noFill/>
-        </p:spPr>
-        <p:txBody>
-          <a:bodyPr wrap="none" rtlCol="0">
-            <a:spAutoFit/>
-          </a:bodyPr>
-          <a:lstStyle/>
-          <a:p>
-            <a:r>
-              <a:rPr lang="en-US" sz="1200" dirty="0"/>
-              <a:t>13.11 -</a:t>
-            </a:r>
-          </a:p>
-        </p:txBody>
-      </p:sp>
-      <p:sp>
-        <p:nvSpPr>
-          <p:cNvPr id="24" name="TextBox 23">
-            <a:extLst>
-              <a:ext uri="{FF2B5EF4-FFF2-40B4-BE49-F238E27FC236}">
-                <a16:creationId xmlns:a16="http://schemas.microsoft.com/office/drawing/2014/main" id="{E5434182-F8BC-6A45-B76D-A6DDAA3D9E00}"/>
-              </a:ext>
-            </a:extLst>
-          </p:cNvPr>
-          <p:cNvSpPr txBox="1"/>
-          <p:nvPr/>
-        </p:nvSpPr>
-        <p:spPr>
-          <a:xfrm>
-            <a:off x="1082487" y="2451661"/>
-            <a:ext cx="662361" cy="276999"/>
-          </a:xfrm>
-          <a:prstGeom prst="rect">
-            <a:avLst/>
-          </a:prstGeom>
-          <a:noFill/>
-        </p:spPr>
-        <p:txBody>
-          <a:bodyPr wrap="none" rtlCol="0">
-            <a:spAutoFit/>
-          </a:bodyPr>
-          <a:lstStyle/>
-          <a:p>
-            <a:r>
-              <a:rPr lang="en-US" sz="1200" dirty="0"/>
-              <a:t>18.11 -</a:t>
-            </a:r>
-          </a:p>
-        </p:txBody>
-      </p:sp>
-      <p:sp>
-        <p:nvSpPr>
-          <p:cNvPr id="25" name="TextBox 24">
-            <a:extLst>
-              <a:ext uri="{FF2B5EF4-FFF2-40B4-BE49-F238E27FC236}">
-                <a16:creationId xmlns:a16="http://schemas.microsoft.com/office/drawing/2014/main" id="{B1FFEC08-4192-194E-9CDB-196400C6DFCC}"/>
-              </a:ext>
-            </a:extLst>
-          </p:cNvPr>
-          <p:cNvSpPr txBox="1"/>
-          <p:nvPr/>
-        </p:nvSpPr>
-        <p:spPr>
-          <a:xfrm>
-            <a:off x="1082487" y="2966252"/>
-            <a:ext cx="662361" cy="276999"/>
-          </a:xfrm>
-          <a:prstGeom prst="rect">
-            <a:avLst/>
-          </a:prstGeom>
-          <a:noFill/>
-        </p:spPr>
-        <p:txBody>
-          <a:bodyPr wrap="none" rtlCol="0">
-            <a:spAutoFit/>
-          </a:bodyPr>
-          <a:lstStyle/>
-          <a:p>
-            <a:r>
-              <a:rPr lang="en-US" sz="1200" dirty="0"/>
-              <a:t>20.11 -</a:t>
-            </a:r>
-          </a:p>
-        </p:txBody>
-      </p:sp>
-      <p:sp>
-        <p:nvSpPr>
-          <p:cNvPr id="26" name="TextBox 25">
-            <a:extLst>
-              <a:ext uri="{FF2B5EF4-FFF2-40B4-BE49-F238E27FC236}">
-                <a16:creationId xmlns:a16="http://schemas.microsoft.com/office/drawing/2014/main" id="{63DA3473-8780-494C-8D9C-4086F1D06A63}"/>
-              </a:ext>
-            </a:extLst>
-          </p:cNvPr>
-          <p:cNvSpPr txBox="1"/>
-          <p:nvPr/>
-        </p:nvSpPr>
-        <p:spPr>
-          <a:xfrm>
-            <a:off x="1082487" y="3469826"/>
-            <a:ext cx="662361" cy="276999"/>
-          </a:xfrm>
-          <a:prstGeom prst="rect">
-            <a:avLst/>
-          </a:prstGeom>
-          <a:noFill/>
-        </p:spPr>
-        <p:txBody>
-          <a:bodyPr wrap="none" rtlCol="0">
-            <a:spAutoFit/>
-          </a:bodyPr>
-          <a:lstStyle/>
-          <a:p>
-            <a:r>
-              <a:rPr lang="en-US" sz="1200" dirty="0"/>
-              <a:t>25.11 -</a:t>
-            </a:r>
-          </a:p>
-        </p:txBody>
-      </p:sp>
-      <p:sp>
-        <p:nvSpPr>
-          <p:cNvPr id="27" name="TextBox 26">
-            <a:extLst>
-              <a:ext uri="{FF2B5EF4-FFF2-40B4-BE49-F238E27FC236}">
-                <a16:creationId xmlns:a16="http://schemas.microsoft.com/office/drawing/2014/main" id="{41F47461-4FA5-1F4E-B2BC-75B5E5DD97B3}"/>
-              </a:ext>
-            </a:extLst>
-          </p:cNvPr>
-          <p:cNvSpPr txBox="1"/>
-          <p:nvPr/>
-        </p:nvSpPr>
-        <p:spPr>
-          <a:xfrm>
-            <a:off x="1082487" y="3980043"/>
-            <a:ext cx="662361" cy="276999"/>
-          </a:xfrm>
-          <a:prstGeom prst="rect">
-            <a:avLst/>
-          </a:prstGeom>
-          <a:noFill/>
-        </p:spPr>
-        <p:txBody>
-          <a:bodyPr wrap="none" rtlCol="0">
-            <a:spAutoFit/>
-          </a:bodyPr>
-          <a:lstStyle/>
-          <a:p>
-            <a:r>
-              <a:rPr lang="en-US" sz="1200" dirty="0"/>
-              <a:t>27.11 -</a:t>
-            </a:r>
-          </a:p>
-        </p:txBody>
-      </p:sp>
       <p:pic>
         <p:nvPicPr>
           <p:cNvPr id="46" name="Google Shape;530;p82">
@@ -37038,7 +34719,7 @@
 </p:sld>
 </file>
 
-<file path=ppt/slides/slide51.xml><?xml version="1.0" encoding="utf-8"?>
+<file path=ppt/slides/slide49.xml><?xml version="1.0" encoding="utf-8"?>
 <p:sld xmlns:a="http://schemas.openxmlformats.org/drawingml/2006/main" xmlns:r="http://schemas.openxmlformats.org/officeDocument/2006/relationships" xmlns:p="http://schemas.openxmlformats.org/presentationml/2006/main">
   <p:cSld>
     <p:spTree>
@@ -37997,181 +35678,6 @@
           </a:fontRef>
         </p:style>
       </p:cxnSp>
-      <p:sp>
-        <p:nvSpPr>
-          <p:cNvPr id="8" name="TextBox 7">
-            <a:extLst>
-              <a:ext uri="{FF2B5EF4-FFF2-40B4-BE49-F238E27FC236}">
-                <a16:creationId xmlns:a16="http://schemas.microsoft.com/office/drawing/2014/main" id="{6F6F7B92-1FC8-F044-8809-FBF8C1B8F030}"/>
-              </a:ext>
-            </a:extLst>
-          </p:cNvPr>
-          <p:cNvSpPr txBox="1"/>
-          <p:nvPr/>
-        </p:nvSpPr>
-        <p:spPr>
-          <a:xfrm>
-            <a:off x="1082487" y="1951507"/>
-            <a:ext cx="662361" cy="276999"/>
-          </a:xfrm>
-          <a:prstGeom prst="rect">
-            <a:avLst/>
-          </a:prstGeom>
-          <a:noFill/>
-        </p:spPr>
-        <p:txBody>
-          <a:bodyPr wrap="none" rtlCol="0">
-            <a:spAutoFit/>
-          </a:bodyPr>
-          <a:lstStyle/>
-          <a:p>
-            <a:r>
-              <a:rPr lang="en-US" sz="1200" dirty="0"/>
-              <a:t>02.12 -</a:t>
-            </a:r>
-          </a:p>
-        </p:txBody>
-      </p:sp>
-      <p:sp>
-        <p:nvSpPr>
-          <p:cNvPr id="24" name="TextBox 23">
-            <a:extLst>
-              <a:ext uri="{FF2B5EF4-FFF2-40B4-BE49-F238E27FC236}">
-                <a16:creationId xmlns:a16="http://schemas.microsoft.com/office/drawing/2014/main" id="{E5434182-F8BC-6A45-B76D-A6DDAA3D9E00}"/>
-              </a:ext>
-            </a:extLst>
-          </p:cNvPr>
-          <p:cNvSpPr txBox="1"/>
-          <p:nvPr/>
-        </p:nvSpPr>
-        <p:spPr>
-          <a:xfrm>
-            <a:off x="1082487" y="2451661"/>
-            <a:ext cx="662361" cy="276999"/>
-          </a:xfrm>
-          <a:prstGeom prst="rect">
-            <a:avLst/>
-          </a:prstGeom>
-          <a:noFill/>
-        </p:spPr>
-        <p:txBody>
-          <a:bodyPr wrap="none" rtlCol="0">
-            <a:spAutoFit/>
-          </a:bodyPr>
-          <a:lstStyle/>
-          <a:p>
-            <a:r>
-              <a:rPr lang="en-US" sz="1200" dirty="0"/>
-              <a:t>04.12 -</a:t>
-            </a:r>
-          </a:p>
-        </p:txBody>
-      </p:sp>
-      <p:sp>
-        <p:nvSpPr>
-          <p:cNvPr id="25" name="TextBox 24">
-            <a:extLst>
-              <a:ext uri="{FF2B5EF4-FFF2-40B4-BE49-F238E27FC236}">
-                <a16:creationId xmlns:a16="http://schemas.microsoft.com/office/drawing/2014/main" id="{B1FFEC08-4192-194E-9CDB-196400C6DFCC}"/>
-              </a:ext>
-            </a:extLst>
-          </p:cNvPr>
-          <p:cNvSpPr txBox="1"/>
-          <p:nvPr/>
-        </p:nvSpPr>
-        <p:spPr>
-          <a:xfrm>
-            <a:off x="1082487" y="2966252"/>
-            <a:ext cx="662361" cy="276999"/>
-          </a:xfrm>
-          <a:prstGeom prst="rect">
-            <a:avLst/>
-          </a:prstGeom>
-          <a:noFill/>
-        </p:spPr>
-        <p:txBody>
-          <a:bodyPr wrap="none" rtlCol="0">
-            <a:spAutoFit/>
-          </a:bodyPr>
-          <a:lstStyle/>
-          <a:p>
-            <a:r>
-              <a:rPr lang="en-US" sz="1200" dirty="0"/>
-              <a:t>09.12 -</a:t>
-            </a:r>
-          </a:p>
-        </p:txBody>
-      </p:sp>
-      <p:sp>
-        <p:nvSpPr>
-          <p:cNvPr id="26" name="TextBox 25">
-            <a:extLst>
-              <a:ext uri="{FF2B5EF4-FFF2-40B4-BE49-F238E27FC236}">
-                <a16:creationId xmlns:a16="http://schemas.microsoft.com/office/drawing/2014/main" id="{63DA3473-8780-494C-8D9C-4086F1D06A63}"/>
-              </a:ext>
-            </a:extLst>
-          </p:cNvPr>
-          <p:cNvSpPr txBox="1"/>
-          <p:nvPr/>
-        </p:nvSpPr>
-        <p:spPr>
-          <a:xfrm>
-            <a:off x="1082487" y="3469826"/>
-            <a:ext cx="662361" cy="276999"/>
-          </a:xfrm>
-          <a:prstGeom prst="rect">
-            <a:avLst/>
-          </a:prstGeom>
-          <a:noFill/>
-        </p:spPr>
-        <p:txBody>
-          <a:bodyPr wrap="none" rtlCol="0">
-            <a:spAutoFit/>
-          </a:bodyPr>
-          <a:lstStyle/>
-          <a:p>
-            <a:r>
-              <a:rPr lang="en-US" sz="1200" dirty="0"/>
-              <a:t>30.01 -</a:t>
-            </a:r>
-          </a:p>
-        </p:txBody>
-      </p:sp>
-      <p:sp>
-        <p:nvSpPr>
-          <p:cNvPr id="27" name="TextBox 26">
-            <a:extLst>
-              <a:ext uri="{FF2B5EF4-FFF2-40B4-BE49-F238E27FC236}">
-                <a16:creationId xmlns:a16="http://schemas.microsoft.com/office/drawing/2014/main" id="{41F47461-4FA5-1F4E-B2BC-75B5E5DD97B3}"/>
-              </a:ext>
-            </a:extLst>
-          </p:cNvPr>
-          <p:cNvSpPr txBox="1"/>
-          <p:nvPr/>
-        </p:nvSpPr>
-        <p:spPr>
-          <a:xfrm>
-            <a:off x="1082487" y="3980043"/>
-            <a:ext cx="662361" cy="276999"/>
-          </a:xfrm>
-          <a:prstGeom prst="rect">
-            <a:avLst/>
-          </a:prstGeom>
-          <a:noFill/>
-        </p:spPr>
-        <p:txBody>
-          <a:bodyPr wrap="none" rtlCol="0">
-            <a:spAutoFit/>
-          </a:bodyPr>
-          <a:lstStyle/>
-          <a:p>
-            <a:r>
-              <a:rPr lang="en-US" sz="1200" dirty="0"/>
-              <a:t>04.02 -</a:t>
-            </a:r>
-          </a:p>
-        </p:txBody>
-      </p:sp>
       <p:pic>
         <p:nvPicPr>
           <p:cNvPr id="28" name="Google Shape;225;p40">
@@ -38216,7 +35722,270 @@
 </p:sld>
 </file>
 
-<file path=ppt/slides/slide52.xml><?xml version="1.0" encoding="utf-8"?>
+<file path=ppt/slides/slide5.xml><?xml version="1.0" encoding="utf-8"?>
+<p:sld xmlns:a="http://schemas.openxmlformats.org/drawingml/2006/main" xmlns:r="http://schemas.openxmlformats.org/officeDocument/2006/relationships" xmlns:p="http://schemas.openxmlformats.org/presentationml/2006/main">
+  <p:cSld>
+    <p:spTree>
+      <p:nvGrpSpPr>
+        <p:cNvPr id="1" name="Shape 295"/>
+        <p:cNvGrpSpPr/>
+        <p:nvPr/>
+      </p:nvGrpSpPr>
+      <p:grpSpPr>
+        <a:xfrm>
+          <a:off x="0" y="0"/>
+          <a:ext cx="0" cy="0"/>
+          <a:chOff x="0" y="0"/>
+          <a:chExt cx="0" cy="0"/>
+        </a:xfrm>
+      </p:grpSpPr>
+      <p:sp>
+        <p:nvSpPr>
+          <p:cNvPr id="296" name="Google Shape;296;p66"/>
+          <p:cNvSpPr txBox="1">
+            <a:spLocks noGrp="1"/>
+          </p:cNvSpPr>
+          <p:nvPr>
+            <p:ph type="body" idx="4294967295"/>
+          </p:nvPr>
+        </p:nvSpPr>
+        <p:spPr>
+          <a:xfrm>
+            <a:off x="560550" y="1665950"/>
+            <a:ext cx="7723800" cy="1629600"/>
+          </a:xfrm>
+          <a:prstGeom prst="rect">
+            <a:avLst/>
+          </a:prstGeom>
+          <a:noFill/>
+          <a:ln>
+            <a:noFill/>
+          </a:ln>
+        </p:spPr>
+        <p:txBody>
+          <a:bodyPr spcFirstLastPara="1" wrap="square" lIns="0" tIns="0" rIns="0" bIns="0" anchor="t" anchorCtr="0">
+            <a:noAutofit/>
+          </a:bodyPr>
+          <a:lstStyle/>
+          <a:p>
+            <a:pPr marL="457200" lvl="0" indent="-342900" algn="l" rtl="0">
+              <a:lnSpc>
+                <a:spcPct val="115000"/>
+              </a:lnSpc>
+              <a:spcBef>
+                <a:spcPts val="0"/>
+              </a:spcBef>
+              <a:spcAft>
+                <a:spcPts val="0"/>
+              </a:spcAft>
+              <a:buClr>
+                <a:srgbClr val="FF7700"/>
+              </a:buClr>
+              <a:buSzPts val="1800"/>
+              <a:buChar char="●"/>
+            </a:pPr>
+            <a:r>
+              <a:rPr lang="ru" sz="1800">
+                <a:solidFill>
+                  <a:srgbClr val="1E1F21"/>
+                </a:solidFill>
+              </a:rPr>
+              <a:t>Как вас зовут? Откуда вы? </a:t>
+            </a:r>
+            <a:endParaRPr sz="1800">
+              <a:solidFill>
+                <a:srgbClr val="1E1F21"/>
+              </a:solidFill>
+            </a:endParaRPr>
+          </a:p>
+          <a:p>
+            <a:pPr marL="457200" lvl="0" indent="-342900" algn="l" rtl="0">
+              <a:lnSpc>
+                <a:spcPct val="115000"/>
+              </a:lnSpc>
+              <a:spcBef>
+                <a:spcPts val="0"/>
+              </a:spcBef>
+              <a:spcAft>
+                <a:spcPts val="0"/>
+              </a:spcAft>
+              <a:buClr>
+                <a:srgbClr val="FF7700"/>
+              </a:buClr>
+              <a:buSzPts val="1800"/>
+              <a:buChar char="●"/>
+            </a:pPr>
+            <a:r>
+              <a:rPr lang="ru" sz="1800">
+                <a:solidFill>
+                  <a:srgbClr val="1E1F21"/>
+                </a:solidFill>
+              </a:rPr>
+              <a:t>Ваш опыт работы в IT?</a:t>
+            </a:r>
+            <a:endParaRPr sz="1800">
+              <a:solidFill>
+                <a:srgbClr val="1E1F21"/>
+              </a:solidFill>
+            </a:endParaRPr>
+          </a:p>
+          <a:p>
+            <a:pPr marL="457200" lvl="0" indent="-342900" algn="l" rtl="0">
+              <a:lnSpc>
+                <a:spcPct val="115000"/>
+              </a:lnSpc>
+              <a:spcBef>
+                <a:spcPts val="0"/>
+              </a:spcBef>
+              <a:spcAft>
+                <a:spcPts val="0"/>
+              </a:spcAft>
+              <a:buClr>
+                <a:srgbClr val="FF7700"/>
+              </a:buClr>
+              <a:buSzPts val="1800"/>
+              <a:buChar char="●"/>
+            </a:pPr>
+            <a:r>
+              <a:rPr lang="ru" sz="1800">
+                <a:solidFill>
+                  <a:srgbClr val="1E1F21"/>
+                </a:solidFill>
+              </a:rPr>
+              <a:t>С какой основной целью вы записались на занятие?</a:t>
+            </a:r>
+            <a:endParaRPr sz="1800">
+              <a:solidFill>
+                <a:srgbClr val="1E1F21"/>
+              </a:solidFill>
+            </a:endParaRPr>
+          </a:p>
+          <a:p>
+            <a:pPr marL="0" lvl="0" indent="0" algn="l" rtl="0">
+              <a:lnSpc>
+                <a:spcPct val="120000"/>
+              </a:lnSpc>
+              <a:spcBef>
+                <a:spcPts val="0"/>
+              </a:spcBef>
+              <a:spcAft>
+                <a:spcPts val="0"/>
+              </a:spcAft>
+              <a:buNone/>
+            </a:pPr>
+            <a:endParaRPr sz="1800">
+              <a:solidFill>
+                <a:srgbClr val="000000"/>
+              </a:solidFill>
+            </a:endParaRPr>
+          </a:p>
+        </p:txBody>
+      </p:sp>
+      <p:sp>
+        <p:nvSpPr>
+          <p:cNvPr id="297" name="Google Shape;297;p66"/>
+          <p:cNvSpPr txBox="1">
+            <a:spLocks noGrp="1"/>
+          </p:cNvSpPr>
+          <p:nvPr>
+            <p:ph type="title"/>
+          </p:nvPr>
+        </p:nvSpPr>
+        <p:spPr>
+          <a:xfrm>
+            <a:off x="500550" y="330736"/>
+            <a:ext cx="8520600" cy="979800"/>
+          </a:xfrm>
+          <a:prstGeom prst="rect">
+            <a:avLst/>
+          </a:prstGeom>
+        </p:spPr>
+        <p:txBody>
+          <a:bodyPr spcFirstLastPara="1" wrap="square" lIns="91425" tIns="91425" rIns="91425" bIns="91425" anchor="t" anchorCtr="0">
+            <a:noAutofit/>
+          </a:bodyPr>
+          <a:lstStyle/>
+          <a:p>
+            <a:pPr marL="0" lvl="0" indent="0" algn="l" rtl="0">
+              <a:spcBef>
+                <a:spcPts val="0"/>
+              </a:spcBef>
+              <a:spcAft>
+                <a:spcPts val="0"/>
+              </a:spcAft>
+              <a:buNone/>
+            </a:pPr>
+            <a:r>
+              <a:rPr lang="ru"/>
+              <a:t>Расскажите о себе</a:t>
+            </a:r>
+            <a:endParaRPr/>
+          </a:p>
+        </p:txBody>
+      </p:sp>
+      <p:pic>
+        <p:nvPicPr>
+          <p:cNvPr id="298" name="Google Shape;298;p66"/>
+          <p:cNvPicPr preferRelativeResize="0"/>
+          <p:nvPr/>
+        </p:nvPicPr>
+        <p:blipFill rotWithShape="1">
+          <a:blip r:embed="rId3">
+            <a:alphaModFix/>
+          </a:blip>
+          <a:srcRect/>
+          <a:stretch/>
+        </p:blipFill>
+        <p:spPr>
+          <a:xfrm>
+            <a:off x="880827" y="3412575"/>
+            <a:ext cx="620721" cy="620719"/>
+          </a:xfrm>
+          <a:prstGeom prst="rect">
+            <a:avLst/>
+          </a:prstGeom>
+          <a:noFill/>
+          <a:ln>
+            <a:noFill/>
+          </a:ln>
+        </p:spPr>
+      </p:pic>
+      <p:pic>
+        <p:nvPicPr>
+          <p:cNvPr id="299" name="Google Shape;299;p66"/>
+          <p:cNvPicPr preferRelativeResize="0"/>
+          <p:nvPr/>
+        </p:nvPicPr>
+        <p:blipFill rotWithShape="1">
+          <a:blip r:embed="rId4">
+            <a:alphaModFix/>
+          </a:blip>
+          <a:srcRect/>
+          <a:stretch/>
+        </p:blipFill>
+        <p:spPr>
+          <a:xfrm>
+            <a:off x="1646852" y="3412581"/>
+            <a:ext cx="620721" cy="620719"/>
+          </a:xfrm>
+          <a:prstGeom prst="rect">
+            <a:avLst/>
+          </a:prstGeom>
+          <a:noFill/>
+          <a:ln>
+            <a:noFill/>
+          </a:ln>
+        </p:spPr>
+      </p:pic>
+    </p:spTree>
+  </p:cSld>
+  <p:clrMapOvr>
+    <a:masterClrMapping/>
+  </p:clrMapOvr>
+</p:sld>
+</file>
+
+<file path=ppt/slides/slide50.xml><?xml version="1.0" encoding="utf-8"?>
 <p:sld xmlns:a="http://schemas.openxmlformats.org/drawingml/2006/main" xmlns:r="http://schemas.openxmlformats.org/officeDocument/2006/relationships" xmlns:p="http://schemas.openxmlformats.org/presentationml/2006/main">
   <p:cSld>
     <p:spTree>
@@ -38279,7 +36048,7 @@
 </p:sld>
 </file>
 
-<file path=ppt/slides/slide53.xml><?xml version="1.0" encoding="utf-8"?>
+<file path=ppt/slides/slide51.xml><?xml version="1.0" encoding="utf-8"?>
 <p:sld xmlns:a="http://schemas.openxmlformats.org/drawingml/2006/main" xmlns:r="http://schemas.openxmlformats.org/officeDocument/2006/relationships" xmlns:p="http://schemas.openxmlformats.org/presentationml/2006/main">
   <p:cSld>
     <p:spTree>
@@ -39530,7 +37299,7 @@
 </p:sld>
 </file>
 
-<file path=ppt/slides/slide54.xml><?xml version="1.0" encoding="utf-8"?>
+<file path=ppt/slides/slide52.xml><?xml version="1.0" encoding="utf-8"?>
 <p:sld xmlns:a="http://schemas.openxmlformats.org/drawingml/2006/main" xmlns:r="http://schemas.openxmlformats.org/officeDocument/2006/relationships" xmlns:p="http://schemas.openxmlformats.org/presentationml/2006/main">
   <p:cSld>
     <p:spTree>
@@ -39742,7 +37511,19 @@
                 <a:cs typeface="Roboto"/>
                 <a:sym typeface="Roboto"/>
               </a:rPr>
-              <a:t>31</a:t>
+              <a:t>3</a:t>
+            </a:r>
+            <a:r>
+              <a:rPr lang="en-US" sz="1800" b="1" i="1" dirty="0">
+                <a:solidFill>
+                  <a:schemeClr val="dk1"/>
+                </a:solidFill>
+                <a:latin typeface="Roboto"/>
+                <a:ea typeface="Roboto"/>
+                <a:cs typeface="Roboto"/>
+                <a:sym typeface="Roboto"/>
+              </a:rPr>
+              <a:t>0</a:t>
             </a:r>
             <a:r>
               <a:rPr lang="ru" sz="1800" b="1" i="1" dirty="0">
@@ -39766,19 +37547,7 @@
                 <a:cs typeface="Roboto"/>
                 <a:sym typeface="Roboto"/>
               </a:rPr>
-              <a:t>0</a:t>
-            </a:r>
-            <a:r>
-              <a:rPr lang="ru-RU" sz="1800" b="1" i="1" dirty="0">
-                <a:solidFill>
-                  <a:schemeClr val="dk1"/>
-                </a:solidFill>
-                <a:latin typeface="Roboto"/>
-                <a:ea typeface="Roboto"/>
-                <a:cs typeface="Roboto"/>
-                <a:sym typeface="Roboto"/>
-              </a:rPr>
-              <a:t>7</a:t>
+              <a:t>01</a:t>
             </a:r>
             <a:r>
               <a:rPr lang="ru" sz="1800" b="1" i="1" dirty="0">
@@ -39802,7 +37571,7 @@
                 <a:cs typeface="Roboto"/>
                 <a:sym typeface="Roboto"/>
               </a:rPr>
-              <a:t>4</a:t>
+              <a:t>5</a:t>
             </a:r>
             <a:r>
               <a:rPr lang="ru" sz="1800" b="1" i="1" dirty="0">
@@ -39950,18 +37719,6 @@
               <a:t>Следующий открытый урок: </a:t>
             </a:r>
             <a:r>
-              <a:rPr lang="ru-RU" i="1" dirty="0">
-                <a:solidFill>
-                  <a:schemeClr val="dk1"/>
-                </a:solidFill>
-                <a:latin typeface="Roboto"/>
-                <a:ea typeface="Roboto"/>
-                <a:cs typeface="Roboto"/>
-                <a:sym typeface="Roboto"/>
-              </a:rPr>
-              <a:t>0</a:t>
-            </a:r>
-            <a:r>
               <a:rPr lang="en-US" i="1" dirty="0">
                 <a:solidFill>
                   <a:schemeClr val="dk1"/>
@@ -39971,7 +37728,7 @@
                 <a:cs typeface="Roboto"/>
                 <a:sym typeface="Roboto"/>
               </a:rPr>
-              <a:t>3</a:t>
+              <a:t>13</a:t>
             </a:r>
             <a:r>
               <a:rPr lang="ru" i="1" dirty="0">
@@ -39995,19 +37752,7 @@
                 <a:cs typeface="Roboto"/>
                 <a:sym typeface="Roboto"/>
               </a:rPr>
-              <a:t>0</a:t>
-            </a:r>
-            <a:r>
-              <a:rPr lang="ru-RU" i="1" dirty="0">
-                <a:solidFill>
-                  <a:schemeClr val="dk1"/>
-                </a:solidFill>
-                <a:latin typeface="Roboto"/>
-                <a:ea typeface="Roboto"/>
-                <a:cs typeface="Roboto"/>
-                <a:sym typeface="Roboto"/>
-              </a:rPr>
-              <a:t>7</a:t>
+              <a:t>01</a:t>
             </a:r>
             <a:r>
               <a:rPr lang="ru" i="1" dirty="0">
@@ -40031,7 +37776,7 @@
                 <a:cs typeface="Roboto"/>
                 <a:sym typeface="Roboto"/>
               </a:rPr>
-              <a:t>4</a:t>
+              <a:t>5</a:t>
             </a:r>
             <a:r>
               <a:rPr lang="ru" dirty="0">
@@ -40093,18 +37838,24 @@
               <a:buNone/>
             </a:pPr>
             <a:r>
-              <a:rPr lang="ru-RU" i="1" dirty="0">
+              <a:rPr lang="ru-RU" sz="1400" b="1" dirty="0">
                 <a:solidFill>
-                  <a:schemeClr val="dk1"/>
+                  <a:srgbClr val="0D0D0E"/>
                 </a:solidFill>
-                <a:latin typeface="Roboto"/>
-                <a:ea typeface="Roboto"/>
-                <a:cs typeface="Roboto"/>
-                <a:sym typeface="Roboto"/>
+                <a:latin typeface="HelveticaNeue" panose="02000503000000020004" pitchFamily="2" charset="0"/>
               </a:rPr>
-              <a:t>Как усилить технический анализ финансовых рынков методами машинного обучения</a:t>
+              <a:t>Корреляция признаков. </a:t>
             </a:r>
-            <a:endParaRPr i="1" dirty="0">
+            <a:r>
+              <a:rPr lang="en-US" sz="1400" b="1" dirty="0">
+                <a:solidFill>
+                  <a:srgbClr val="0D0D0E"/>
+                </a:solidFill>
+                <a:latin typeface="HelveticaNeue" panose="02000503000000020004" pitchFamily="2" charset="0"/>
+              </a:rPr>
+              <a:t>PCA</a:t>
+            </a:r>
+            <a:endParaRPr b="1" i="1" dirty="0">
               <a:solidFill>
                 <a:schemeClr val="dk1"/>
               </a:solidFill>
@@ -40124,7 +37875,7 @@
 </p:sld>
 </file>
 
-<file path=ppt/slides/slide55.xml><?xml version="1.0" encoding="utf-8"?>
+<file path=ppt/slides/slide53.xml><?xml version="1.0" encoding="utf-8"?>
 <p:sld xmlns:a="http://schemas.openxmlformats.org/drawingml/2006/main" xmlns:r="http://schemas.openxmlformats.org/officeDocument/2006/relationships" xmlns:p="http://schemas.openxmlformats.org/presentationml/2006/main">
   <p:cSld>
     <p:spTree>
